--- a/AS-Talent-Agency.pptx
+++ b/AS-Talent-Agency.pptx
@@ -2584,7 +2584,7 @@
       </p:sp>
       <p:pic>
         <p:nvPicPr>
-          <p:cNvPr id="4" name="Image 0" descr="/tmp/claude-0/-home-user-dasdsjfoisdjfoisj-github-io/f756b5b4-9ba5-5f42-afc2-0aa030ec1623/scratchpad/asdeck/assets/av-eli.png">    </p:cNvPr>
+          <p:cNvPr id="4" name="Image 0" descr="/tmp/claude-0/-home-user-dasdsjfoisdjfoisj-github-io/f756b5b4-9ba5-5f42-afc2-0aa030ec1623/scratchpad/asdeck/assets/av-elizabeth.png">    </p:cNvPr>
           <p:cNvPicPr>
             <a:picLocks noChangeAspect="1"/>
           </p:cNvPicPr>
@@ -2598,8 +2598,8 @@
         </p:blipFill>
         <p:spPr>
           <a:xfrm>
-            <a:off x="2025396" y="1508760"/>
-            <a:ext cx="1234440" cy="1234440"/>
+            <a:off x="1615402" y="1417320"/>
+            <a:ext cx="1051560" cy="1051560"/>
           </a:xfrm>
           <a:prstGeom prst="rect">
             <a:avLst/>
@@ -2614,8 +2614,50 @@
         </p:nvSpPr>
         <p:spPr>
           <a:xfrm>
-            <a:off x="950976" y="2816352"/>
-            <a:ext cx="3383280" cy="365760"/>
+            <a:off x="822960" y="2514600"/>
+            <a:ext cx="2636444" cy="457200"/>
+          </a:xfrm>
+          <a:prstGeom prst="rect">
+            <a:avLst/>
+          </a:prstGeom>
+          <a:noFill/>
+          <a:ln/>
+        </p:spPr>
+        <p:txBody>
+          <a:bodyPr wrap="square" rtlCol="0" anchor="t"/>
+          <a:lstStyle/>
+          <a:p>
+            <a:pPr algn="ctr" indent="0" marL="0">
+              <a:lnSpc>
+                <a:spcPct val="100000"/>
+              </a:lnSpc>
+              <a:buNone/>
+            </a:pPr>
+            <a:r>
+              <a:rPr lang="en-US" sz="1300" b="1" dirty="0">
+                <a:solidFill>
+                  <a:srgbClr val="FF3EA5"/>
+                </a:solidFill>
+                <a:latin typeface="Arial" pitchFamily="34" charset="0"/>
+                <a:ea typeface="Arial" pitchFamily="34" charset="-122"/>
+                <a:cs typeface="Arial" pitchFamily="34" charset="-120"/>
+              </a:rPr>
+              <a:t>ELIZABETH ANOKHINA</a:t>
+            </a:r>
+            <a:endParaRPr lang="en-US" sz="1300" dirty="0"/>
+          </a:p>
+        </p:txBody>
+      </p:sp>
+      <p:sp>
+        <p:nvSpPr>
+          <p:cNvPr id="6" name="Text 3"/>
+          <p:cNvSpPr/>
+          <p:nvPr/>
+        </p:nvSpPr>
+        <p:spPr>
+          <a:xfrm>
+            <a:off x="822960" y="3017520"/>
+            <a:ext cx="2636444" cy="274320"/>
           </a:xfrm>
           <a:prstGeom prst="rect">
             <a:avLst/>
@@ -2631,46 +2673,7 @@
               <a:buNone/>
             </a:pPr>
             <a:r>
-              <a:rPr lang="en-US" sz="1500" b="1" dirty="0">
-                <a:solidFill>
-                  <a:srgbClr val="FF3EA5"/>
-                </a:solidFill>
-                <a:latin typeface="Arial" pitchFamily="34" charset="0"/>
-                <a:ea typeface="Arial" pitchFamily="34" charset="-122"/>
-                <a:cs typeface="Arial" pitchFamily="34" charset="-120"/>
-              </a:rPr>
-              <a:t>ELI VASILENKO</a:t>
-            </a:r>
-            <a:endParaRPr lang="en-US" sz="1500" dirty="0"/>
-          </a:p>
-        </p:txBody>
-      </p:sp>
-      <p:sp>
-        <p:nvSpPr>
-          <p:cNvPr id="6" name="Text 3"/>
-          <p:cNvSpPr/>
-          <p:nvPr/>
-        </p:nvSpPr>
-        <p:spPr>
-          <a:xfrm>
-            <a:off x="950976" y="3200400"/>
-            <a:ext cx="3383280" cy="274320"/>
-          </a:xfrm>
-          <a:prstGeom prst="rect">
-            <a:avLst/>
-          </a:prstGeom>
-          <a:noFill/>
-          <a:ln/>
-        </p:spPr>
-        <p:txBody>
-          <a:bodyPr wrap="square" rtlCol="0" anchor="ctr"/>
-          <a:lstStyle/>
-          <a:p>
-            <a:pPr algn="ctr" indent="0" marL="0">
-              <a:buNone/>
-            </a:pPr>
-            <a:r>
-              <a:rPr lang="en-US" sz="1050" spc="100" kern="0" dirty="0">
+              <a:rPr lang="en-US" sz="1000" spc="100" kern="0" dirty="0">
                 <a:solidFill>
                   <a:srgbClr val="A6A6AE"/>
                 </a:solidFill>
@@ -2678,9 +2681,9 @@
                 <a:ea typeface="Arial" pitchFamily="34" charset="-122"/>
                 <a:cs typeface="Arial" pitchFamily="34" charset="-120"/>
               </a:rPr>
-              <a:t>10.5M FOLLOWERS</a:t>
-            </a:r>
-            <a:endParaRPr lang="en-US" sz="1050" dirty="0"/>
+              <a:t>45M FOLLOWERS</a:t>
+            </a:r>
+            <a:endParaRPr lang="en-US" sz="1000" dirty="0"/>
           </a:p>
         </p:txBody>
       </p:sp>
@@ -2692,8 +2695,8 @@
         </p:nvSpPr>
         <p:spPr>
           <a:xfrm>
-            <a:off x="2029968" y="3529584"/>
-            <a:ext cx="310896" cy="310896"/>
+            <a:off x="1601686" y="3337560"/>
+            <a:ext cx="274320" cy="274320"/>
           </a:xfrm>
           <a:prstGeom prst="ellipse">
             <a:avLst/>
@@ -2720,8 +2723,8 @@
         </p:blipFill>
         <p:spPr>
           <a:xfrm>
-            <a:off x="2098548" y="3598164"/>
-            <a:ext cx="173736" cy="173736"/>
+            <a:off x="1661122" y="3396996"/>
+            <a:ext cx="155448" cy="155448"/>
           </a:xfrm>
           <a:prstGeom prst="rect">
             <a:avLst/>
@@ -2736,8 +2739,8 @@
         </p:nvSpPr>
         <p:spPr>
           <a:xfrm>
-            <a:off x="2487168" y="3529584"/>
-            <a:ext cx="310896" cy="310896"/>
+            <a:off x="2004022" y="3337560"/>
+            <a:ext cx="274320" cy="274320"/>
           </a:xfrm>
           <a:prstGeom prst="ellipse">
             <a:avLst/>
@@ -2764,8 +2767,8 @@
         </p:blipFill>
         <p:spPr>
           <a:xfrm>
-            <a:off x="2555748" y="3598164"/>
-            <a:ext cx="173736" cy="173736"/>
+            <a:off x="2063458" y="3396996"/>
+            <a:ext cx="155448" cy="155448"/>
           </a:xfrm>
           <a:prstGeom prst="rect">
             <a:avLst/>
@@ -2780,8 +2783,8 @@
         </p:nvSpPr>
         <p:spPr>
           <a:xfrm>
-            <a:off x="2944368" y="3529584"/>
-            <a:ext cx="310896" cy="310896"/>
+            <a:off x="2406358" y="3337560"/>
+            <a:ext cx="274320" cy="274320"/>
           </a:xfrm>
           <a:prstGeom prst="ellipse">
             <a:avLst/>
@@ -2808,8 +2811,8 @@
         </p:blipFill>
         <p:spPr>
           <a:xfrm>
-            <a:off x="3012948" y="3598164"/>
-            <a:ext cx="173736" cy="173736"/>
+            <a:off x="2465794" y="3396996"/>
+            <a:ext cx="155448" cy="155448"/>
           </a:xfrm>
           <a:prstGeom prst="rect">
             <a:avLst/>
@@ -2818,7 +2821,7 @@
       </p:pic>
       <p:pic>
         <p:nvPicPr>
-          <p:cNvPr id="13" name="Image 4" descr="/tmp/claude-0/-home-user-dasdsjfoisdjfoisj-github-io/f756b5b4-9ba5-5f42-afc2-0aa030ec1623/scratchpad/asdeck/assets/av-caprice.png">    </p:cNvPr>
+          <p:cNvPr id="13" name="Image 4" descr="/tmp/claude-0/-home-user-dasdsjfoisdjfoisj-github-io/f756b5b4-9ba5-5f42-afc2-0aa030ec1623/scratchpad/asdeck/assets/av-eli.png">    </p:cNvPr>
           <p:cNvPicPr>
             <a:picLocks noChangeAspect="1"/>
           </p:cNvPicPr>
@@ -2832,8 +2835,8 @@
         </p:blipFill>
         <p:spPr>
           <a:xfrm>
-            <a:off x="5479085" y="1508760"/>
-            <a:ext cx="1234440" cy="1234440"/>
+            <a:off x="4251846" y="1417320"/>
+            <a:ext cx="1051560" cy="1051560"/>
           </a:xfrm>
           <a:prstGeom prst="rect">
             <a:avLst/>
@@ -2848,8 +2851,50 @@
         </p:nvSpPr>
         <p:spPr>
           <a:xfrm>
-            <a:off x="4404665" y="2816352"/>
-            <a:ext cx="3383280" cy="365760"/>
+            <a:off x="3459404" y="2514600"/>
+            <a:ext cx="2636444" cy="457200"/>
+          </a:xfrm>
+          <a:prstGeom prst="rect">
+            <a:avLst/>
+          </a:prstGeom>
+          <a:noFill/>
+          <a:ln/>
+        </p:spPr>
+        <p:txBody>
+          <a:bodyPr wrap="square" rtlCol="0" anchor="t"/>
+          <a:lstStyle/>
+          <a:p>
+            <a:pPr algn="ctr" indent="0" marL="0">
+              <a:lnSpc>
+                <a:spcPct val="100000"/>
+              </a:lnSpc>
+              <a:buNone/>
+            </a:pPr>
+            <a:r>
+              <a:rPr lang="en-US" sz="1300" b="1" dirty="0">
+                <a:solidFill>
+                  <a:srgbClr val="FF3EA5"/>
+                </a:solidFill>
+                <a:latin typeface="Arial" pitchFamily="34" charset="0"/>
+                <a:ea typeface="Arial" pitchFamily="34" charset="-122"/>
+                <a:cs typeface="Arial" pitchFamily="34" charset="-120"/>
+              </a:rPr>
+              <a:t>ELI VASILENKO</a:t>
+            </a:r>
+            <a:endParaRPr lang="en-US" sz="1300" dirty="0"/>
+          </a:p>
+        </p:txBody>
+      </p:sp>
+      <p:sp>
+        <p:nvSpPr>
+          <p:cNvPr id="15" name="Text 8"/>
+          <p:cNvSpPr/>
+          <p:nvPr/>
+        </p:nvSpPr>
+        <p:spPr>
+          <a:xfrm>
+            <a:off x="3459404" y="3017520"/>
+            <a:ext cx="2636444" cy="274320"/>
           </a:xfrm>
           <a:prstGeom prst="rect">
             <a:avLst/>
@@ -2865,46 +2910,7 @@
               <a:buNone/>
             </a:pPr>
             <a:r>
-              <a:rPr lang="en-US" sz="1500" b="1" dirty="0">
-                <a:solidFill>
-                  <a:srgbClr val="FF3EA5"/>
-                </a:solidFill>
-                <a:latin typeface="Arial" pitchFamily="34" charset="0"/>
-                <a:ea typeface="Arial" pitchFamily="34" charset="-122"/>
-                <a:cs typeface="Arial" pitchFamily="34" charset="-120"/>
-              </a:rPr>
-              <a:t>LITTLE CAPRICE</a:t>
-            </a:r>
-            <a:endParaRPr lang="en-US" sz="1500" dirty="0"/>
-          </a:p>
-        </p:txBody>
-      </p:sp>
-      <p:sp>
-        <p:nvSpPr>
-          <p:cNvPr id="15" name="Text 8"/>
-          <p:cNvSpPr/>
-          <p:nvPr/>
-        </p:nvSpPr>
-        <p:spPr>
-          <a:xfrm>
-            <a:off x="4404665" y="3200400"/>
-            <a:ext cx="3383280" cy="274320"/>
-          </a:xfrm>
-          <a:prstGeom prst="rect">
-            <a:avLst/>
-          </a:prstGeom>
-          <a:noFill/>
-          <a:ln/>
-        </p:spPr>
-        <p:txBody>
-          <a:bodyPr wrap="square" rtlCol="0" anchor="ctr"/>
-          <a:lstStyle/>
-          <a:p>
-            <a:pPr algn="ctr" indent="0" marL="0">
-              <a:buNone/>
-            </a:pPr>
-            <a:r>
-              <a:rPr lang="en-US" sz="1050" spc="100" kern="0" dirty="0">
+              <a:rPr lang="en-US" sz="1000" spc="100" kern="0" dirty="0">
                 <a:solidFill>
                   <a:srgbClr val="A6A6AE"/>
                 </a:solidFill>
@@ -2912,9 +2918,9 @@
                 <a:ea typeface="Arial" pitchFamily="34" charset="-122"/>
                 <a:cs typeface="Arial" pitchFamily="34" charset="-120"/>
               </a:rPr>
-              <a:t>11M FOLLOWERS</a:t>
-            </a:r>
-            <a:endParaRPr lang="en-US" sz="1050" dirty="0"/>
+              <a:t>10.5M FOLLOWERS</a:t>
+            </a:r>
+            <a:endParaRPr lang="en-US" sz="1000" dirty="0"/>
           </a:p>
         </p:txBody>
       </p:sp>
@@ -2926,8 +2932,8 @@
         </p:nvSpPr>
         <p:spPr>
           <a:xfrm>
-            <a:off x="5712257" y="3529584"/>
-            <a:ext cx="310896" cy="310896"/>
+            <a:off x="4238130" y="3337560"/>
+            <a:ext cx="274320" cy="274320"/>
           </a:xfrm>
           <a:prstGeom prst="ellipse">
             <a:avLst/>
@@ -2940,7 +2946,7 @@
       </p:sp>
       <p:pic>
         <p:nvPicPr>
-          <p:cNvPr id="17" name="Image 5" descr="/tmp/claude-0/-home-user-dasdsjfoisdjfoisj-github-io/f756b5b4-9ba5-5f42-afc2-0aa030ec1623/scratchpad/asdeck/assets/ic-tiktok.png">    </p:cNvPr>
+          <p:cNvPr id="17" name="Image 5" descr="/tmp/claude-0/-home-user-dasdsjfoisdjfoisj-github-io/f756b5b4-9ba5-5f42-afc2-0aa030ec1623/scratchpad/asdeck/assets/ic-x.png">    </p:cNvPr>
           <p:cNvPicPr>
             <a:picLocks noChangeAspect="1"/>
           </p:cNvPicPr>
@@ -2954,8 +2960,8 @@
         </p:blipFill>
         <p:spPr>
           <a:xfrm>
-            <a:off x="5780837" y="3598164"/>
-            <a:ext cx="173736" cy="173736"/>
+            <a:off x="4297566" y="3396996"/>
+            <a:ext cx="155448" cy="155448"/>
           </a:xfrm>
           <a:prstGeom prst="rect">
             <a:avLst/>
@@ -2970,8 +2976,8 @@
         </p:nvSpPr>
         <p:spPr>
           <a:xfrm>
-            <a:off x="6169457" y="3529584"/>
-            <a:ext cx="310896" cy="310896"/>
+            <a:off x="4640466" y="3337560"/>
+            <a:ext cx="274320" cy="274320"/>
           </a:xfrm>
           <a:prstGeom prst="ellipse">
             <a:avLst/>
@@ -2984,7 +2990,7 @@
       </p:sp>
       <p:pic>
         <p:nvPicPr>
-          <p:cNvPr id="19" name="Image 6" descr="/tmp/claude-0/-home-user-dasdsjfoisdjfoisj-github-io/f756b5b4-9ba5-5f42-afc2-0aa030ec1623/scratchpad/asdeck/assets/ic-instagram.png">    </p:cNvPr>
+          <p:cNvPr id="19" name="Image 6" descr="/tmp/claude-0/-home-user-dasdsjfoisdjfoisj-github-io/f756b5b4-9ba5-5f42-afc2-0aa030ec1623/scratchpad/asdeck/assets/ic-tiktok.png">    </p:cNvPr>
           <p:cNvPicPr>
             <a:picLocks noChangeAspect="1"/>
           </p:cNvPicPr>
@@ -2998,17 +3004,37 @@
         </p:blipFill>
         <p:spPr>
           <a:xfrm>
-            <a:off x="6238037" y="3598164"/>
-            <a:ext cx="173736" cy="173736"/>
+            <a:off x="4699902" y="3396996"/>
+            <a:ext cx="155448" cy="155448"/>
           </a:xfrm>
           <a:prstGeom prst="rect">
             <a:avLst/>
           </a:prstGeom>
         </p:spPr>
       </p:pic>
+      <p:sp>
+        <p:nvSpPr>
+          <p:cNvPr id="20" name="Shape 11"/>
+          <p:cNvSpPr/>
+          <p:nvPr/>
+        </p:nvSpPr>
+        <p:spPr>
+          <a:xfrm>
+            <a:off x="5042802" y="3337560"/>
+            <a:ext cx="274320" cy="274320"/>
+          </a:xfrm>
+          <a:prstGeom prst="ellipse">
+            <a:avLst/>
+          </a:prstGeom>
+          <a:solidFill>
+            <a:srgbClr val="F2F2F2"/>
+          </a:solidFill>
+          <a:ln/>
+        </p:spPr>
+      </p:sp>
       <p:pic>
         <p:nvPicPr>
-          <p:cNvPr id="20" name="Image 7" descr="/tmp/claude-0/-home-user-dasdsjfoisdjfoisj-github-io/f756b5b4-9ba5-5f42-afc2-0aa030ec1623/scratchpad/asdeck/assets/av-macca.png">    </p:cNvPr>
+          <p:cNvPr id="21" name="Image 7" descr="/tmp/claude-0/-home-user-dasdsjfoisdjfoisj-github-io/f756b5b4-9ba5-5f42-afc2-0aa030ec1623/scratchpad/asdeck/assets/ic-instagram.png">    </p:cNvPr>
           <p:cNvPicPr>
             <a:picLocks noChangeAspect="1"/>
           </p:cNvPicPr>
@@ -3022,115 +3048,17 @@
         </p:blipFill>
         <p:spPr>
           <a:xfrm>
-            <a:off x="8929116" y="1508760"/>
-            <a:ext cx="1234440" cy="1234440"/>
+            <a:off x="5102238" y="3396996"/>
+            <a:ext cx="155448" cy="155448"/>
           </a:xfrm>
           <a:prstGeom prst="rect">
             <a:avLst/>
           </a:prstGeom>
         </p:spPr>
       </p:pic>
-      <p:sp>
-        <p:nvSpPr>
-          <p:cNvPr id="21" name="Text 11"/>
-          <p:cNvSpPr/>
-          <p:nvPr/>
-        </p:nvSpPr>
-        <p:spPr>
-          <a:xfrm>
-            <a:off x="7854696" y="2816352"/>
-            <a:ext cx="3383280" cy="365760"/>
-          </a:xfrm>
-          <a:prstGeom prst="rect">
-            <a:avLst/>
-          </a:prstGeom>
-          <a:noFill/>
-          <a:ln/>
-        </p:spPr>
-        <p:txBody>
-          <a:bodyPr wrap="square" rtlCol="0" anchor="ctr"/>
-          <a:lstStyle/>
-          <a:p>
-            <a:pPr algn="ctr" indent="0" marL="0">
-              <a:buNone/>
-            </a:pPr>
-            <a:r>
-              <a:rPr lang="en-US" sz="1500" b="1" dirty="0">
-                <a:solidFill>
-                  <a:srgbClr val="FF3EA5"/>
-                </a:solidFill>
-                <a:latin typeface="Arial" pitchFamily="34" charset="0"/>
-                <a:ea typeface="Arial" pitchFamily="34" charset="-122"/>
-                <a:cs typeface="Arial" pitchFamily="34" charset="-120"/>
-              </a:rPr>
-              <a:t>MACCA</a:t>
-            </a:r>
-            <a:endParaRPr lang="en-US" sz="1500" dirty="0"/>
-          </a:p>
-        </p:txBody>
-      </p:sp>
-      <p:sp>
-        <p:nvSpPr>
-          <p:cNvPr id="22" name="Text 12"/>
-          <p:cNvSpPr/>
-          <p:nvPr/>
-        </p:nvSpPr>
-        <p:spPr>
-          <a:xfrm>
-            <a:off x="7854696" y="3200400"/>
-            <a:ext cx="3383280" cy="274320"/>
-          </a:xfrm>
-          <a:prstGeom prst="rect">
-            <a:avLst/>
-          </a:prstGeom>
-          <a:noFill/>
-          <a:ln/>
-        </p:spPr>
-        <p:txBody>
-          <a:bodyPr wrap="square" rtlCol="0" anchor="ctr"/>
-          <a:lstStyle/>
-          <a:p>
-            <a:pPr algn="ctr" indent="0" marL="0">
-              <a:buNone/>
-            </a:pPr>
-            <a:r>
-              <a:rPr lang="en-US" sz="1050" spc="100" kern="0" dirty="0">
-                <a:solidFill>
-                  <a:srgbClr val="A6A6AE"/>
-                </a:solidFill>
-                <a:latin typeface="Arial" pitchFamily="34" charset="0"/>
-                <a:ea typeface="Arial" pitchFamily="34" charset="-122"/>
-                <a:cs typeface="Arial" pitchFamily="34" charset="-120"/>
-              </a:rPr>
-              <a:t>1.5M FOLLOWERS</a:t>
-            </a:r>
-            <a:endParaRPr lang="en-US" sz="1050" dirty="0"/>
-          </a:p>
-        </p:txBody>
-      </p:sp>
-      <p:sp>
-        <p:nvSpPr>
-          <p:cNvPr id="23" name="Shape 13"/>
-          <p:cNvSpPr/>
-          <p:nvPr/>
-        </p:nvSpPr>
-        <p:spPr>
-          <a:xfrm>
-            <a:off x="8933688" y="3529584"/>
-            <a:ext cx="310896" cy="310896"/>
-          </a:xfrm>
-          <a:prstGeom prst="ellipse">
-            <a:avLst/>
-          </a:prstGeom>
-          <a:solidFill>
-            <a:srgbClr val="F2F2F2"/>
-          </a:solidFill>
-          <a:ln/>
-        </p:spPr>
-      </p:sp>
       <p:pic>
         <p:nvPicPr>
-          <p:cNvPr id="24" name="Image 8" descr="/tmp/claude-0/-home-user-dasdsjfoisdjfoisj-github-io/f756b5b4-9ba5-5f42-afc2-0aa030ec1623/scratchpad/asdeck/assets/ic-x.png">    </p:cNvPr>
+          <p:cNvPr id="22" name="Image 8" descr="/tmp/claude-0/-home-user-dasdsjfoisdjfoisj-github-io/f756b5b4-9ba5-5f42-afc2-0aa030ec1623/scratchpad/asdeck/assets/av-caprice.png">    </p:cNvPr>
           <p:cNvPicPr>
             <a:picLocks noChangeAspect="1"/>
           </p:cNvPicPr>
@@ -3144,8 +3072,8 @@
         </p:blipFill>
         <p:spPr>
           <a:xfrm>
-            <a:off x="9002268" y="3598164"/>
-            <a:ext cx="173736" cy="173736"/>
+            <a:off x="6888289" y="1417320"/>
+            <a:ext cx="1051560" cy="1051560"/>
           </a:xfrm>
           <a:prstGeom prst="rect">
             <a:avLst/>
@@ -3154,14 +3082,95 @@
       </p:pic>
       <p:sp>
         <p:nvSpPr>
+          <p:cNvPr id="23" name="Text 12"/>
+          <p:cNvSpPr/>
+          <p:nvPr/>
+        </p:nvSpPr>
+        <p:spPr>
+          <a:xfrm>
+            <a:off x="6095848" y="2514600"/>
+            <a:ext cx="2636444" cy="457200"/>
+          </a:xfrm>
+          <a:prstGeom prst="rect">
+            <a:avLst/>
+          </a:prstGeom>
+          <a:noFill/>
+          <a:ln/>
+        </p:spPr>
+        <p:txBody>
+          <a:bodyPr wrap="square" rtlCol="0" anchor="t"/>
+          <a:lstStyle/>
+          <a:p>
+            <a:pPr algn="ctr" indent="0" marL="0">
+              <a:lnSpc>
+                <a:spcPct val="100000"/>
+              </a:lnSpc>
+              <a:buNone/>
+            </a:pPr>
+            <a:r>
+              <a:rPr lang="en-US" sz="1300" b="1" dirty="0">
+                <a:solidFill>
+                  <a:srgbClr val="FF3EA5"/>
+                </a:solidFill>
+                <a:latin typeface="Arial" pitchFamily="34" charset="0"/>
+                <a:ea typeface="Arial" pitchFamily="34" charset="-122"/>
+                <a:cs typeface="Arial" pitchFamily="34" charset="-120"/>
+              </a:rPr>
+              <a:t>LITTLE CAPRICE</a:t>
+            </a:r>
+            <a:endParaRPr lang="en-US" sz="1300" dirty="0"/>
+          </a:p>
+        </p:txBody>
+      </p:sp>
+      <p:sp>
+        <p:nvSpPr>
+          <p:cNvPr id="24" name="Text 13"/>
+          <p:cNvSpPr/>
+          <p:nvPr/>
+        </p:nvSpPr>
+        <p:spPr>
+          <a:xfrm>
+            <a:off x="6095848" y="3017520"/>
+            <a:ext cx="2636444" cy="274320"/>
+          </a:xfrm>
+          <a:prstGeom prst="rect">
+            <a:avLst/>
+          </a:prstGeom>
+          <a:noFill/>
+          <a:ln/>
+        </p:spPr>
+        <p:txBody>
+          <a:bodyPr wrap="square" rtlCol="0" anchor="ctr"/>
+          <a:lstStyle/>
+          <a:p>
+            <a:pPr algn="ctr" indent="0" marL="0">
+              <a:buNone/>
+            </a:pPr>
+            <a:r>
+              <a:rPr lang="en-US" sz="1000" spc="100" kern="0" dirty="0">
+                <a:solidFill>
+                  <a:srgbClr val="A6A6AE"/>
+                </a:solidFill>
+                <a:latin typeface="Arial" pitchFamily="34" charset="0"/>
+                <a:ea typeface="Arial" pitchFamily="34" charset="-122"/>
+                <a:cs typeface="Arial" pitchFamily="34" charset="-120"/>
+              </a:rPr>
+              <a:t>11M FOLLOWERS</a:t>
+            </a:r>
+            <a:endParaRPr lang="en-US" sz="1000" dirty="0"/>
+          </a:p>
+        </p:txBody>
+      </p:sp>
+      <p:sp>
+        <p:nvSpPr>
           <p:cNvPr id="25" name="Shape 14"/>
           <p:cNvSpPr/>
           <p:nvPr/>
         </p:nvSpPr>
         <p:spPr>
           <a:xfrm>
-            <a:off x="9390888" y="3529584"/>
-            <a:ext cx="310896" cy="310896"/>
+            <a:off x="7075741" y="3337560"/>
+            <a:ext cx="274320" cy="274320"/>
           </a:xfrm>
           <a:prstGeom prst="ellipse">
             <a:avLst/>
@@ -3188,8 +3197,8 @@
         </p:blipFill>
         <p:spPr>
           <a:xfrm>
-            <a:off x="9459468" y="3598164"/>
-            <a:ext cx="173736" cy="173736"/>
+            <a:off x="7135178" y="3396996"/>
+            <a:ext cx="155448" cy="155448"/>
           </a:xfrm>
           <a:prstGeom prst="rect">
             <a:avLst/>
@@ -3204,8 +3213,8 @@
         </p:nvSpPr>
         <p:spPr>
           <a:xfrm>
-            <a:off x="9848088" y="3529584"/>
-            <a:ext cx="310896" cy="310896"/>
+            <a:off x="7478078" y="3337560"/>
+            <a:ext cx="274320" cy="274320"/>
           </a:xfrm>
           <a:prstGeom prst="ellipse">
             <a:avLst/>
@@ -3232,8 +3241,8 @@
         </p:blipFill>
         <p:spPr>
           <a:xfrm>
-            <a:off x="9916668" y="3598164"/>
-            <a:ext cx="173736" cy="173736"/>
+            <a:off x="7537513" y="3396996"/>
+            <a:ext cx="155448" cy="155448"/>
           </a:xfrm>
           <a:prstGeom prst="rect">
             <a:avLst/>
@@ -3242,7 +3251,7 @@
       </p:pic>
       <p:pic>
         <p:nvPicPr>
-          <p:cNvPr id="29" name="Image 11" descr="/tmp/claude-0/-home-user-dasdsjfoisdjfoisj-github-io/f756b5b4-9ba5-5f42-afc2-0aa030ec1623/scratchpad/asdeck/assets/av-kuri.png">    </p:cNvPr>
+          <p:cNvPr id="29" name="Image 11" descr="/tmp/claude-0/-home-user-dasdsjfoisdjfoisj-github-io/f756b5b4-9ba5-5f42-afc2-0aa030ec1623/scratchpad/asdeck/assets/av-macca.png">    </p:cNvPr>
           <p:cNvPicPr>
             <a:picLocks noChangeAspect="1"/>
           </p:cNvPicPr>
@@ -3256,8 +3265,8 @@
         </p:blipFill>
         <p:spPr>
           <a:xfrm>
-            <a:off x="2025396" y="4114800"/>
-            <a:ext cx="1234440" cy="1234440"/>
+            <a:off x="9524733" y="1417320"/>
+            <a:ext cx="1051560" cy="1051560"/>
           </a:xfrm>
           <a:prstGeom prst="rect">
             <a:avLst/>
@@ -3272,8 +3281,50 @@
         </p:nvSpPr>
         <p:spPr>
           <a:xfrm>
-            <a:off x="950976" y="5422392"/>
-            <a:ext cx="3383280" cy="365760"/>
+            <a:off x="8732291" y="2514600"/>
+            <a:ext cx="2636444" cy="457200"/>
+          </a:xfrm>
+          <a:prstGeom prst="rect">
+            <a:avLst/>
+          </a:prstGeom>
+          <a:noFill/>
+          <a:ln/>
+        </p:spPr>
+        <p:txBody>
+          <a:bodyPr wrap="square" rtlCol="0" anchor="t"/>
+          <a:lstStyle/>
+          <a:p>
+            <a:pPr algn="ctr" indent="0" marL="0">
+              <a:lnSpc>
+                <a:spcPct val="100000"/>
+              </a:lnSpc>
+              <a:buNone/>
+            </a:pPr>
+            <a:r>
+              <a:rPr lang="en-US" sz="1300" b="1" dirty="0">
+                <a:solidFill>
+                  <a:srgbClr val="FF3EA5"/>
+                </a:solidFill>
+                <a:latin typeface="Arial" pitchFamily="34" charset="0"/>
+                <a:ea typeface="Arial" pitchFamily="34" charset="-122"/>
+                <a:cs typeface="Arial" pitchFamily="34" charset="-120"/>
+              </a:rPr>
+              <a:t>MACCA</a:t>
+            </a:r>
+            <a:endParaRPr lang="en-US" sz="1300" dirty="0"/>
+          </a:p>
+        </p:txBody>
+      </p:sp>
+      <p:sp>
+        <p:nvSpPr>
+          <p:cNvPr id="31" name="Text 17"/>
+          <p:cNvSpPr/>
+          <p:nvPr/>
+        </p:nvSpPr>
+        <p:spPr>
+          <a:xfrm>
+            <a:off x="8732291" y="3017520"/>
+            <a:ext cx="2636444" cy="274320"/>
           </a:xfrm>
           <a:prstGeom prst="rect">
             <a:avLst/>
@@ -3289,46 +3340,7 @@
               <a:buNone/>
             </a:pPr>
             <a:r>
-              <a:rPr lang="en-US" sz="1500" b="1" dirty="0">
-                <a:solidFill>
-                  <a:srgbClr val="FF3EA5"/>
-                </a:solidFill>
-                <a:latin typeface="Arial" pitchFamily="34" charset="0"/>
-                <a:ea typeface="Arial" pitchFamily="34" charset="-122"/>
-                <a:cs typeface="Arial" pitchFamily="34" charset="-120"/>
-              </a:rPr>
-              <a:t>KURI EMI</a:t>
-            </a:r>
-            <a:endParaRPr lang="en-US" sz="1500" dirty="0"/>
-          </a:p>
-        </p:txBody>
-      </p:sp>
-      <p:sp>
-        <p:nvSpPr>
-          <p:cNvPr id="31" name="Text 17"/>
-          <p:cNvSpPr/>
-          <p:nvPr/>
-        </p:nvSpPr>
-        <p:spPr>
-          <a:xfrm>
-            <a:off x="950976" y="5806440"/>
-            <a:ext cx="3383280" cy="274320"/>
-          </a:xfrm>
-          <a:prstGeom prst="rect">
-            <a:avLst/>
-          </a:prstGeom>
-          <a:noFill/>
-          <a:ln/>
-        </p:spPr>
-        <p:txBody>
-          <a:bodyPr wrap="square" rtlCol="0" anchor="ctr"/>
-          <a:lstStyle/>
-          <a:p>
-            <a:pPr algn="ctr" indent="0" marL="0">
-              <a:buNone/>
-            </a:pPr>
-            <a:r>
-              <a:rPr lang="en-US" sz="1050" spc="100" kern="0" dirty="0">
+              <a:rPr lang="en-US" sz="1000" spc="100" kern="0" dirty="0">
                 <a:solidFill>
                   <a:srgbClr val="A6A6AE"/>
                 </a:solidFill>
@@ -3336,9 +3348,9 @@
                 <a:ea typeface="Arial" pitchFamily="34" charset="-122"/>
                 <a:cs typeface="Arial" pitchFamily="34" charset="-120"/>
               </a:rPr>
-              <a:t>2.5M FOLLOWERS</a:t>
-            </a:r>
-            <a:endParaRPr lang="en-US" sz="1050" dirty="0"/>
+              <a:t>1.5M FOLLOWERS</a:t>
+            </a:r>
+            <a:endParaRPr lang="en-US" sz="1000" dirty="0"/>
           </a:p>
         </p:txBody>
       </p:sp>
@@ -3350,8 +3362,8 @@
         </p:nvSpPr>
         <p:spPr>
           <a:xfrm>
-            <a:off x="2029968" y="6135624"/>
-            <a:ext cx="310896" cy="310896"/>
+            <a:off x="9511017" y="3337560"/>
+            <a:ext cx="274320" cy="274320"/>
           </a:xfrm>
           <a:prstGeom prst="ellipse">
             <a:avLst/>
@@ -3378,8 +3390,8 @@
         </p:blipFill>
         <p:spPr>
           <a:xfrm>
-            <a:off x="2098548" y="6204204"/>
-            <a:ext cx="173736" cy="173736"/>
+            <a:off x="9570453" y="3396996"/>
+            <a:ext cx="155448" cy="155448"/>
           </a:xfrm>
           <a:prstGeom prst="rect">
             <a:avLst/>
@@ -3394,8 +3406,8 @@
         </p:nvSpPr>
         <p:spPr>
           <a:xfrm>
-            <a:off x="2487168" y="6135624"/>
-            <a:ext cx="310896" cy="310896"/>
+            <a:off x="9913353" y="3337560"/>
+            <a:ext cx="274320" cy="274320"/>
           </a:xfrm>
           <a:prstGeom prst="ellipse">
             <a:avLst/>
@@ -3422,8 +3434,8 @@
         </p:blipFill>
         <p:spPr>
           <a:xfrm>
-            <a:off x="2555748" y="6204204"/>
-            <a:ext cx="173736" cy="173736"/>
+            <a:off x="9972789" y="3396996"/>
+            <a:ext cx="155448" cy="155448"/>
           </a:xfrm>
           <a:prstGeom prst="rect">
             <a:avLst/>
@@ -3438,8 +3450,8 @@
         </p:nvSpPr>
         <p:spPr>
           <a:xfrm>
-            <a:off x="2944368" y="6135624"/>
-            <a:ext cx="310896" cy="310896"/>
+            <a:off x="10315689" y="3337560"/>
+            <a:ext cx="274320" cy="274320"/>
           </a:xfrm>
           <a:prstGeom prst="ellipse">
             <a:avLst/>
@@ -3466,8 +3478,8 @@
         </p:blipFill>
         <p:spPr>
           <a:xfrm>
-            <a:off x="3012948" y="6204204"/>
-            <a:ext cx="173736" cy="173736"/>
+            <a:off x="10375125" y="3396996"/>
+            <a:ext cx="155448" cy="155448"/>
           </a:xfrm>
           <a:prstGeom prst="rect">
             <a:avLst/>
@@ -3476,7 +3488,7 @@
       </p:pic>
       <p:pic>
         <p:nvPicPr>
-          <p:cNvPr id="38" name="Image 15" descr="/tmp/claude-0/-home-user-dasdsjfoisdjfoisj-github-io/f756b5b4-9ba5-5f42-afc2-0aa030ec1623/scratchpad/asdeck/assets/av-qimmah.png">    </p:cNvPr>
+          <p:cNvPr id="38" name="Image 15" descr="/tmp/claude-0/-home-user-dasdsjfoisdjfoisj-github-io/f756b5b4-9ba5-5f42-afc2-0aa030ec1623/scratchpad/asdeck/assets/av-kuri.png">    </p:cNvPr>
           <p:cNvPicPr>
             <a:picLocks noChangeAspect="1"/>
           </p:cNvPicPr>
@@ -3490,8 +3502,8 @@
         </p:blipFill>
         <p:spPr>
           <a:xfrm>
-            <a:off x="5479085" y="4114800"/>
-            <a:ext cx="1234440" cy="1234440"/>
+            <a:off x="1615402" y="3977640"/>
+            <a:ext cx="1051560" cy="1051560"/>
           </a:xfrm>
           <a:prstGeom prst="rect">
             <a:avLst/>
@@ -3506,8 +3518,50 @@
         </p:nvSpPr>
         <p:spPr>
           <a:xfrm>
-            <a:off x="4404665" y="5422392"/>
-            <a:ext cx="3383280" cy="365760"/>
+            <a:off x="822960" y="5074920"/>
+            <a:ext cx="2636444" cy="457200"/>
+          </a:xfrm>
+          <a:prstGeom prst="rect">
+            <a:avLst/>
+          </a:prstGeom>
+          <a:noFill/>
+          <a:ln/>
+        </p:spPr>
+        <p:txBody>
+          <a:bodyPr wrap="square" rtlCol="0" anchor="t"/>
+          <a:lstStyle/>
+          <a:p>
+            <a:pPr algn="ctr" indent="0" marL="0">
+              <a:lnSpc>
+                <a:spcPct val="100000"/>
+              </a:lnSpc>
+              <a:buNone/>
+            </a:pPr>
+            <a:r>
+              <a:rPr lang="en-US" sz="1300" b="1" dirty="0">
+                <a:solidFill>
+                  <a:srgbClr val="FF3EA5"/>
+                </a:solidFill>
+                <a:latin typeface="Arial" pitchFamily="34" charset="0"/>
+                <a:ea typeface="Arial" pitchFamily="34" charset="-122"/>
+                <a:cs typeface="Arial" pitchFamily="34" charset="-120"/>
+              </a:rPr>
+              <a:t>KURI EMI</a:t>
+            </a:r>
+            <a:endParaRPr lang="en-US" sz="1300" dirty="0"/>
+          </a:p>
+        </p:txBody>
+      </p:sp>
+      <p:sp>
+        <p:nvSpPr>
+          <p:cNvPr id="40" name="Text 22"/>
+          <p:cNvSpPr/>
+          <p:nvPr/>
+        </p:nvSpPr>
+        <p:spPr>
+          <a:xfrm>
+            <a:off x="822960" y="5577840"/>
+            <a:ext cx="2636444" cy="274320"/>
           </a:xfrm>
           <a:prstGeom prst="rect">
             <a:avLst/>
@@ -3523,46 +3577,7 @@
               <a:buNone/>
             </a:pPr>
             <a:r>
-              <a:rPr lang="en-US" sz="1500" b="1" dirty="0">
-                <a:solidFill>
-                  <a:srgbClr val="FF3EA5"/>
-                </a:solidFill>
-                <a:latin typeface="Arial" pitchFamily="34" charset="0"/>
-                <a:ea typeface="Arial" pitchFamily="34" charset="-122"/>
-                <a:cs typeface="Arial" pitchFamily="34" charset="-120"/>
-              </a:rPr>
-              <a:t>QIMMAH RUSSO</a:t>
-            </a:r>
-            <a:endParaRPr lang="en-US" sz="1500" dirty="0"/>
-          </a:p>
-        </p:txBody>
-      </p:sp>
-      <p:sp>
-        <p:nvSpPr>
-          <p:cNvPr id="40" name="Text 22"/>
-          <p:cNvSpPr/>
-          <p:nvPr/>
-        </p:nvSpPr>
-        <p:spPr>
-          <a:xfrm>
-            <a:off x="4404665" y="5806440"/>
-            <a:ext cx="3383280" cy="274320"/>
-          </a:xfrm>
-          <a:prstGeom prst="rect">
-            <a:avLst/>
-          </a:prstGeom>
-          <a:noFill/>
-          <a:ln/>
-        </p:spPr>
-        <p:txBody>
-          <a:bodyPr wrap="square" rtlCol="0" anchor="ctr"/>
-          <a:lstStyle/>
-          <a:p>
-            <a:pPr algn="ctr" indent="0" marL="0">
-              <a:buNone/>
-            </a:pPr>
-            <a:r>
-              <a:rPr lang="en-US" sz="1050" spc="100" kern="0" dirty="0">
+              <a:rPr lang="en-US" sz="1000" spc="100" kern="0" dirty="0">
                 <a:solidFill>
                   <a:srgbClr val="A6A6AE"/>
                 </a:solidFill>
@@ -3570,9 +3585,9 @@
                 <a:ea typeface="Arial" pitchFamily="34" charset="-122"/>
                 <a:cs typeface="Arial" pitchFamily="34" charset="-120"/>
               </a:rPr>
-              <a:t>5M FOLLOWERS</a:t>
-            </a:r>
-            <a:endParaRPr lang="en-US" sz="1050" dirty="0"/>
+              <a:t>2.5M FOLLOWERS</a:t>
+            </a:r>
+            <a:endParaRPr lang="en-US" sz="1000" dirty="0"/>
           </a:p>
         </p:txBody>
       </p:sp>
@@ -3584,8 +3599,8 @@
         </p:nvSpPr>
         <p:spPr>
           <a:xfrm>
-            <a:off x="5483657" y="6135624"/>
-            <a:ext cx="310896" cy="310896"/>
+            <a:off x="1601686" y="5897880"/>
+            <a:ext cx="274320" cy="274320"/>
           </a:xfrm>
           <a:prstGeom prst="ellipse">
             <a:avLst/>
@@ -3612,8 +3627,8 @@
         </p:blipFill>
         <p:spPr>
           <a:xfrm>
-            <a:off x="5552237" y="6204204"/>
-            <a:ext cx="173736" cy="173736"/>
+            <a:off x="1661122" y="5957316"/>
+            <a:ext cx="155448" cy="155448"/>
           </a:xfrm>
           <a:prstGeom prst="rect">
             <a:avLst/>
@@ -3628,8 +3643,8 @@
         </p:nvSpPr>
         <p:spPr>
           <a:xfrm>
-            <a:off x="5940857" y="6135624"/>
-            <a:ext cx="310896" cy="310896"/>
+            <a:off x="2004022" y="5897880"/>
+            <a:ext cx="274320" cy="274320"/>
           </a:xfrm>
           <a:prstGeom prst="ellipse">
             <a:avLst/>
@@ -3656,8 +3671,8 @@
         </p:blipFill>
         <p:spPr>
           <a:xfrm>
-            <a:off x="6009437" y="6204204"/>
-            <a:ext cx="173736" cy="173736"/>
+            <a:off x="2063458" y="5957316"/>
+            <a:ext cx="155448" cy="155448"/>
           </a:xfrm>
           <a:prstGeom prst="rect">
             <a:avLst/>
@@ -3672,8 +3687,8 @@
         </p:nvSpPr>
         <p:spPr>
           <a:xfrm>
-            <a:off x="6398057" y="6135624"/>
-            <a:ext cx="310896" cy="310896"/>
+            <a:off x="2406358" y="5897880"/>
+            <a:ext cx="274320" cy="274320"/>
           </a:xfrm>
           <a:prstGeom prst="ellipse">
             <a:avLst/>
@@ -3700,8 +3715,8 @@
         </p:blipFill>
         <p:spPr>
           <a:xfrm>
-            <a:off x="6466637" y="6204204"/>
-            <a:ext cx="173736" cy="173736"/>
+            <a:off x="2465794" y="5957316"/>
+            <a:ext cx="155448" cy="155448"/>
           </a:xfrm>
           <a:prstGeom prst="rect">
             <a:avLst/>
@@ -3710,7 +3725,7 @@
       </p:pic>
       <p:pic>
         <p:nvPicPr>
-          <p:cNvPr id="47" name="Image 19" descr="/tmp/claude-0/-home-user-dasdsjfoisdjfoisj-github-io/f756b5b4-9ba5-5f42-afc2-0aa030ec1623/scratchpad/asdeck/assets/av-chloe.png">    </p:cNvPr>
+          <p:cNvPr id="47" name="Image 19" descr="/tmp/claude-0/-home-user-dasdsjfoisdjfoisj-github-io/f756b5b4-9ba5-5f42-afc2-0aa030ec1623/scratchpad/asdeck/assets/av-qimmah.png">    </p:cNvPr>
           <p:cNvPicPr>
             <a:picLocks noChangeAspect="1"/>
           </p:cNvPicPr>
@@ -3724,8 +3739,8 @@
         </p:blipFill>
         <p:spPr>
           <a:xfrm>
-            <a:off x="8929116" y="4114800"/>
-            <a:ext cx="1234440" cy="1234440"/>
+            <a:off x="4251846" y="3977640"/>
+            <a:ext cx="1051560" cy="1051560"/>
           </a:xfrm>
           <a:prstGeom prst="rect">
             <a:avLst/>
@@ -3740,8 +3755,50 @@
         </p:nvSpPr>
         <p:spPr>
           <a:xfrm>
-            <a:off x="7854696" y="5422392"/>
-            <a:ext cx="3383280" cy="365760"/>
+            <a:off x="3459404" y="5074920"/>
+            <a:ext cx="2636444" cy="457200"/>
+          </a:xfrm>
+          <a:prstGeom prst="rect">
+            <a:avLst/>
+          </a:prstGeom>
+          <a:noFill/>
+          <a:ln/>
+        </p:spPr>
+        <p:txBody>
+          <a:bodyPr wrap="square" rtlCol="0" anchor="t"/>
+          <a:lstStyle/>
+          <a:p>
+            <a:pPr algn="ctr" indent="0" marL="0">
+              <a:lnSpc>
+                <a:spcPct val="100000"/>
+              </a:lnSpc>
+              <a:buNone/>
+            </a:pPr>
+            <a:r>
+              <a:rPr lang="en-US" sz="1300" b="1" dirty="0">
+                <a:solidFill>
+                  <a:srgbClr val="FF3EA5"/>
+                </a:solidFill>
+                <a:latin typeface="Arial" pitchFamily="34" charset="0"/>
+                <a:ea typeface="Arial" pitchFamily="34" charset="-122"/>
+                <a:cs typeface="Arial" pitchFamily="34" charset="-120"/>
+              </a:rPr>
+              <a:t>QIMMAH RUSSO</a:t>
+            </a:r>
+            <a:endParaRPr lang="en-US" sz="1300" dirty="0"/>
+          </a:p>
+        </p:txBody>
+      </p:sp>
+      <p:sp>
+        <p:nvSpPr>
+          <p:cNvPr id="49" name="Text 27"/>
+          <p:cNvSpPr/>
+          <p:nvPr/>
+        </p:nvSpPr>
+        <p:spPr>
+          <a:xfrm>
+            <a:off x="3459404" y="5577840"/>
+            <a:ext cx="2636444" cy="274320"/>
           </a:xfrm>
           <a:prstGeom prst="rect">
             <a:avLst/>
@@ -3757,46 +3814,7 @@
               <a:buNone/>
             </a:pPr>
             <a:r>
-              <a:rPr lang="en-US" sz="1500" b="1" dirty="0">
-                <a:solidFill>
-                  <a:srgbClr val="FF3EA5"/>
-                </a:solidFill>
-                <a:latin typeface="Arial" pitchFamily="34" charset="0"/>
-                <a:ea typeface="Arial" pitchFamily="34" charset="-122"/>
-                <a:cs typeface="Arial" pitchFamily="34" charset="-120"/>
-              </a:rPr>
-              <a:t>CHLOE AMOUR</a:t>
-            </a:r>
-            <a:endParaRPr lang="en-US" sz="1500" dirty="0"/>
-          </a:p>
-        </p:txBody>
-      </p:sp>
-      <p:sp>
-        <p:nvSpPr>
-          <p:cNvPr id="49" name="Text 27"/>
-          <p:cNvSpPr/>
-          <p:nvPr/>
-        </p:nvSpPr>
-        <p:spPr>
-          <a:xfrm>
-            <a:off x="7854696" y="5806440"/>
-            <a:ext cx="3383280" cy="274320"/>
-          </a:xfrm>
-          <a:prstGeom prst="rect">
-            <a:avLst/>
-          </a:prstGeom>
-          <a:noFill/>
-          <a:ln/>
-        </p:spPr>
-        <p:txBody>
-          <a:bodyPr wrap="square" rtlCol="0" anchor="ctr"/>
-          <a:lstStyle/>
-          <a:p>
-            <a:pPr algn="ctr" indent="0" marL="0">
-              <a:buNone/>
-            </a:pPr>
-            <a:r>
-              <a:rPr lang="en-US" sz="1050" spc="100" kern="0" dirty="0">
+              <a:rPr lang="en-US" sz="1000" spc="100" kern="0" dirty="0">
                 <a:solidFill>
                   <a:srgbClr val="A6A6AE"/>
                 </a:solidFill>
@@ -3804,9 +3822,9 @@
                 <a:ea typeface="Arial" pitchFamily="34" charset="-122"/>
                 <a:cs typeface="Arial" pitchFamily="34" charset="-120"/>
               </a:rPr>
-              <a:t>2.4M FOLLOWERS</a:t>
-            </a:r>
-            <a:endParaRPr lang="en-US" sz="1050" dirty="0"/>
+              <a:t>5M FOLLOWERS</a:t>
+            </a:r>
+            <a:endParaRPr lang="en-US" sz="1000" dirty="0"/>
           </a:p>
         </p:txBody>
       </p:sp>
@@ -3818,8 +3836,8 @@
         </p:nvSpPr>
         <p:spPr>
           <a:xfrm>
-            <a:off x="8933688" y="6135624"/>
-            <a:ext cx="310896" cy="310896"/>
+            <a:off x="4238130" y="5897880"/>
+            <a:ext cx="274320" cy="274320"/>
           </a:xfrm>
           <a:prstGeom prst="ellipse">
             <a:avLst/>
@@ -3846,8 +3864,8 @@
         </p:blipFill>
         <p:spPr>
           <a:xfrm>
-            <a:off x="9002268" y="6204204"/>
-            <a:ext cx="173736" cy="173736"/>
+            <a:off x="4297566" y="5957316"/>
+            <a:ext cx="155448" cy="155448"/>
           </a:xfrm>
           <a:prstGeom prst="rect">
             <a:avLst/>
@@ -3862,8 +3880,8 @@
         </p:nvSpPr>
         <p:spPr>
           <a:xfrm>
-            <a:off x="9390888" y="6135624"/>
-            <a:ext cx="310896" cy="310896"/>
+            <a:off x="4640466" y="5897880"/>
+            <a:ext cx="274320" cy="274320"/>
           </a:xfrm>
           <a:prstGeom prst="ellipse">
             <a:avLst/>
@@ -3890,8 +3908,8 @@
         </p:blipFill>
         <p:spPr>
           <a:xfrm>
-            <a:off x="9459468" y="6204204"/>
-            <a:ext cx="173736" cy="173736"/>
+            <a:off x="4699902" y="5957316"/>
+            <a:ext cx="155448" cy="155448"/>
           </a:xfrm>
           <a:prstGeom prst="rect">
             <a:avLst/>
@@ -3906,8 +3924,8 @@
         </p:nvSpPr>
         <p:spPr>
           <a:xfrm>
-            <a:off x="9848088" y="6135624"/>
-            <a:ext cx="310896" cy="310896"/>
+            <a:off x="5042802" y="5897880"/>
+            <a:ext cx="274320" cy="274320"/>
           </a:xfrm>
           <a:prstGeom prst="ellipse">
             <a:avLst/>
@@ -3934,8 +3952,482 @@
         </p:blipFill>
         <p:spPr>
           <a:xfrm>
-            <a:off x="9916668" y="6204204"/>
-            <a:ext cx="173736" cy="173736"/>
+            <a:off x="5102238" y="5957316"/>
+            <a:ext cx="155448" cy="155448"/>
+          </a:xfrm>
+          <a:prstGeom prst="rect">
+            <a:avLst/>
+          </a:prstGeom>
+        </p:spPr>
+      </p:pic>
+      <p:pic>
+        <p:nvPicPr>
+          <p:cNvPr id="56" name="Image 23" descr="/tmp/claude-0/-home-user-dasdsjfoisdjfoisj-github-io/f756b5b4-9ba5-5f42-afc2-0aa030ec1623/scratchpad/asdeck/assets/av-chloe.png">    </p:cNvPr>
+          <p:cNvPicPr>
+            <a:picLocks noChangeAspect="1"/>
+          </p:cNvPicPr>
+          <p:nvPr/>
+        </p:nvPicPr>
+        <p:blipFill>
+          <a:blip r:embed="rId25"/>
+          <a:stretch>
+            <a:fillRect/>
+          </a:stretch>
+        </p:blipFill>
+        <p:spPr>
+          <a:xfrm>
+            <a:off x="6888289" y="3977640"/>
+            <a:ext cx="1051560" cy="1051560"/>
+          </a:xfrm>
+          <a:prstGeom prst="rect">
+            <a:avLst/>
+          </a:prstGeom>
+        </p:spPr>
+      </p:pic>
+      <p:sp>
+        <p:nvSpPr>
+          <p:cNvPr id="57" name="Text 31"/>
+          <p:cNvSpPr/>
+          <p:nvPr/>
+        </p:nvSpPr>
+        <p:spPr>
+          <a:xfrm>
+            <a:off x="6095848" y="5074920"/>
+            <a:ext cx="2636444" cy="457200"/>
+          </a:xfrm>
+          <a:prstGeom prst="rect">
+            <a:avLst/>
+          </a:prstGeom>
+          <a:noFill/>
+          <a:ln/>
+        </p:spPr>
+        <p:txBody>
+          <a:bodyPr wrap="square" rtlCol="0" anchor="t"/>
+          <a:lstStyle/>
+          <a:p>
+            <a:pPr algn="ctr" indent="0" marL="0">
+              <a:lnSpc>
+                <a:spcPct val="100000"/>
+              </a:lnSpc>
+              <a:buNone/>
+            </a:pPr>
+            <a:r>
+              <a:rPr lang="en-US" sz="1300" b="1" dirty="0">
+                <a:solidFill>
+                  <a:srgbClr val="FF3EA5"/>
+                </a:solidFill>
+                <a:latin typeface="Arial" pitchFamily="34" charset="0"/>
+                <a:ea typeface="Arial" pitchFamily="34" charset="-122"/>
+                <a:cs typeface="Arial" pitchFamily="34" charset="-120"/>
+              </a:rPr>
+              <a:t>CHLOE AMOUR</a:t>
+            </a:r>
+            <a:endParaRPr lang="en-US" sz="1300" dirty="0"/>
+          </a:p>
+        </p:txBody>
+      </p:sp>
+      <p:sp>
+        <p:nvSpPr>
+          <p:cNvPr id="58" name="Text 32"/>
+          <p:cNvSpPr/>
+          <p:nvPr/>
+        </p:nvSpPr>
+        <p:spPr>
+          <a:xfrm>
+            <a:off x="6095848" y="5577840"/>
+            <a:ext cx="2636444" cy="274320"/>
+          </a:xfrm>
+          <a:prstGeom prst="rect">
+            <a:avLst/>
+          </a:prstGeom>
+          <a:noFill/>
+          <a:ln/>
+        </p:spPr>
+        <p:txBody>
+          <a:bodyPr wrap="square" rtlCol="0" anchor="ctr"/>
+          <a:lstStyle/>
+          <a:p>
+            <a:pPr algn="ctr" indent="0" marL="0">
+              <a:buNone/>
+            </a:pPr>
+            <a:r>
+              <a:rPr lang="en-US" sz="1000" spc="100" kern="0" dirty="0">
+                <a:solidFill>
+                  <a:srgbClr val="A6A6AE"/>
+                </a:solidFill>
+                <a:latin typeface="Arial" pitchFamily="34" charset="0"/>
+                <a:ea typeface="Arial" pitchFamily="34" charset="-122"/>
+                <a:cs typeface="Arial" pitchFamily="34" charset="-120"/>
+              </a:rPr>
+              <a:t>2.4M FOLLOWERS</a:t>
+            </a:r>
+            <a:endParaRPr lang="en-US" sz="1000" dirty="0"/>
+          </a:p>
+        </p:txBody>
+      </p:sp>
+      <p:sp>
+        <p:nvSpPr>
+          <p:cNvPr id="59" name="Shape 33"/>
+          <p:cNvSpPr/>
+          <p:nvPr/>
+        </p:nvSpPr>
+        <p:spPr>
+          <a:xfrm>
+            <a:off x="6874574" y="5897880"/>
+            <a:ext cx="274320" cy="274320"/>
+          </a:xfrm>
+          <a:prstGeom prst="ellipse">
+            <a:avLst/>
+          </a:prstGeom>
+          <a:solidFill>
+            <a:srgbClr val="F2F2F2"/>
+          </a:solidFill>
+          <a:ln/>
+        </p:spPr>
+      </p:sp>
+      <p:pic>
+        <p:nvPicPr>
+          <p:cNvPr id="60" name="Image 24" descr="/tmp/claude-0/-home-user-dasdsjfoisdjfoisj-github-io/f756b5b4-9ba5-5f42-afc2-0aa030ec1623/scratchpad/asdeck/assets/ic-x.png">    </p:cNvPr>
+          <p:cNvPicPr>
+            <a:picLocks noChangeAspect="1"/>
+          </p:cNvPicPr>
+          <p:nvPr/>
+        </p:nvPicPr>
+        <p:blipFill>
+          <a:blip r:embed="rId26"/>
+          <a:stretch>
+            <a:fillRect/>
+          </a:stretch>
+        </p:blipFill>
+        <p:spPr>
+          <a:xfrm>
+            <a:off x="6934010" y="5957316"/>
+            <a:ext cx="155448" cy="155448"/>
+          </a:xfrm>
+          <a:prstGeom prst="rect">
+            <a:avLst/>
+          </a:prstGeom>
+        </p:spPr>
+      </p:pic>
+      <p:sp>
+        <p:nvSpPr>
+          <p:cNvPr id="61" name="Shape 34"/>
+          <p:cNvSpPr/>
+          <p:nvPr/>
+        </p:nvSpPr>
+        <p:spPr>
+          <a:xfrm>
+            <a:off x="7276910" y="5897880"/>
+            <a:ext cx="274320" cy="274320"/>
+          </a:xfrm>
+          <a:prstGeom prst="ellipse">
+            <a:avLst/>
+          </a:prstGeom>
+          <a:solidFill>
+            <a:srgbClr val="F2F2F2"/>
+          </a:solidFill>
+          <a:ln/>
+        </p:spPr>
+      </p:sp>
+      <p:pic>
+        <p:nvPicPr>
+          <p:cNvPr id="62" name="Image 25" descr="/tmp/claude-0/-home-user-dasdsjfoisdjfoisj-github-io/f756b5b4-9ba5-5f42-afc2-0aa030ec1623/scratchpad/asdeck/assets/ic-tiktok.png">    </p:cNvPr>
+          <p:cNvPicPr>
+            <a:picLocks noChangeAspect="1"/>
+          </p:cNvPicPr>
+          <p:nvPr/>
+        </p:nvPicPr>
+        <p:blipFill>
+          <a:blip r:embed="rId27"/>
+          <a:stretch>
+            <a:fillRect/>
+          </a:stretch>
+        </p:blipFill>
+        <p:spPr>
+          <a:xfrm>
+            <a:off x="7336346" y="5957316"/>
+            <a:ext cx="155448" cy="155448"/>
+          </a:xfrm>
+          <a:prstGeom prst="rect">
+            <a:avLst/>
+          </a:prstGeom>
+        </p:spPr>
+      </p:pic>
+      <p:sp>
+        <p:nvSpPr>
+          <p:cNvPr id="63" name="Shape 35"/>
+          <p:cNvSpPr/>
+          <p:nvPr/>
+        </p:nvSpPr>
+        <p:spPr>
+          <a:xfrm>
+            <a:off x="7679246" y="5897880"/>
+            <a:ext cx="274320" cy="274320"/>
+          </a:xfrm>
+          <a:prstGeom prst="ellipse">
+            <a:avLst/>
+          </a:prstGeom>
+          <a:solidFill>
+            <a:srgbClr val="F2F2F2"/>
+          </a:solidFill>
+          <a:ln/>
+        </p:spPr>
+      </p:sp>
+      <p:pic>
+        <p:nvPicPr>
+          <p:cNvPr id="64" name="Image 26" descr="/tmp/claude-0/-home-user-dasdsjfoisdjfoisj-github-io/f756b5b4-9ba5-5f42-afc2-0aa030ec1623/scratchpad/asdeck/assets/ic-instagram.png">    </p:cNvPr>
+          <p:cNvPicPr>
+            <a:picLocks noChangeAspect="1"/>
+          </p:cNvPicPr>
+          <p:nvPr/>
+        </p:nvPicPr>
+        <p:blipFill>
+          <a:blip r:embed="rId28"/>
+          <a:stretch>
+            <a:fillRect/>
+          </a:stretch>
+        </p:blipFill>
+        <p:spPr>
+          <a:xfrm>
+            <a:off x="7738682" y="5957316"/>
+            <a:ext cx="155448" cy="155448"/>
+          </a:xfrm>
+          <a:prstGeom prst="rect">
+            <a:avLst/>
+          </a:prstGeom>
+        </p:spPr>
+      </p:pic>
+      <p:pic>
+        <p:nvPicPr>
+          <p:cNvPr id="65" name="Image 27" descr="/tmp/claude-0/-home-user-dasdsjfoisdjfoisj-github-io/f756b5b4-9ba5-5f42-afc2-0aa030ec1623/scratchpad/asdeck/assets/av-zlata.png">    </p:cNvPr>
+          <p:cNvPicPr>
+            <a:picLocks noChangeAspect="1"/>
+          </p:cNvPicPr>
+          <p:nvPr/>
+        </p:nvPicPr>
+        <p:blipFill>
+          <a:blip r:embed="rId29"/>
+          <a:stretch>
+            <a:fillRect/>
+          </a:stretch>
+        </p:blipFill>
+        <p:spPr>
+          <a:xfrm>
+            <a:off x="9524733" y="3977640"/>
+            <a:ext cx="1051560" cy="1051560"/>
+          </a:xfrm>
+          <a:prstGeom prst="rect">
+            <a:avLst/>
+          </a:prstGeom>
+        </p:spPr>
+      </p:pic>
+      <p:sp>
+        <p:nvSpPr>
+          <p:cNvPr id="66" name="Text 36"/>
+          <p:cNvSpPr/>
+          <p:nvPr/>
+        </p:nvSpPr>
+        <p:spPr>
+          <a:xfrm>
+            <a:off x="8732291" y="5074920"/>
+            <a:ext cx="2636444" cy="457200"/>
+          </a:xfrm>
+          <a:prstGeom prst="rect">
+            <a:avLst/>
+          </a:prstGeom>
+          <a:noFill/>
+          <a:ln/>
+        </p:spPr>
+        <p:txBody>
+          <a:bodyPr wrap="square" rtlCol="0" anchor="t"/>
+          <a:lstStyle/>
+          <a:p>
+            <a:pPr algn="ctr" indent="0" marL="0">
+              <a:lnSpc>
+                <a:spcPct val="100000"/>
+              </a:lnSpc>
+              <a:buNone/>
+            </a:pPr>
+            <a:r>
+              <a:rPr lang="en-US" sz="1300" b="1" dirty="0">
+                <a:solidFill>
+                  <a:srgbClr val="FF3EA5"/>
+                </a:solidFill>
+                <a:latin typeface="Arial" pitchFamily="34" charset="0"/>
+                <a:ea typeface="Arial" pitchFamily="34" charset="-122"/>
+                <a:cs typeface="Arial" pitchFamily="34" charset="-120"/>
+              </a:rPr>
+              <a:t>ZLATA SHARVAROK</a:t>
+            </a:r>
+            <a:endParaRPr lang="en-US" sz="1300" dirty="0"/>
+          </a:p>
+        </p:txBody>
+      </p:sp>
+      <p:sp>
+        <p:nvSpPr>
+          <p:cNvPr id="67" name="Text 37"/>
+          <p:cNvSpPr/>
+          <p:nvPr/>
+        </p:nvSpPr>
+        <p:spPr>
+          <a:xfrm>
+            <a:off x="8732291" y="5577840"/>
+            <a:ext cx="2636444" cy="274320"/>
+          </a:xfrm>
+          <a:prstGeom prst="rect">
+            <a:avLst/>
+          </a:prstGeom>
+          <a:noFill/>
+          <a:ln/>
+        </p:spPr>
+        <p:txBody>
+          <a:bodyPr wrap="square" rtlCol="0" anchor="ctr"/>
+          <a:lstStyle/>
+          <a:p>
+            <a:pPr algn="ctr" indent="0" marL="0">
+              <a:buNone/>
+            </a:pPr>
+            <a:r>
+              <a:rPr lang="en-US" sz="1000" spc="100" kern="0" dirty="0">
+                <a:solidFill>
+                  <a:srgbClr val="A6A6AE"/>
+                </a:solidFill>
+                <a:latin typeface="Arial" pitchFamily="34" charset="0"/>
+                <a:ea typeface="Arial" pitchFamily="34" charset="-122"/>
+                <a:cs typeface="Arial" pitchFamily="34" charset="-120"/>
+              </a:rPr>
+              <a:t>1M FOLLOWERS</a:t>
+            </a:r>
+            <a:endParaRPr lang="en-US" sz="1000" dirty="0"/>
+          </a:p>
+        </p:txBody>
+      </p:sp>
+      <p:sp>
+        <p:nvSpPr>
+          <p:cNvPr id="68" name="Shape 38"/>
+          <p:cNvSpPr/>
+          <p:nvPr/>
+        </p:nvSpPr>
+        <p:spPr>
+          <a:xfrm>
+            <a:off x="9511017" y="5897880"/>
+            <a:ext cx="274320" cy="274320"/>
+          </a:xfrm>
+          <a:prstGeom prst="ellipse">
+            <a:avLst/>
+          </a:prstGeom>
+          <a:solidFill>
+            <a:srgbClr val="F2F2F2"/>
+          </a:solidFill>
+          <a:ln/>
+        </p:spPr>
+      </p:sp>
+      <p:pic>
+        <p:nvPicPr>
+          <p:cNvPr id="69" name="Image 28" descr="/tmp/claude-0/-home-user-dasdsjfoisdjfoisj-github-io/f756b5b4-9ba5-5f42-afc2-0aa030ec1623/scratchpad/asdeck/assets/ic-x.png">    </p:cNvPr>
+          <p:cNvPicPr>
+            <a:picLocks noChangeAspect="1"/>
+          </p:cNvPicPr>
+          <p:nvPr/>
+        </p:nvPicPr>
+        <p:blipFill>
+          <a:blip r:embed="rId30"/>
+          <a:stretch>
+            <a:fillRect/>
+          </a:stretch>
+        </p:blipFill>
+        <p:spPr>
+          <a:xfrm>
+            <a:off x="9570453" y="5957316"/>
+            <a:ext cx="155448" cy="155448"/>
+          </a:xfrm>
+          <a:prstGeom prst="rect">
+            <a:avLst/>
+          </a:prstGeom>
+        </p:spPr>
+      </p:pic>
+      <p:sp>
+        <p:nvSpPr>
+          <p:cNvPr id="70" name="Shape 39"/>
+          <p:cNvSpPr/>
+          <p:nvPr/>
+        </p:nvSpPr>
+        <p:spPr>
+          <a:xfrm>
+            <a:off x="9913353" y="5897880"/>
+            <a:ext cx="274320" cy="274320"/>
+          </a:xfrm>
+          <a:prstGeom prst="ellipse">
+            <a:avLst/>
+          </a:prstGeom>
+          <a:solidFill>
+            <a:srgbClr val="F2F2F2"/>
+          </a:solidFill>
+          <a:ln/>
+        </p:spPr>
+      </p:sp>
+      <p:pic>
+        <p:nvPicPr>
+          <p:cNvPr id="71" name="Image 29" descr="/tmp/claude-0/-home-user-dasdsjfoisdjfoisj-github-io/f756b5b4-9ba5-5f42-afc2-0aa030ec1623/scratchpad/asdeck/assets/ic-tiktok.png">    </p:cNvPr>
+          <p:cNvPicPr>
+            <a:picLocks noChangeAspect="1"/>
+          </p:cNvPicPr>
+          <p:nvPr/>
+        </p:nvPicPr>
+        <p:blipFill>
+          <a:blip r:embed="rId31"/>
+          <a:stretch>
+            <a:fillRect/>
+          </a:stretch>
+        </p:blipFill>
+        <p:spPr>
+          <a:xfrm>
+            <a:off x="9972789" y="5957316"/>
+            <a:ext cx="155448" cy="155448"/>
+          </a:xfrm>
+          <a:prstGeom prst="rect">
+            <a:avLst/>
+          </a:prstGeom>
+        </p:spPr>
+      </p:pic>
+      <p:sp>
+        <p:nvSpPr>
+          <p:cNvPr id="72" name="Shape 40"/>
+          <p:cNvSpPr/>
+          <p:nvPr/>
+        </p:nvSpPr>
+        <p:spPr>
+          <a:xfrm>
+            <a:off x="10315689" y="5897880"/>
+            <a:ext cx="274320" cy="274320"/>
+          </a:xfrm>
+          <a:prstGeom prst="ellipse">
+            <a:avLst/>
+          </a:prstGeom>
+          <a:solidFill>
+            <a:srgbClr val="F2F2F2"/>
+          </a:solidFill>
+          <a:ln/>
+        </p:spPr>
+      </p:sp>
+      <p:pic>
+        <p:nvPicPr>
+          <p:cNvPr id="73" name="Image 30" descr="/tmp/claude-0/-home-user-dasdsjfoisdjfoisj-github-io/f756b5b4-9ba5-5f42-afc2-0aa030ec1623/scratchpad/asdeck/assets/ic-instagram.png">    </p:cNvPr>
+          <p:cNvPicPr>
+            <a:picLocks noChangeAspect="1"/>
+          </p:cNvPicPr>
+          <p:nvPr/>
+        </p:nvPicPr>
+        <p:blipFill>
+          <a:blip r:embed="rId32"/>
+          <a:stretch>
+            <a:fillRect/>
+          </a:stretch>
+        </p:blipFill>
+        <p:spPr>
+          <a:xfrm>
+            <a:off x="10375125" y="5957316"/>
+            <a:ext cx="155448" cy="155448"/>
           </a:xfrm>
           <a:prstGeom prst="rect">
             <a:avLst/>
@@ -4986,7 +5478,7 @@
                 <a:ea typeface="Arial" pitchFamily="34" charset="-122"/>
                 <a:cs typeface="Arial" pitchFamily="34" charset="-120"/>
               </a:rPr>
-              <a:t>33M+</a:t>
+              <a:t>79M+</a:t>
             </a:r>
             <a:endParaRPr lang="en-US" sz="4800" dirty="0"/>
           </a:p>
@@ -5139,7 +5631,7 @@
                 <a:ea typeface="Arial" pitchFamily="34" charset="-122"/>
                 <a:cs typeface="Arial" pitchFamily="34" charset="-120"/>
               </a:rPr>
-              <a:t>6</a:t>
+              <a:t>8</a:t>
             </a:r>
             <a:endParaRPr lang="en-US" sz="4800" dirty="0"/>
           </a:p>

--- a/AS-Talent-Agency.pptx
+++ b/AS-Talent-Agency.pptx
@@ -509,7 +509,7 @@
           <a:p>
             <a:r>
               <a:rPr lang="en-US" dirty="0"/>
-              <a:t>Обложка. AS Talent Agency — агентство полного цикла: таланты, соцсети, OnlyFans, поддержка 24/7.</a:t>
+              <a:t>Обложка. AS Talent Agency — агентство полного цикла: таланты, соцсети, OnlyFans, 24/7.</a:t>
             </a:r>
             <a:endParaRPr lang="en-US" dirty="0"/>
           </a:p>
@@ -597,7 +597,7 @@
           <a:p>
             <a:r>
               <a:rPr lang="en-US" dirty="0"/>
-              <a:t>Кто мы: агентство полного цикла, 3+ года, индивидуальный подход, таланты по всему миру.</a:t>
+              <a:t>Кто мы: агентство полного цикла, 3+ года, индивидуальный подход, глобальный ростер.</a:t>
             </a:r>
             <a:endParaRPr lang="en-US" dirty="0"/>
           </a:p>
@@ -685,7 +685,7 @@
           <a:p>
             <a:r>
               <a:rPr lang="en-US" dirty="0"/>
-              <a:t>Наши топ-авторы и их суммарный охват. Присутствие на X, TikTok и Instagram.</a:t>
+              <a:t>Избранные креаторы агентства (часть ростера из 150+ креаторов). X, TikTok, Instagram.</a:t>
             </a:r>
             <a:endParaRPr lang="en-US" dirty="0"/>
           </a:p>
@@ -773,7 +773,7 @@
           <a:p>
             <a:r>
               <a:rPr lang="en-US" dirty="0"/>
-              <a:t>Три ключевые услуги + поддерживающие: чаттинг, контент-план, аналитика.</a:t>
+              <a:t>Три ключевые услуги + поддерживающие сервисы.</a:t>
             </a:r>
             <a:endParaRPr lang="en-US" dirty="0"/>
           </a:p>
@@ -1037,7 +1037,7 @@
           <a:p>
             <a:r>
               <a:rPr lang="en-US" dirty="0"/>
-              <a:t>Преимущества AS Talent: персональный менеджер, 24/7, аналитика, свобода творчества, любой уровень, глобальный охват.</a:t>
+              <a:t>Преимущества AS Talent.</a:t>
             </a:r>
             <a:endParaRPr lang="en-US" dirty="0"/>
           </a:p>
@@ -1125,7 +1125,7 @@
           <a:p>
             <a:r>
               <a:rPr lang="en-US" dirty="0"/>
-              <a:t>Контакты и призыв к действию. Сайт: astalentagency.com</a:t>
+              <a:t>Контакты и призыв к действию. astalentagency.com</a:t>
             </a:r>
             <a:endParaRPr lang="en-US" dirty="0"/>
           </a:p>
@@ -1507,14 +1507,34 @@
       </p:grpSpPr>
       <p:sp>
         <p:nvSpPr>
-          <p:cNvPr id="2" name="Text 0"/>
-          <p:cNvSpPr/>
-          <p:nvPr/>
-        </p:nvSpPr>
-        <p:spPr>
-          <a:xfrm>
-            <a:off x="822960" y="1234440"/>
-            <a:ext cx="7315200" cy="274320"/>
+          <p:cNvPr id="2" name="Shape 0"/>
+          <p:cNvSpPr/>
+          <p:nvPr/>
+        </p:nvSpPr>
+        <p:spPr>
+          <a:xfrm>
+            <a:off x="822960" y="1243584"/>
+            <a:ext cx="109728" cy="109728"/>
+          </a:xfrm>
+          <a:prstGeom prst="ellipse">
+            <a:avLst/>
+          </a:prstGeom>
+          <a:solidFill>
+            <a:srgbClr val="FF149A"/>
+          </a:solidFill>
+          <a:ln/>
+        </p:spPr>
+      </p:sp>
+      <p:sp>
+        <p:nvSpPr>
+          <p:cNvPr id="3" name="Text 1"/>
+          <p:cNvSpPr/>
+          <p:nvPr/>
+        </p:nvSpPr>
+        <p:spPr>
+          <a:xfrm>
+            <a:off x="1060704" y="1188720"/>
+            <a:ext cx="8229600" cy="274320"/>
           </a:xfrm>
           <a:prstGeom prst="rect">
             <a:avLst/>
@@ -1546,14 +1566,14 @@
       </p:sp>
       <p:sp>
         <p:nvSpPr>
-          <p:cNvPr id="3" name="Text 1"/>
+          <p:cNvPr id="4" name="Text 2"/>
           <p:cNvSpPr/>
           <p:nvPr/>
         </p:nvSpPr>
         <p:spPr>
           <a:xfrm>
             <a:off x="777240" y="1600200"/>
-            <a:ext cx="8686800" cy="1280160"/>
+            <a:ext cx="10058400" cy="1051560"/>
           </a:xfrm>
           <a:prstGeom prst="rect">
             <a:avLst/>
@@ -1565,11 +1585,50 @@
           <a:bodyPr wrap="square" rtlCol="0" anchor="ctr"/>
           <a:lstStyle/>
           <a:p>
+            <a:pPr indent="0" marL="0">
+              <a:buNone/>
+            </a:pPr>
+            <a:r>
+              <a:rPr lang="en-US" sz="6800" b="1" dirty="0">
+                <a:solidFill>
+                  <a:srgbClr val="FFFFFF"/>
+                </a:solidFill>
+                <a:latin typeface="Arial" pitchFamily="34" charset="0"/>
+                <a:ea typeface="Arial" pitchFamily="34" charset="-122"/>
+                <a:cs typeface="Arial" pitchFamily="34" charset="-120"/>
+              </a:rPr>
+              <a:t>AS Talent</a:t>
+            </a:r>
+            <a:endParaRPr lang="en-US" sz="6800" dirty="0"/>
+          </a:p>
+        </p:txBody>
+      </p:sp>
+      <p:sp>
+        <p:nvSpPr>
+          <p:cNvPr id="5" name="Text 3"/>
+          <p:cNvSpPr/>
+          <p:nvPr/>
+        </p:nvSpPr>
+        <p:spPr>
+          <a:xfrm>
+            <a:off x="804672" y="2697480"/>
+            <a:ext cx="10515600" cy="731520"/>
+          </a:xfrm>
+          <a:prstGeom prst="rect">
+            <a:avLst/>
+          </a:prstGeom>
+          <a:noFill/>
+          <a:ln/>
+        </p:spPr>
+        <p:txBody>
+          <a:bodyPr wrap="square" rtlCol="0" anchor="ctr"/>
+          <a:lstStyle/>
+          <a:p>
             <a:pPr algn="l" indent="0" marL="0">
               <a:buNone/>
             </a:pPr>
             <a:r>
-              <a:rPr lang="en-US" sz="6600" b="1" dirty="0">
+              <a:rPr lang="en-US" sz="3000" b="1" dirty="0">
                 <a:solidFill>
                   <a:srgbClr val="FFFFFF"/>
                 </a:solidFill>
@@ -1577,22 +1636,50 @@
                 <a:ea typeface="Arial" pitchFamily="34" charset="-122"/>
                 <a:cs typeface="Arial" pitchFamily="34" charset="-120"/>
               </a:rPr>
-              <a:t>AS Talent Agency</a:t>
-            </a:r>
-            <a:endParaRPr lang="en-US" sz="6600" dirty="0"/>
-          </a:p>
-        </p:txBody>
-      </p:sp>
-      <p:sp>
-        <p:nvSpPr>
-          <p:cNvPr id="4" name="Text 2"/>
-          <p:cNvSpPr/>
-          <p:nvPr/>
-        </p:nvSpPr>
-        <p:spPr>
-          <a:xfrm>
-            <a:off x="822960" y="2880360"/>
-            <a:ext cx="7315200" cy="640080"/>
+              <a:t>Agency</a:t>
+            </a:r>
+            <a:pPr algn="l" indent="0" marL="0">
+              <a:buNone/>
+            </a:pPr>
+            <a:r>
+              <a:rPr lang="en-US" sz="3000" b="1" dirty="0">
+                <a:solidFill>
+                  <a:srgbClr val="9A9AA4"/>
+                </a:solidFill>
+                <a:latin typeface="Arial" pitchFamily="34" charset="0"/>
+                <a:ea typeface="Arial" pitchFamily="34" charset="-122"/>
+                <a:cs typeface="Arial" pitchFamily="34" charset="-120"/>
+              </a:rPr>
+              <a:t>   /   </a:t>
+            </a:r>
+            <a:pPr algn="l" indent="0" marL="0">
+              <a:buNone/>
+            </a:pPr>
+            <a:r>
+              <a:rPr lang="en-US" sz="3000" b="1" dirty="0">
+                <a:solidFill>
+                  <a:srgbClr val="FF3EA5"/>
+                </a:solidFill>
+                <a:latin typeface="Arial" pitchFamily="34" charset="0"/>
+                <a:ea typeface="Arial" pitchFamily="34" charset="-122"/>
+                <a:cs typeface="Arial" pitchFamily="34" charset="-120"/>
+              </a:rPr>
+              <a:t>AS Superpowers</a:t>
+            </a:r>
+            <a:endParaRPr lang="en-US" sz="3000" dirty="0"/>
+          </a:p>
+        </p:txBody>
+      </p:sp>
+      <p:sp>
+        <p:nvSpPr>
+          <p:cNvPr id="6" name="Text 4"/>
+          <p:cNvSpPr/>
+          <p:nvPr/>
+        </p:nvSpPr>
+        <p:spPr>
+          <a:xfrm>
+            <a:off x="822960" y="3703320"/>
+            <a:ext cx="7863840" cy="914400"/>
           </a:xfrm>
           <a:prstGeom prst="rect">
             <a:avLst/>
@@ -1604,41 +1691,57 @@
           <a:bodyPr wrap="square" rtlCol="0" anchor="ctr"/>
           <a:lstStyle/>
           <a:p>
-            <a:pPr algn="l" indent="0" marL="0">
-              <a:buNone/>
-            </a:pPr>
-            <a:r>
-              <a:rPr lang="en-US" sz="3000" b="1" dirty="0">
-                <a:solidFill>
-                  <a:srgbClr val="FF3EA5"/>
-                </a:solidFill>
-                <a:effectLst>
-                  <a:glow rad="101600">
-                    <a:srgbClr val="FF0090">
-                      <a:alpha val="50000"/>
-                    </a:srgbClr>
-                  </a:glow>
-                </a:effectLst>
-                <a:latin typeface="Arial" pitchFamily="34" charset="0"/>
-                <a:ea typeface="Arial" pitchFamily="34" charset="-122"/>
-                <a:cs typeface="Arial" pitchFamily="34" charset="-120"/>
-              </a:rPr>
-              <a:t>AS Superpowers</a:t>
-            </a:r>
-            <a:endParaRPr lang="en-US" sz="3000" dirty="0"/>
-          </a:p>
-        </p:txBody>
-      </p:sp>
-      <p:sp>
-        <p:nvSpPr>
-          <p:cNvPr id="5" name="Text 3"/>
-          <p:cNvSpPr/>
-          <p:nvPr/>
-        </p:nvSpPr>
-        <p:spPr>
-          <a:xfrm>
-            <a:off x="822960" y="3657600"/>
-            <a:ext cx="7680960" cy="914400"/>
+            <a:pPr indent="0" marL="0">
+              <a:lnSpc>
+                <a:spcPct val="130000"/>
+              </a:lnSpc>
+              <a:buNone/>
+            </a:pPr>
+            <a:r>
+              <a:rPr lang="en-US" sz="1700" dirty="0">
+                <a:solidFill>
+                  <a:srgbClr val="D7D7DC"/>
+                </a:solidFill>
+                <a:latin typeface="Arial" pitchFamily="34" charset="0"/>
+                <a:ea typeface="Arial" pitchFamily="34" charset="-122"/>
+                <a:cs typeface="Arial" pitchFamily="34" charset="-120"/>
+              </a:rPr>
+              <a:t>Управление талантами, соцсетями и OnlyFans — 24/7.</a:t>
+            </a:r>
+            <a:endParaRPr lang="en-US" sz="1700" dirty="0"/>
+          </a:p>
+          <a:p>
+            <a:pPr indent="0" marL="0">
+              <a:lnSpc>
+                <a:spcPct val="130000"/>
+              </a:lnSpc>
+              <a:buNone/>
+            </a:pPr>
+            <a:r>
+              <a:rPr lang="en-US" sz="1700" dirty="0">
+                <a:solidFill>
+                  <a:srgbClr val="D7D7DC"/>
+                </a:solidFill>
+                <a:latin typeface="Arial" pitchFamily="34" charset="0"/>
+                <a:ea typeface="Arial" pitchFamily="34" charset="-122"/>
+                <a:cs typeface="Arial" pitchFamily="34" charset="-120"/>
+              </a:rPr>
+              <a:t>Helping creators unlock their true potential.</a:t>
+            </a:r>
+            <a:endParaRPr lang="en-US" sz="1700" dirty="0"/>
+          </a:p>
+        </p:txBody>
+      </p:sp>
+      <p:sp>
+        <p:nvSpPr>
+          <p:cNvPr id="7" name="Text 5"/>
+          <p:cNvSpPr/>
+          <p:nvPr/>
+        </p:nvSpPr>
+        <p:spPr>
+          <a:xfrm>
+            <a:off x="822960" y="6126480"/>
+            <a:ext cx="4572000" cy="365760"/>
           </a:xfrm>
           <a:prstGeom prst="rect">
             <a:avLst/>
@@ -1650,57 +1753,34 @@
           <a:bodyPr wrap="square" rtlCol="0" anchor="ctr"/>
           <a:lstStyle/>
           <a:p>
-            <a:pPr algn="l" indent="0" marL="0">
-              <a:lnSpc>
-                <a:spcPct val="125000"/>
-              </a:lnSpc>
-              <a:buNone/>
-            </a:pPr>
-            <a:r>
-              <a:rPr lang="en-US" sz="1700" dirty="0">
-                <a:solidFill>
-                  <a:srgbClr val="D8D8DC"/>
-                </a:solidFill>
-                <a:latin typeface="Arial" pitchFamily="34" charset="0"/>
-                <a:ea typeface="Arial" pitchFamily="34" charset="-122"/>
-                <a:cs typeface="Arial" pitchFamily="34" charset="-120"/>
-              </a:rPr>
-              <a:t>Управление талантами, соцсетями и OnlyFans — 24/7.</a:t>
-            </a:r>
-            <a:endParaRPr lang="en-US" sz="1700" dirty="0"/>
-          </a:p>
-          <a:p>
-            <a:pPr algn="l" indent="0" marL="0">
-              <a:lnSpc>
-                <a:spcPct val="125000"/>
-              </a:lnSpc>
-              <a:buNone/>
-            </a:pPr>
-            <a:r>
-              <a:rPr lang="en-US" sz="1700" dirty="0">
-                <a:solidFill>
-                  <a:srgbClr val="D8D8DC"/>
-                </a:solidFill>
-                <a:latin typeface="Arial" pitchFamily="34" charset="0"/>
-                <a:ea typeface="Arial" pitchFamily="34" charset="-122"/>
-                <a:cs typeface="Arial" pitchFamily="34" charset="-120"/>
-              </a:rPr>
-              <a:t>Helping creators unlock their true potential.</a:t>
-            </a:r>
-            <a:endParaRPr lang="en-US" sz="1700" dirty="0"/>
-          </a:p>
-        </p:txBody>
-      </p:sp>
-      <p:sp>
-        <p:nvSpPr>
-          <p:cNvPr id="6" name="Text 4"/>
-          <p:cNvSpPr/>
-          <p:nvPr/>
-        </p:nvSpPr>
-        <p:spPr>
-          <a:xfrm>
-            <a:off x="822960" y="6126480"/>
-            <a:ext cx="5486400" cy="365760"/>
+            <a:pPr indent="0" marL="0">
+              <a:buNone/>
+            </a:pPr>
+            <a:r>
+              <a:rPr lang="en-US" sz="1400" b="1" dirty="0">
+                <a:solidFill>
+                  <a:srgbClr val="FFFFFF"/>
+                </a:solidFill>
+                <a:latin typeface="Arial" pitchFamily="34" charset="0"/>
+                <a:ea typeface="Arial" pitchFamily="34" charset="-122"/>
+                <a:cs typeface="Arial" pitchFamily="34" charset="-120"/>
+              </a:rPr>
+              <a:t>astalentagency.com</a:t>
+            </a:r>
+            <a:endParaRPr lang="en-US" sz="1400" dirty="0"/>
+          </a:p>
+        </p:txBody>
+      </p:sp>
+      <p:sp>
+        <p:nvSpPr>
+          <p:cNvPr id="8" name="Text 6"/>
+          <p:cNvSpPr/>
+          <p:nvPr/>
+        </p:nvSpPr>
+        <p:spPr>
+          <a:xfrm>
+            <a:off x="6766560" y="6126480"/>
+            <a:ext cx="4572000" cy="365760"/>
           </a:xfrm>
           <a:prstGeom prst="rect">
             <a:avLst/>
@@ -1712,21 +1792,21 @@
           <a:bodyPr wrap="square" rtlCol="0" anchor="ctr"/>
           <a:lstStyle/>
           <a:p>
-            <a:pPr algn="l" indent="0" marL="0">
-              <a:buNone/>
-            </a:pPr>
-            <a:r>
-              <a:rPr lang="en-US" sz="1400" b="1" dirty="0">
-                <a:solidFill>
-                  <a:srgbClr val="FFFFFF"/>
-                </a:solidFill>
-                <a:latin typeface="Arial" pitchFamily="34" charset="0"/>
-                <a:ea typeface="Arial" pitchFamily="34" charset="-122"/>
-                <a:cs typeface="Arial" pitchFamily="34" charset="-120"/>
-              </a:rPr>
-              <a:t>astalentagency.com</a:t>
-            </a:r>
-            <a:endParaRPr lang="en-US" sz="1400" dirty="0"/>
+            <a:pPr algn="r" indent="0" marL="0">
+              <a:buNone/>
+            </a:pPr>
+            <a:r>
+              <a:rPr lang="en-US" sz="1200" b="1" spc="100" kern="0" dirty="0">
+                <a:solidFill>
+                  <a:srgbClr val="9A9AA4"/>
+                </a:solidFill>
+                <a:latin typeface="Arial" pitchFamily="34" charset="0"/>
+                <a:ea typeface="Arial" pitchFamily="34" charset="-122"/>
+                <a:cs typeface="Arial" pitchFamily="34" charset="-120"/>
+              </a:rPr>
+              <a:t>OnlyFans · Instagram · TikTok · X</a:t>
+            </a:r>
+            <a:endParaRPr lang="en-US" sz="1200" dirty="0"/>
           </a:p>
         </p:txBody>
       </p:sp>
@@ -1771,14 +1851,34 @@
       </p:grpSpPr>
       <p:sp>
         <p:nvSpPr>
-          <p:cNvPr id="2" name="Text 0"/>
-          <p:cNvSpPr/>
-          <p:nvPr/>
-        </p:nvSpPr>
-        <p:spPr>
-          <a:xfrm>
-            <a:off x="640080" y="502920"/>
-            <a:ext cx="7315200" cy="274320"/>
+          <p:cNvPr id="2" name="Shape 0"/>
+          <p:cNvSpPr/>
+          <p:nvPr/>
+        </p:nvSpPr>
+        <p:spPr>
+          <a:xfrm>
+            <a:off x="640080" y="557784"/>
+            <a:ext cx="109728" cy="109728"/>
+          </a:xfrm>
+          <a:prstGeom prst="ellipse">
+            <a:avLst/>
+          </a:prstGeom>
+          <a:solidFill>
+            <a:srgbClr val="FF149A"/>
+          </a:solidFill>
+          <a:ln/>
+        </p:spPr>
+      </p:sp>
+      <p:sp>
+        <p:nvSpPr>
+          <p:cNvPr id="3" name="Text 1"/>
+          <p:cNvSpPr/>
+          <p:nvPr/>
+        </p:nvSpPr>
+        <p:spPr>
+          <a:xfrm>
+            <a:off x="877824" y="502920"/>
+            <a:ext cx="8229600" cy="274320"/>
           </a:xfrm>
           <a:prstGeom prst="rect">
             <a:avLst/>
@@ -1810,14 +1910,14 @@
       </p:sp>
       <p:sp>
         <p:nvSpPr>
-          <p:cNvPr id="3" name="Text 1"/>
-          <p:cNvSpPr/>
-          <p:nvPr/>
-        </p:nvSpPr>
-        <p:spPr>
-          <a:xfrm>
-            <a:off x="621792" y="777240"/>
-            <a:ext cx="7315200" cy="731520"/>
+          <p:cNvPr id="4" name="Text 2"/>
+          <p:cNvSpPr/>
+          <p:nvPr/>
+        </p:nvSpPr>
+        <p:spPr>
+          <a:xfrm>
+            <a:off x="603504" y="777240"/>
+            <a:ext cx="10058400" cy="822960"/>
           </a:xfrm>
           <a:prstGeom prst="rect">
             <a:avLst/>
@@ -1849,7 +1949,7 @@
       </p:sp>
       <p:sp>
         <p:nvSpPr>
-          <p:cNvPr id="4" name="Text 2"/>
+          <p:cNvPr id="5" name="Text 3"/>
           <p:cNvSpPr/>
           <p:nvPr/>
         </p:nvSpPr>
@@ -1868,7 +1968,7 @@
           <a:bodyPr wrap="square" rtlCol="0" anchor="t"/>
           <a:lstStyle/>
           <a:p>
-            <a:pPr algn="l" indent="0" marL="0">
+            <a:pPr indent="0" marL="0">
               <a:lnSpc>
                 <a:spcPct val="130000"/>
               </a:lnSpc>
@@ -1877,7 +1977,7 @@
             <a:r>
               <a:rPr lang="en-US" sz="1550" dirty="0">
                 <a:solidFill>
-                  <a:srgbClr val="D2D2D6"/>
+                  <a:srgbClr val="D7D7DC"/>
                 </a:solidFill>
                 <a:latin typeface="Arial" pitchFamily="34" charset="0"/>
                 <a:ea typeface="Arial" pitchFamily="34" charset="-122"/>
@@ -1891,14 +1991,14 @@
       </p:sp>
       <p:sp>
         <p:nvSpPr>
-          <p:cNvPr id="5" name="Shape 3"/>
-          <p:cNvSpPr/>
-          <p:nvPr/>
-        </p:nvSpPr>
-        <p:spPr>
-          <a:xfrm>
-            <a:off x="640080" y="3538728"/>
-            <a:ext cx="310896" cy="310896"/>
+          <p:cNvPr id="6" name="Shape 4"/>
+          <p:cNvSpPr/>
+          <p:nvPr/>
+        </p:nvSpPr>
+        <p:spPr>
+          <a:xfrm>
+            <a:off x="658368" y="3584448"/>
+            <a:ext cx="146304" cy="146304"/>
           </a:xfrm>
           <a:prstGeom prst="ellipse">
             <a:avLst/>
@@ -1906,31 +2006,322 @@
           <a:solidFill>
             <a:srgbClr val="FF149A"/>
           </a:solidFill>
-          <a:ln w="12700">
+          <a:ln/>
+        </p:spPr>
+      </p:sp>
+      <p:sp>
+        <p:nvSpPr>
+          <p:cNvPr id="7" name="Text 5"/>
+          <p:cNvSpPr/>
+          <p:nvPr/>
+        </p:nvSpPr>
+        <p:spPr>
+          <a:xfrm>
+            <a:off x="1051560" y="3419856"/>
+            <a:ext cx="5440680" cy="310896"/>
+          </a:xfrm>
+          <a:prstGeom prst="rect">
+            <a:avLst/>
+          </a:prstGeom>
+          <a:noFill/>
+          <a:ln/>
+        </p:spPr>
+        <p:txBody>
+          <a:bodyPr wrap="square" rtlCol="0" anchor="ctr"/>
+          <a:lstStyle/>
+          <a:p>
+            <a:pPr indent="0" marL="0">
+              <a:buNone/>
+            </a:pPr>
+            <a:r>
+              <a:rPr lang="en-US" sz="1500" b="1" dirty="0">
+                <a:solidFill>
+                  <a:srgbClr val="FF3EA5"/>
+                </a:solidFill>
+                <a:latin typeface="Arial" pitchFamily="34" charset="0"/>
+                <a:ea typeface="Arial" pitchFamily="34" charset="-122"/>
+                <a:cs typeface="Arial" pitchFamily="34" charset="-120"/>
+              </a:rPr>
+              <a:t>Personalized strategy</a:t>
+            </a:r>
+            <a:endParaRPr lang="en-US" sz="1500" dirty="0"/>
+          </a:p>
+        </p:txBody>
+      </p:sp>
+      <p:sp>
+        <p:nvSpPr>
+          <p:cNvPr id="8" name="Text 6"/>
+          <p:cNvSpPr/>
+          <p:nvPr/>
+        </p:nvSpPr>
+        <p:spPr>
+          <a:xfrm>
+            <a:off x="1051560" y="3749040"/>
+            <a:ext cx="5440680" cy="457200"/>
+          </a:xfrm>
+          <a:prstGeom prst="rect">
+            <a:avLst/>
+          </a:prstGeom>
+          <a:noFill/>
+          <a:ln/>
+        </p:spPr>
+        <p:txBody>
+          <a:bodyPr wrap="square" rtlCol="0" anchor="ctr"/>
+          <a:lstStyle/>
+          <a:p>
+            <a:pPr indent="0" marL="0">
+              <a:buNone/>
+            </a:pPr>
+            <a:r>
+              <a:rPr lang="en-US" sz="1250" dirty="0">
+                <a:solidFill>
+                  <a:srgbClr val="C2C2C8"/>
+                </a:solidFill>
+                <a:latin typeface="Arial" pitchFamily="34" charset="0"/>
+                <a:ea typeface="Arial" pitchFamily="34" charset="-122"/>
+                <a:cs typeface="Arial" pitchFamily="34" charset="-120"/>
+              </a:rPr>
+              <a:t>Индивидуальная стратегия под каждого автора.</a:t>
+            </a:r>
+            <a:endParaRPr lang="en-US" sz="1250" dirty="0"/>
+          </a:p>
+        </p:txBody>
+      </p:sp>
+      <p:sp>
+        <p:nvSpPr>
+          <p:cNvPr id="9" name="Shape 7"/>
+          <p:cNvSpPr/>
+          <p:nvPr/>
+        </p:nvSpPr>
+        <p:spPr>
+          <a:xfrm>
+            <a:off x="658368" y="4498848"/>
+            <a:ext cx="146304" cy="146304"/>
+          </a:xfrm>
+          <a:prstGeom prst="ellipse">
+            <a:avLst/>
+          </a:prstGeom>
+          <a:solidFill>
+            <a:srgbClr val="FF149A"/>
+          </a:solidFill>
+          <a:ln/>
+        </p:spPr>
+      </p:sp>
+      <p:sp>
+        <p:nvSpPr>
+          <p:cNvPr id="10" name="Text 8"/>
+          <p:cNvSpPr/>
+          <p:nvPr/>
+        </p:nvSpPr>
+        <p:spPr>
+          <a:xfrm>
+            <a:off x="1051560" y="4334256"/>
+            <a:ext cx="5440680" cy="310896"/>
+          </a:xfrm>
+          <a:prstGeom prst="rect">
+            <a:avLst/>
+          </a:prstGeom>
+          <a:noFill/>
+          <a:ln/>
+        </p:spPr>
+        <p:txBody>
+          <a:bodyPr wrap="square" rtlCol="0" anchor="ctr"/>
+          <a:lstStyle/>
+          <a:p>
+            <a:pPr indent="0" marL="0">
+              <a:buNone/>
+            </a:pPr>
+            <a:r>
+              <a:rPr lang="en-US" sz="1500" b="1" dirty="0">
+                <a:solidFill>
+                  <a:srgbClr val="FF3EA5"/>
+                </a:solidFill>
+                <a:latin typeface="Arial" pitchFamily="34" charset="0"/>
+                <a:ea typeface="Arial" pitchFamily="34" charset="-122"/>
+                <a:cs typeface="Arial" pitchFamily="34" charset="-120"/>
+              </a:rPr>
+              <a:t>Full-cycle management</a:t>
+            </a:r>
+            <a:endParaRPr lang="en-US" sz="1500" dirty="0"/>
+          </a:p>
+        </p:txBody>
+      </p:sp>
+      <p:sp>
+        <p:nvSpPr>
+          <p:cNvPr id="11" name="Text 9"/>
+          <p:cNvSpPr/>
+          <p:nvPr/>
+        </p:nvSpPr>
+        <p:spPr>
+          <a:xfrm>
+            <a:off x="1051560" y="4663440"/>
+            <a:ext cx="5440680" cy="457200"/>
+          </a:xfrm>
+          <a:prstGeom prst="rect">
+            <a:avLst/>
+          </a:prstGeom>
+          <a:noFill/>
+          <a:ln/>
+        </p:spPr>
+        <p:txBody>
+          <a:bodyPr wrap="square" rtlCol="0" anchor="ctr"/>
+          <a:lstStyle/>
+          <a:p>
+            <a:pPr indent="0" marL="0">
+              <a:buNone/>
+            </a:pPr>
+            <a:r>
+              <a:rPr lang="en-US" sz="1250" dirty="0">
+                <a:solidFill>
+                  <a:srgbClr val="C2C2C8"/>
+                </a:solidFill>
+                <a:latin typeface="Arial" pitchFamily="34" charset="0"/>
+                <a:ea typeface="Arial" pitchFamily="34" charset="-122"/>
+                <a:cs typeface="Arial" pitchFamily="34" charset="-120"/>
+              </a:rPr>
+              <a:t>Управление под ключ: контент, соцсети, чаттинг, аналитика.</a:t>
+            </a:r>
+            <a:endParaRPr lang="en-US" sz="1250" dirty="0"/>
+          </a:p>
+        </p:txBody>
+      </p:sp>
+      <p:sp>
+        <p:nvSpPr>
+          <p:cNvPr id="12" name="Shape 10"/>
+          <p:cNvSpPr/>
+          <p:nvPr/>
+        </p:nvSpPr>
+        <p:spPr>
+          <a:xfrm>
+            <a:off x="658368" y="5413248"/>
+            <a:ext cx="146304" cy="146304"/>
+          </a:xfrm>
+          <a:prstGeom prst="ellipse">
+            <a:avLst/>
+          </a:prstGeom>
+          <a:solidFill>
+            <a:srgbClr val="FF149A"/>
+          </a:solidFill>
+          <a:ln/>
+        </p:spPr>
+      </p:sp>
+      <p:sp>
+        <p:nvSpPr>
+          <p:cNvPr id="13" name="Text 11"/>
+          <p:cNvSpPr/>
+          <p:nvPr/>
+        </p:nvSpPr>
+        <p:spPr>
+          <a:xfrm>
+            <a:off x="1051560" y="5248656"/>
+            <a:ext cx="5440680" cy="310896"/>
+          </a:xfrm>
+          <a:prstGeom prst="rect">
+            <a:avLst/>
+          </a:prstGeom>
+          <a:noFill/>
+          <a:ln/>
+        </p:spPr>
+        <p:txBody>
+          <a:bodyPr wrap="square" rtlCol="0" anchor="ctr"/>
+          <a:lstStyle/>
+          <a:p>
+            <a:pPr indent="0" marL="0">
+              <a:buNone/>
+            </a:pPr>
+            <a:r>
+              <a:rPr lang="en-US" sz="1500" b="1" dirty="0">
+                <a:solidFill>
+                  <a:srgbClr val="FF3EA5"/>
+                </a:solidFill>
+                <a:latin typeface="Arial" pitchFamily="34" charset="0"/>
+                <a:ea typeface="Arial" pitchFamily="34" charset="-122"/>
+                <a:cs typeface="Arial" pitchFamily="34" charset="-120"/>
+              </a:rPr>
+              <a:t>Global roster</a:t>
+            </a:r>
+            <a:endParaRPr lang="en-US" sz="1500" dirty="0"/>
+          </a:p>
+        </p:txBody>
+      </p:sp>
+      <p:sp>
+        <p:nvSpPr>
+          <p:cNvPr id="14" name="Text 12"/>
+          <p:cNvSpPr/>
+          <p:nvPr/>
+        </p:nvSpPr>
+        <p:spPr>
+          <a:xfrm>
+            <a:off x="1051560" y="5577840"/>
+            <a:ext cx="5440680" cy="457200"/>
+          </a:xfrm>
+          <a:prstGeom prst="rect">
+            <a:avLst/>
+          </a:prstGeom>
+          <a:noFill/>
+          <a:ln/>
+        </p:spPr>
+        <p:txBody>
+          <a:bodyPr wrap="square" rtlCol="0" anchor="ctr"/>
+          <a:lstStyle/>
+          <a:p>
+            <a:pPr indent="0" marL="0">
+              <a:buNone/>
+            </a:pPr>
+            <a:r>
+              <a:rPr lang="en-US" sz="1250" dirty="0">
+                <a:solidFill>
+                  <a:srgbClr val="C2C2C8"/>
+                </a:solidFill>
+                <a:latin typeface="Arial" pitchFamily="34" charset="0"/>
+                <a:ea typeface="Arial" pitchFamily="34" charset="-122"/>
+                <a:cs typeface="Arial" pitchFamily="34" charset="-120"/>
+              </a:rPr>
+              <a:t>Работаем с топ-моделями и блогерами по всему миру.</a:t>
+            </a:r>
+            <a:endParaRPr lang="en-US" sz="1250" dirty="0"/>
+          </a:p>
+        </p:txBody>
+      </p:sp>
+      <p:sp>
+        <p:nvSpPr>
+          <p:cNvPr id="15" name="Shape 13"/>
+          <p:cNvSpPr/>
+          <p:nvPr/>
+        </p:nvSpPr>
+        <p:spPr>
+          <a:xfrm>
+            <a:off x="7040880" y="1783080"/>
+            <a:ext cx="4526280" cy="4206240"/>
+          </a:xfrm>
+          <a:prstGeom prst="roundRect">
+            <a:avLst>
+              <a:gd name="adj" fmla="val 2826"/>
+            </a:avLst>
+          </a:prstGeom>
+          <a:solidFill>
+            <a:srgbClr val="141419"/>
+          </a:solidFill>
+          <a:ln w="9525">
             <a:solidFill>
-              <a:srgbClr val="FF3EA5"/>
+              <a:srgbClr val="FFFFFF">
+                <a:alpha val="12000"/>
+              </a:srgbClr>
             </a:solidFill>
             <a:prstDash val="solid"/>
           </a:ln>
-          <a:effectLst>
-            <a:outerShdw sx="100000" sy="100000" kx="0" ky="0" algn="bl" rotWithShape="0" blurRad="177800" dist="50800" dir="16200000">
-              <a:srgbClr val="FF0090">
-                <a:alpha val="50000"/>
-              </a:srgbClr>
-            </a:outerShdw>
-          </a:effectLst>
-        </p:spPr>
-      </p:sp>
-      <p:sp>
-        <p:nvSpPr>
-          <p:cNvPr id="6" name="Text 4"/>
-          <p:cNvSpPr/>
-          <p:nvPr/>
-        </p:nvSpPr>
-        <p:spPr>
-          <a:xfrm>
-            <a:off x="1097280" y="3392424"/>
-            <a:ext cx="5394960" cy="310896"/>
+        </p:spPr>
+      </p:sp>
+      <p:sp>
+        <p:nvSpPr>
+          <p:cNvPr id="16" name="Text 14"/>
+          <p:cNvSpPr/>
+          <p:nvPr/>
+        </p:nvSpPr>
+        <p:spPr>
+          <a:xfrm>
+            <a:off x="7360920" y="2148840"/>
+            <a:ext cx="3931920" cy="1188720"/>
           </a:xfrm>
           <a:prstGeom prst="rect">
             <a:avLst/>
@@ -1943,33 +2334,56 @@
           <a:lstStyle/>
           <a:p>
             <a:pPr indent="0" marL="0">
-              <a:buNone/>
-            </a:pPr>
-            <a:r>
-              <a:rPr lang="en-US" sz="1500" b="1" dirty="0">
-                <a:solidFill>
-                  <a:srgbClr val="FF3EA5"/>
-                </a:solidFill>
-                <a:latin typeface="Arial" pitchFamily="34" charset="0"/>
-                <a:ea typeface="Arial" pitchFamily="34" charset="-122"/>
-                <a:cs typeface="Arial" pitchFamily="34" charset="-120"/>
-              </a:rPr>
-              <a:t>Personalized strategy</a:t>
-            </a:r>
-            <a:endParaRPr lang="en-US" sz="1500" dirty="0"/>
-          </a:p>
-        </p:txBody>
-      </p:sp>
-      <p:sp>
-        <p:nvSpPr>
-          <p:cNvPr id="7" name="Text 5"/>
-          <p:cNvSpPr/>
-          <p:nvPr/>
-        </p:nvSpPr>
-        <p:spPr>
-          <a:xfrm>
-            <a:off x="1097280" y="3703320"/>
-            <a:ext cx="5394960" cy="457200"/>
+              <a:lnSpc>
+                <a:spcPct val="105000"/>
+              </a:lnSpc>
+              <a:buNone/>
+            </a:pPr>
+            <a:r>
+              <a:rPr lang="en-US" sz="2700" b="1" dirty="0">
+                <a:solidFill>
+                  <a:srgbClr val="FFFFFF"/>
+                </a:solidFill>
+                <a:latin typeface="Arial" pitchFamily="34" charset="0"/>
+                <a:ea typeface="Arial" pitchFamily="34" charset="-122"/>
+                <a:cs typeface="Arial" pitchFamily="34" charset="-120"/>
+              </a:rPr>
+              <a:t>“No two creators</a:t>
+            </a:r>
+            <a:endParaRPr lang="en-US" sz="2700" dirty="0"/>
+          </a:p>
+          <a:p>
+            <a:pPr indent="0" marL="0">
+              <a:lnSpc>
+                <a:spcPct val="105000"/>
+              </a:lnSpc>
+              <a:buNone/>
+            </a:pPr>
+            <a:r>
+              <a:rPr lang="en-US" sz="2700" b="1" dirty="0">
+                <a:solidFill>
+                  <a:srgbClr val="FFFFFF"/>
+                </a:solidFill>
+                <a:latin typeface="Arial" pitchFamily="34" charset="0"/>
+                <a:ea typeface="Arial" pitchFamily="34" charset="-122"/>
+                <a:cs typeface="Arial" pitchFamily="34" charset="-120"/>
+              </a:rPr>
+              <a:t>are alike.”</a:t>
+            </a:r>
+            <a:endParaRPr lang="en-US" sz="2700" dirty="0"/>
+          </a:p>
+        </p:txBody>
+      </p:sp>
+      <p:sp>
+        <p:nvSpPr>
+          <p:cNvPr id="17" name="Text 15"/>
+          <p:cNvSpPr/>
+          <p:nvPr/>
+        </p:nvSpPr>
+        <p:spPr>
+          <a:xfrm>
+            <a:off x="7360920" y="3474720"/>
+            <a:ext cx="3931920" cy="914400"/>
           </a:xfrm>
           <a:prstGeom prst="rect">
             <a:avLst/>
@@ -1982,262 +2396,41 @@
           <a:lstStyle/>
           <a:p>
             <a:pPr indent="0" marL="0">
-              <a:buNone/>
-            </a:pPr>
-            <a:r>
-              <a:rPr lang="en-US" sz="1250" dirty="0">
-                <a:solidFill>
-                  <a:srgbClr val="C2C2C8"/>
-                </a:solidFill>
-                <a:latin typeface="Arial" pitchFamily="34" charset="0"/>
-                <a:ea typeface="Arial" pitchFamily="34" charset="-122"/>
-                <a:cs typeface="Arial" pitchFamily="34" charset="-120"/>
-              </a:rPr>
-              <a:t>Индивидуальная стратегия под каждого автора — «no two creators are alike».</a:t>
-            </a:r>
-            <a:endParaRPr lang="en-US" sz="1250" dirty="0"/>
-          </a:p>
-        </p:txBody>
-      </p:sp>
-      <p:sp>
-        <p:nvSpPr>
-          <p:cNvPr id="8" name="Shape 6"/>
-          <p:cNvSpPr/>
-          <p:nvPr/>
-        </p:nvSpPr>
-        <p:spPr>
-          <a:xfrm>
-            <a:off x="640080" y="4453128"/>
-            <a:ext cx="310896" cy="310896"/>
-          </a:xfrm>
-          <a:prstGeom prst="ellipse">
-            <a:avLst/>
-          </a:prstGeom>
-          <a:solidFill>
-            <a:srgbClr val="FF149A"/>
-          </a:solidFill>
-          <a:ln w="12700">
-            <a:solidFill>
-              <a:srgbClr val="FF3EA5"/>
-            </a:solidFill>
-            <a:prstDash val="solid"/>
-          </a:ln>
-          <a:effectLst>
-            <a:outerShdw sx="100000" sy="100000" kx="0" ky="0" algn="bl" rotWithShape="0" blurRad="177800" dist="50800" dir="16200000">
-              <a:srgbClr val="FF0090">
-                <a:alpha val="50000"/>
-              </a:srgbClr>
-            </a:outerShdw>
-          </a:effectLst>
-        </p:spPr>
-      </p:sp>
-      <p:sp>
-        <p:nvSpPr>
-          <p:cNvPr id="9" name="Text 7"/>
-          <p:cNvSpPr/>
-          <p:nvPr/>
-        </p:nvSpPr>
-        <p:spPr>
-          <a:xfrm>
-            <a:off x="1097280" y="4306824"/>
-            <a:ext cx="5394960" cy="310896"/>
-          </a:xfrm>
-          <a:prstGeom prst="rect">
-            <a:avLst/>
-          </a:prstGeom>
-          <a:noFill/>
-          <a:ln/>
-        </p:spPr>
-        <p:txBody>
-          <a:bodyPr wrap="square" rtlCol="0" anchor="ctr"/>
-          <a:lstStyle/>
-          <a:p>
-            <a:pPr indent="0" marL="0">
-              <a:buNone/>
-            </a:pPr>
-            <a:r>
-              <a:rPr lang="en-US" sz="1500" b="1" dirty="0">
-                <a:solidFill>
-                  <a:srgbClr val="FF3EA5"/>
-                </a:solidFill>
-                <a:latin typeface="Arial" pitchFamily="34" charset="0"/>
-                <a:ea typeface="Arial" pitchFamily="34" charset="-122"/>
-                <a:cs typeface="Arial" pitchFamily="34" charset="-120"/>
-              </a:rPr>
-              <a:t>Full-cycle management</a:t>
-            </a:r>
-            <a:endParaRPr lang="en-US" sz="1500" dirty="0"/>
-          </a:p>
-        </p:txBody>
-      </p:sp>
-      <p:sp>
-        <p:nvSpPr>
-          <p:cNvPr id="10" name="Text 8"/>
-          <p:cNvSpPr/>
-          <p:nvPr/>
-        </p:nvSpPr>
-        <p:spPr>
-          <a:xfrm>
-            <a:off x="1097280" y="4617720"/>
-            <a:ext cx="5394960" cy="457200"/>
-          </a:xfrm>
-          <a:prstGeom prst="rect">
-            <a:avLst/>
-          </a:prstGeom>
-          <a:noFill/>
-          <a:ln/>
-        </p:spPr>
-        <p:txBody>
-          <a:bodyPr wrap="square" rtlCol="0" anchor="ctr"/>
-          <a:lstStyle/>
-          <a:p>
-            <a:pPr indent="0" marL="0">
-              <a:buNone/>
-            </a:pPr>
-            <a:r>
-              <a:rPr lang="en-US" sz="1250" dirty="0">
-                <a:solidFill>
-                  <a:srgbClr val="C2C2C8"/>
-                </a:solidFill>
-                <a:latin typeface="Arial" pitchFamily="34" charset="0"/>
-                <a:ea typeface="Arial" pitchFamily="34" charset="-122"/>
-                <a:cs typeface="Arial" pitchFamily="34" charset="-120"/>
-              </a:rPr>
-              <a:t>Управление под ключ: контент, соцсети, чаттинг, аналитика.</a:t>
-            </a:r>
-            <a:endParaRPr lang="en-US" sz="1250" dirty="0"/>
-          </a:p>
-        </p:txBody>
-      </p:sp>
-      <p:sp>
-        <p:nvSpPr>
-          <p:cNvPr id="11" name="Shape 9"/>
-          <p:cNvSpPr/>
-          <p:nvPr/>
-        </p:nvSpPr>
-        <p:spPr>
-          <a:xfrm>
-            <a:off x="640080" y="5367528"/>
-            <a:ext cx="310896" cy="310896"/>
-          </a:xfrm>
-          <a:prstGeom prst="ellipse">
-            <a:avLst/>
-          </a:prstGeom>
-          <a:solidFill>
-            <a:srgbClr val="FF149A"/>
-          </a:solidFill>
-          <a:ln w="12700">
-            <a:solidFill>
-              <a:srgbClr val="FF3EA5"/>
-            </a:solidFill>
-            <a:prstDash val="solid"/>
-          </a:ln>
-          <a:effectLst>
-            <a:outerShdw sx="100000" sy="100000" kx="0" ky="0" algn="bl" rotWithShape="0" blurRad="177800" dist="50800" dir="16200000">
-              <a:srgbClr val="FF0090">
-                <a:alpha val="50000"/>
-              </a:srgbClr>
-            </a:outerShdw>
-          </a:effectLst>
-        </p:spPr>
-      </p:sp>
-      <p:sp>
-        <p:nvSpPr>
-          <p:cNvPr id="12" name="Text 10"/>
-          <p:cNvSpPr/>
-          <p:nvPr/>
-        </p:nvSpPr>
-        <p:spPr>
-          <a:xfrm>
-            <a:off x="1097280" y="5221224"/>
-            <a:ext cx="5394960" cy="310896"/>
-          </a:xfrm>
-          <a:prstGeom prst="rect">
-            <a:avLst/>
-          </a:prstGeom>
-          <a:noFill/>
-          <a:ln/>
-        </p:spPr>
-        <p:txBody>
-          <a:bodyPr wrap="square" rtlCol="0" anchor="ctr"/>
-          <a:lstStyle/>
-          <a:p>
-            <a:pPr indent="0" marL="0">
-              <a:buNone/>
-            </a:pPr>
-            <a:r>
-              <a:rPr lang="en-US" sz="1500" b="1" dirty="0">
-                <a:solidFill>
-                  <a:srgbClr val="FF3EA5"/>
-                </a:solidFill>
-                <a:latin typeface="Arial" pitchFamily="34" charset="0"/>
-                <a:ea typeface="Arial" pitchFamily="34" charset="-122"/>
-                <a:cs typeface="Arial" pitchFamily="34" charset="-120"/>
-              </a:rPr>
-              <a:t>Global roster</a:t>
-            </a:r>
-            <a:endParaRPr lang="en-US" sz="1500" dirty="0"/>
-          </a:p>
-        </p:txBody>
-      </p:sp>
-      <p:sp>
-        <p:nvSpPr>
-          <p:cNvPr id="13" name="Text 11"/>
-          <p:cNvSpPr/>
-          <p:nvPr/>
-        </p:nvSpPr>
-        <p:spPr>
-          <a:xfrm>
-            <a:off x="1097280" y="5532120"/>
-            <a:ext cx="5394960" cy="457200"/>
-          </a:xfrm>
-          <a:prstGeom prst="rect">
-            <a:avLst/>
-          </a:prstGeom>
-          <a:noFill/>
-          <a:ln/>
-        </p:spPr>
-        <p:txBody>
-          <a:bodyPr wrap="square" rtlCol="0" anchor="ctr"/>
-          <a:lstStyle/>
-          <a:p>
-            <a:pPr indent="0" marL="0">
-              <a:buNone/>
-            </a:pPr>
-            <a:r>
-              <a:rPr lang="en-US" sz="1250" dirty="0">
-                <a:solidFill>
-                  <a:srgbClr val="C2C2C8"/>
-                </a:solidFill>
-                <a:latin typeface="Arial" pitchFamily="34" charset="0"/>
-                <a:ea typeface="Arial" pitchFamily="34" charset="-122"/>
-                <a:cs typeface="Arial" pitchFamily="34" charset="-120"/>
-              </a:rPr>
-              <a:t>Работаем с топ-моделями и блогерами по всему миру.</a:t>
-            </a:r>
-            <a:endParaRPr lang="en-US" sz="1250" dirty="0"/>
-          </a:p>
-        </p:txBody>
-      </p:sp>
-      <p:sp>
-        <p:nvSpPr>
-          <p:cNvPr id="14" name="Shape 12"/>
-          <p:cNvSpPr/>
-          <p:nvPr/>
-        </p:nvSpPr>
-        <p:spPr>
-          <a:xfrm>
-            <a:off x="7040880" y="1783080"/>
-            <a:ext cx="4526280" cy="4206240"/>
-          </a:xfrm>
-          <a:prstGeom prst="roundRect">
-            <a:avLst>
-              <a:gd name="adj" fmla="val 2609"/>
-            </a:avLst>
-          </a:prstGeom>
-          <a:solidFill>
-            <a:srgbClr val="111114"/>
-          </a:solidFill>
+              <a:lnSpc>
+                <a:spcPct val="125000"/>
+              </a:lnSpc>
+              <a:buNone/>
+            </a:pPr>
+            <a:r>
+              <a:rPr lang="en-US" sz="1350" dirty="0">
+                <a:solidFill>
+                  <a:srgbClr val="BEBEC4"/>
+                </a:solidFill>
+                <a:latin typeface="Arial" pitchFamily="34" charset="0"/>
+                <a:ea typeface="Arial" pitchFamily="34" charset="-122"/>
+                <a:cs typeface="Arial" pitchFamily="34" charset="-120"/>
+              </a:rPr>
+              <a:t>Мы не используем шаблонные решения — стратегия строится под бренд и цели каждого автора.</a:t>
+            </a:r>
+            <a:endParaRPr lang="en-US" sz="1350" dirty="0"/>
+          </a:p>
+        </p:txBody>
+      </p:sp>
+      <p:sp>
+        <p:nvSpPr>
+          <p:cNvPr id="18" name="Shape 16"/>
+          <p:cNvSpPr/>
+          <p:nvPr/>
+        </p:nvSpPr>
+        <p:spPr>
+          <a:xfrm>
+            <a:off x="7360920" y="4572000"/>
+            <a:ext cx="3886200" cy="0"/>
+          </a:xfrm>
+          <a:prstGeom prst="line">
+            <a:avLst/>
+          </a:prstGeom>
+          <a:noFill/>
           <a:ln w="9525">
             <a:solidFill>
               <a:srgbClr val="FFFFFF">
@@ -2250,142 +2443,13 @@
       </p:sp>
       <p:sp>
         <p:nvSpPr>
-          <p:cNvPr id="15" name="Text 13"/>
-          <p:cNvSpPr/>
-          <p:nvPr/>
-        </p:nvSpPr>
-        <p:spPr>
-          <a:xfrm>
-            <a:off x="7360920" y="2148840"/>
-            <a:ext cx="3931920" cy="1188720"/>
-          </a:xfrm>
-          <a:prstGeom prst="rect">
-            <a:avLst/>
-          </a:prstGeom>
-          <a:noFill/>
-          <a:ln/>
-        </p:spPr>
-        <p:txBody>
-          <a:bodyPr wrap="square" rtlCol="0" anchor="ctr"/>
-          <a:lstStyle/>
-          <a:p>
-            <a:pPr algn="l" indent="0" marL="0">
-              <a:lnSpc>
-                <a:spcPct val="105000"/>
-              </a:lnSpc>
-              <a:buNone/>
-            </a:pPr>
-            <a:r>
-              <a:rPr lang="en-US" sz="2700" b="1" dirty="0">
-                <a:solidFill>
-                  <a:srgbClr val="FFFFFF"/>
-                </a:solidFill>
-                <a:latin typeface="Arial" pitchFamily="34" charset="0"/>
-                <a:ea typeface="Arial" pitchFamily="34" charset="-122"/>
-                <a:cs typeface="Arial" pitchFamily="34" charset="-120"/>
-              </a:rPr>
-              <a:t>“No two creators</a:t>
-            </a:r>
-            <a:endParaRPr lang="en-US" sz="2700" dirty="0"/>
-          </a:p>
-          <a:p>
-            <a:pPr algn="l" indent="0" marL="0">
-              <a:lnSpc>
-                <a:spcPct val="105000"/>
-              </a:lnSpc>
-              <a:buNone/>
-            </a:pPr>
-            <a:r>
-              <a:rPr lang="en-US" sz="2700" b="1" dirty="0">
-                <a:solidFill>
-                  <a:srgbClr val="FFFFFF"/>
-                </a:solidFill>
-                <a:latin typeface="Arial" pitchFamily="34" charset="0"/>
-                <a:ea typeface="Arial" pitchFamily="34" charset="-122"/>
-                <a:cs typeface="Arial" pitchFamily="34" charset="-120"/>
-              </a:rPr>
-              <a:t>are alike.”</a:t>
-            </a:r>
-            <a:endParaRPr lang="en-US" sz="2700" dirty="0"/>
-          </a:p>
-        </p:txBody>
-      </p:sp>
-      <p:sp>
-        <p:nvSpPr>
-          <p:cNvPr id="16" name="Text 14"/>
-          <p:cNvSpPr/>
-          <p:nvPr/>
-        </p:nvSpPr>
-        <p:spPr>
-          <a:xfrm>
-            <a:off x="7360920" y="3429000"/>
-            <a:ext cx="3931920" cy="914400"/>
-          </a:xfrm>
-          <a:prstGeom prst="rect">
-            <a:avLst/>
-          </a:prstGeom>
-          <a:noFill/>
-          <a:ln/>
-        </p:spPr>
-        <p:txBody>
-          <a:bodyPr wrap="square" rtlCol="0" anchor="ctr"/>
-          <a:lstStyle/>
-          <a:p>
-            <a:pPr indent="0" marL="0">
-              <a:lnSpc>
-                <a:spcPct val="125000"/>
-              </a:lnSpc>
-              <a:buNone/>
-            </a:pPr>
-            <a:r>
-              <a:rPr lang="en-US" sz="1350" dirty="0">
-                <a:solidFill>
-                  <a:srgbClr val="BEBEC4"/>
-                </a:solidFill>
-                <a:latin typeface="Arial" pitchFamily="34" charset="0"/>
-                <a:ea typeface="Arial" pitchFamily="34" charset="-122"/>
-                <a:cs typeface="Arial" pitchFamily="34" charset="-120"/>
-              </a:rPr>
-              <a:t>Мы не используем шаблонные решения — стратегия строится под бренд и цели каждого автора.</a:t>
-            </a:r>
-            <a:endParaRPr lang="en-US" sz="1350" dirty="0"/>
-          </a:p>
-        </p:txBody>
-      </p:sp>
-      <p:sp>
-        <p:nvSpPr>
-          <p:cNvPr id="17" name="Shape 15"/>
-          <p:cNvSpPr/>
-          <p:nvPr/>
-        </p:nvSpPr>
-        <p:spPr>
-          <a:xfrm>
-            <a:off x="7360920" y="4526280"/>
-            <a:ext cx="3886200" cy="0"/>
-          </a:xfrm>
-          <a:prstGeom prst="line">
-            <a:avLst/>
-          </a:prstGeom>
-          <a:noFill/>
-          <a:ln w="9525">
-            <a:solidFill>
-              <a:srgbClr val="FFFFFF">
-                <a:alpha val="20000"/>
-              </a:srgbClr>
-            </a:solidFill>
-            <a:prstDash val="solid"/>
-          </a:ln>
-        </p:spPr>
-      </p:sp>
-      <p:sp>
-        <p:nvSpPr>
-          <p:cNvPr id="18" name="Text 16"/>
-          <p:cNvSpPr/>
-          <p:nvPr/>
-        </p:nvSpPr>
-        <p:spPr>
-          <a:xfrm>
-            <a:off x="7360920" y="4709160"/>
+          <p:cNvPr id="19" name="Text 17"/>
+          <p:cNvSpPr/>
+          <p:nvPr/>
+        </p:nvSpPr>
+        <p:spPr>
+          <a:xfrm>
+            <a:off x="7360920" y="4754880"/>
             <a:ext cx="3931920" cy="822960"/>
           </a:xfrm>
           <a:prstGeom prst="rect">
@@ -2421,13 +2485,13 @@
       </p:sp>
       <p:sp>
         <p:nvSpPr>
-          <p:cNvPr id="19" name="Text 17"/>
-          <p:cNvSpPr/>
-          <p:nvPr/>
-        </p:nvSpPr>
-        <p:spPr>
-          <a:xfrm>
-            <a:off x="7360920" y="5532120"/>
+          <p:cNvPr id="20" name="Text 18"/>
+          <p:cNvSpPr/>
+          <p:nvPr/>
+        </p:nvSpPr>
+        <p:spPr>
+          <a:xfrm>
+            <a:off x="7360920" y="5577840"/>
             <a:ext cx="3931920" cy="274320"/>
           </a:xfrm>
           <a:prstGeom prst="rect">
@@ -2446,7 +2510,7 @@
             <a:r>
               <a:rPr lang="en-US" sz="1050" dirty="0">
                 <a:solidFill>
-                  <a:srgbClr val="A6A6AE"/>
+                  <a:srgbClr val="9A9AA4"/>
                 </a:solidFill>
                 <a:latin typeface="Arial" pitchFamily="34" charset="0"/>
                 <a:ea typeface="Arial" pitchFamily="34" charset="-122"/>
@@ -2499,14 +2563,34 @@
       </p:grpSpPr>
       <p:sp>
         <p:nvSpPr>
-          <p:cNvPr id="2" name="Text 0"/>
-          <p:cNvSpPr/>
-          <p:nvPr/>
-        </p:nvSpPr>
-        <p:spPr>
-          <a:xfrm>
-            <a:off x="640080" y="411480"/>
-            <a:ext cx="7315200" cy="274320"/>
+          <p:cNvPr id="2" name="Shape 0"/>
+          <p:cNvSpPr/>
+          <p:nvPr/>
+        </p:nvSpPr>
+        <p:spPr>
+          <a:xfrm>
+            <a:off x="640080" y="512064"/>
+            <a:ext cx="109728" cy="109728"/>
+          </a:xfrm>
+          <a:prstGeom prst="ellipse">
+            <a:avLst/>
+          </a:prstGeom>
+          <a:solidFill>
+            <a:srgbClr val="FF149A"/>
+          </a:solidFill>
+          <a:ln/>
+        </p:spPr>
+      </p:sp>
+      <p:sp>
+        <p:nvSpPr>
+          <p:cNvPr id="3" name="Text 1"/>
+          <p:cNvSpPr/>
+          <p:nvPr/>
+        </p:nvSpPr>
+        <p:spPr>
+          <a:xfrm>
+            <a:off x="877824" y="457200"/>
+            <a:ext cx="8229600" cy="274320"/>
           </a:xfrm>
           <a:prstGeom prst="rect">
             <a:avLst/>
@@ -2538,14 +2622,14 @@
       </p:sp>
       <p:sp>
         <p:nvSpPr>
-          <p:cNvPr id="3" name="Text 1"/>
-          <p:cNvSpPr/>
-          <p:nvPr/>
-        </p:nvSpPr>
-        <p:spPr>
-          <a:xfrm>
-            <a:off x="621792" y="685800"/>
-            <a:ext cx="9144000" cy="731520"/>
+          <p:cNvPr id="4" name="Text 2"/>
+          <p:cNvSpPr/>
+          <p:nvPr/>
+        </p:nvSpPr>
+        <p:spPr>
+          <a:xfrm>
+            <a:off x="603504" y="749808"/>
+            <a:ext cx="7315200" cy="731520"/>
           </a:xfrm>
           <a:prstGeom prst="rect">
             <a:avLst/>
@@ -2565,13 +2649,6 @@
                 <a:solidFill>
                   <a:srgbClr val="FFFFFF"/>
                 </a:solidFill>
-                <a:effectLst>
-                  <a:glow rad="101600">
-                    <a:srgbClr val="FF0090">
-                      <a:alpha val="50000"/>
-                    </a:srgbClr>
-                  </a:glow>
-                </a:effectLst>
                 <a:latin typeface="Arial" pitchFamily="34" charset="0"/>
                 <a:ea typeface="Arial" pitchFamily="34" charset="-122"/>
                 <a:cs typeface="Arial" pitchFamily="34" charset="-120"/>
@@ -2579,12 +2656,74 @@
               <a:t>AS Superpowers</a:t>
             </a:r>
             <a:endParaRPr lang="en-US" sz="3800" dirty="0"/>
+          </a:p>
+        </p:txBody>
+      </p:sp>
+      <p:sp>
+        <p:nvSpPr>
+          <p:cNvPr id="5" name="Text 3"/>
+          <p:cNvSpPr/>
+          <p:nvPr/>
+        </p:nvSpPr>
+        <p:spPr>
+          <a:xfrm>
+            <a:off x="6400800" y="932688"/>
+            <a:ext cx="4937760" cy="548640"/>
+          </a:xfrm>
+          <a:prstGeom prst="rect">
+            <a:avLst/>
+          </a:prstGeom>
+          <a:noFill/>
+          <a:ln/>
+        </p:spPr>
+        <p:txBody>
+          <a:bodyPr wrap="square" rtlCol="0" anchor="ctr"/>
+          <a:lstStyle/>
+          <a:p>
+            <a:pPr algn="r" indent="0" marL="0">
+              <a:lnSpc>
+                <a:spcPct val="115000"/>
+              </a:lnSpc>
+              <a:buNone/>
+            </a:pPr>
+            <a:r>
+              <a:rPr lang="en-US" sz="1150" b="1" spc="50" kern="0" dirty="0">
+                <a:solidFill>
+                  <a:srgbClr val="9A9AA4"/>
+                </a:solidFill>
+                <a:latin typeface="Arial" pitchFamily="34" charset="0"/>
+                <a:ea typeface="Arial" pitchFamily="34" charset="-122"/>
+                <a:cs typeface="Arial" pitchFamily="34" charset="-120"/>
+              </a:rPr>
+              <a:t>FEATURED  ·  150+ CREATORS ON ROSTER</a:t>
+            </a:r>
+            <a:endParaRPr lang="en-US" sz="1150" dirty="0"/>
+          </a:p>
+          <a:p>
+            <a:pPr algn="r" indent="0" marL="0">
+              <a:lnSpc>
+                <a:spcPct val="115000"/>
+              </a:lnSpc>
+              <a:buNone/>
+            </a:pPr>
+            <a:r>
+              <a:rPr lang="en-US" sz="1150" b="1" spc="50" kern="0" dirty="0">
+                <a:solidFill>
+                  <a:srgbClr val="9A9AA4"/>
+                </a:solidFill>
+                <a:latin typeface="Arial" pitchFamily="34" charset="0"/>
+                <a:ea typeface="Arial" pitchFamily="34" charset="-122"/>
+                <a:cs typeface="Arial" pitchFamily="34" charset="-120"/>
+              </a:rPr>
+              <a:t>Избранные — часть ростера из 150+ креаторов</a:t>
+            </a:r>
+            <a:endParaRPr lang="en-US" sz="1150" dirty="0"/>
           </a:p>
         </p:txBody>
       </p:sp>
       <p:pic>
         <p:nvPicPr>
-          <p:cNvPr id="4" name="Image 0" descr="/tmp/claude-0/-home-user-dasdsjfoisdjfoisj-github-io/f756b5b4-9ba5-5f42-afc2-0aa030ec1623/scratchpad/asdeck/assets/av-elizabeth.png">    </p:cNvPr>
+          <p:cNvPr id="6" name="Image 0" descr="/tmp/claude-0/-home-user-dasdsjfoisdjfoisj-github-io/f756b5b4-9ba5-5f42-afc2-0aa030ec1623/scratchpad/asdeck/assets/av-elizabeth.png">    </p:cNvPr>
           <p:cNvPicPr>
             <a:picLocks noChangeAspect="1"/>
           </p:cNvPicPr>
@@ -2608,7 +2747,7 @@
       </p:pic>
       <p:sp>
         <p:nvSpPr>
-          <p:cNvPr id="5" name="Text 2"/>
+          <p:cNvPr id="7" name="Text 4"/>
           <p:cNvSpPr/>
           <p:nvPr/>
         </p:nvSpPr>
@@ -2650,7 +2789,7 @@
       </p:sp>
       <p:sp>
         <p:nvSpPr>
-          <p:cNvPr id="6" name="Text 3"/>
+          <p:cNvPr id="8" name="Text 5"/>
           <p:cNvSpPr/>
           <p:nvPr/>
         </p:nvSpPr>
@@ -2675,7 +2814,7 @@
             <a:r>
               <a:rPr lang="en-US" sz="1000" spc="100" kern="0" dirty="0">
                 <a:solidFill>
-                  <a:srgbClr val="A6A6AE"/>
+                  <a:srgbClr val="9A9AA4"/>
                 </a:solidFill>
                 <a:latin typeface="Arial" pitchFamily="34" charset="0"/>
                 <a:ea typeface="Arial" pitchFamily="34" charset="-122"/>
@@ -2689,7 +2828,7 @@
       </p:sp>
       <p:sp>
         <p:nvSpPr>
-          <p:cNvPr id="7" name="Shape 4"/>
+          <p:cNvPr id="9" name="Shape 6"/>
           <p:cNvSpPr/>
           <p:nvPr/>
         </p:nvSpPr>
@@ -2709,7 +2848,7 @@
       </p:sp>
       <p:pic>
         <p:nvPicPr>
-          <p:cNvPr id="8" name="Image 1" descr="/tmp/claude-0/-home-user-dasdsjfoisdjfoisj-github-io/f756b5b4-9ba5-5f42-afc2-0aa030ec1623/scratchpad/asdeck/assets/ic-x.png">    </p:cNvPr>
+          <p:cNvPr id="10" name="Image 1" descr="/tmp/claude-0/-home-user-dasdsjfoisdjfoisj-github-io/f756b5b4-9ba5-5f42-afc2-0aa030ec1623/scratchpad/asdeck/assets/ic-x.png">    </p:cNvPr>
           <p:cNvPicPr>
             <a:picLocks noChangeAspect="1"/>
           </p:cNvPicPr>
@@ -2733,7 +2872,7 @@
       </p:pic>
       <p:sp>
         <p:nvSpPr>
-          <p:cNvPr id="9" name="Shape 5"/>
+          <p:cNvPr id="11" name="Shape 7"/>
           <p:cNvSpPr/>
           <p:nvPr/>
         </p:nvSpPr>
@@ -2753,7 +2892,7 @@
       </p:sp>
       <p:pic>
         <p:nvPicPr>
-          <p:cNvPr id="10" name="Image 2" descr="/tmp/claude-0/-home-user-dasdsjfoisdjfoisj-github-io/f756b5b4-9ba5-5f42-afc2-0aa030ec1623/scratchpad/asdeck/assets/ic-tiktok.png">    </p:cNvPr>
+          <p:cNvPr id="12" name="Image 2" descr="/tmp/claude-0/-home-user-dasdsjfoisdjfoisj-github-io/f756b5b4-9ba5-5f42-afc2-0aa030ec1623/scratchpad/asdeck/assets/ic-tiktok.png">    </p:cNvPr>
           <p:cNvPicPr>
             <a:picLocks noChangeAspect="1"/>
           </p:cNvPicPr>
@@ -2777,7 +2916,7 @@
       </p:pic>
       <p:sp>
         <p:nvSpPr>
-          <p:cNvPr id="11" name="Shape 6"/>
+          <p:cNvPr id="13" name="Shape 8"/>
           <p:cNvSpPr/>
           <p:nvPr/>
         </p:nvSpPr>
@@ -2797,7 +2936,7 @@
       </p:sp>
       <p:pic>
         <p:nvPicPr>
-          <p:cNvPr id="12" name="Image 3" descr="/tmp/claude-0/-home-user-dasdsjfoisdjfoisj-github-io/f756b5b4-9ba5-5f42-afc2-0aa030ec1623/scratchpad/asdeck/assets/ic-instagram.png">    </p:cNvPr>
+          <p:cNvPr id="14" name="Image 3" descr="/tmp/claude-0/-home-user-dasdsjfoisdjfoisj-github-io/f756b5b4-9ba5-5f42-afc2-0aa030ec1623/scratchpad/asdeck/assets/ic-instagram.png">    </p:cNvPr>
           <p:cNvPicPr>
             <a:picLocks noChangeAspect="1"/>
           </p:cNvPicPr>
@@ -2821,7 +2960,7 @@
       </p:pic>
       <p:pic>
         <p:nvPicPr>
-          <p:cNvPr id="13" name="Image 4" descr="/tmp/claude-0/-home-user-dasdsjfoisdjfoisj-github-io/f756b5b4-9ba5-5f42-afc2-0aa030ec1623/scratchpad/asdeck/assets/av-eli.png">    </p:cNvPr>
+          <p:cNvPr id="15" name="Image 4" descr="/tmp/claude-0/-home-user-dasdsjfoisdjfoisj-github-io/f756b5b4-9ba5-5f42-afc2-0aa030ec1623/scratchpad/asdeck/assets/av-eli.png">    </p:cNvPr>
           <p:cNvPicPr>
             <a:picLocks noChangeAspect="1"/>
           </p:cNvPicPr>
@@ -2845,7 +2984,7 @@
       </p:pic>
       <p:sp>
         <p:nvSpPr>
-          <p:cNvPr id="14" name="Text 7"/>
+          <p:cNvPr id="16" name="Text 9"/>
           <p:cNvSpPr/>
           <p:nvPr/>
         </p:nvSpPr>
@@ -2887,7 +3026,7 @@
       </p:sp>
       <p:sp>
         <p:nvSpPr>
-          <p:cNvPr id="15" name="Text 8"/>
+          <p:cNvPr id="17" name="Text 10"/>
           <p:cNvSpPr/>
           <p:nvPr/>
         </p:nvSpPr>
@@ -2912,7 +3051,7 @@
             <a:r>
               <a:rPr lang="en-US" sz="1000" spc="100" kern="0" dirty="0">
                 <a:solidFill>
-                  <a:srgbClr val="A6A6AE"/>
+                  <a:srgbClr val="9A9AA4"/>
                 </a:solidFill>
                 <a:latin typeface="Arial" pitchFamily="34" charset="0"/>
                 <a:ea typeface="Arial" pitchFamily="34" charset="-122"/>
@@ -2926,7 +3065,7 @@
       </p:sp>
       <p:sp>
         <p:nvSpPr>
-          <p:cNvPr id="16" name="Shape 9"/>
+          <p:cNvPr id="18" name="Shape 11"/>
           <p:cNvSpPr/>
           <p:nvPr/>
         </p:nvSpPr>
@@ -2946,7 +3085,7 @@
       </p:sp>
       <p:pic>
         <p:nvPicPr>
-          <p:cNvPr id="17" name="Image 5" descr="/tmp/claude-0/-home-user-dasdsjfoisdjfoisj-github-io/f756b5b4-9ba5-5f42-afc2-0aa030ec1623/scratchpad/asdeck/assets/ic-x.png">    </p:cNvPr>
+          <p:cNvPr id="19" name="Image 5" descr="/tmp/claude-0/-home-user-dasdsjfoisdjfoisj-github-io/f756b5b4-9ba5-5f42-afc2-0aa030ec1623/scratchpad/asdeck/assets/ic-x.png">    </p:cNvPr>
           <p:cNvPicPr>
             <a:picLocks noChangeAspect="1"/>
           </p:cNvPicPr>
@@ -2970,7 +3109,7 @@
       </p:pic>
       <p:sp>
         <p:nvSpPr>
-          <p:cNvPr id="18" name="Shape 10"/>
+          <p:cNvPr id="20" name="Shape 12"/>
           <p:cNvSpPr/>
           <p:nvPr/>
         </p:nvSpPr>
@@ -2990,7 +3129,7 @@
       </p:sp>
       <p:pic>
         <p:nvPicPr>
-          <p:cNvPr id="19" name="Image 6" descr="/tmp/claude-0/-home-user-dasdsjfoisdjfoisj-github-io/f756b5b4-9ba5-5f42-afc2-0aa030ec1623/scratchpad/asdeck/assets/ic-tiktok.png">    </p:cNvPr>
+          <p:cNvPr id="21" name="Image 6" descr="/tmp/claude-0/-home-user-dasdsjfoisdjfoisj-github-io/f756b5b4-9ba5-5f42-afc2-0aa030ec1623/scratchpad/asdeck/assets/ic-tiktok.png">    </p:cNvPr>
           <p:cNvPicPr>
             <a:picLocks noChangeAspect="1"/>
           </p:cNvPicPr>
@@ -3014,7 +3153,7 @@
       </p:pic>
       <p:sp>
         <p:nvSpPr>
-          <p:cNvPr id="20" name="Shape 11"/>
+          <p:cNvPr id="22" name="Shape 13"/>
           <p:cNvSpPr/>
           <p:nvPr/>
         </p:nvSpPr>
@@ -3034,7 +3173,7 @@
       </p:sp>
       <p:pic>
         <p:nvPicPr>
-          <p:cNvPr id="21" name="Image 7" descr="/tmp/claude-0/-home-user-dasdsjfoisdjfoisj-github-io/f756b5b4-9ba5-5f42-afc2-0aa030ec1623/scratchpad/asdeck/assets/ic-instagram.png">    </p:cNvPr>
+          <p:cNvPr id="23" name="Image 7" descr="/tmp/claude-0/-home-user-dasdsjfoisdjfoisj-github-io/f756b5b4-9ba5-5f42-afc2-0aa030ec1623/scratchpad/asdeck/assets/ic-instagram.png">    </p:cNvPr>
           <p:cNvPicPr>
             <a:picLocks noChangeAspect="1"/>
           </p:cNvPicPr>
@@ -3058,7 +3197,7 @@
       </p:pic>
       <p:pic>
         <p:nvPicPr>
-          <p:cNvPr id="22" name="Image 8" descr="/tmp/claude-0/-home-user-dasdsjfoisdjfoisj-github-io/f756b5b4-9ba5-5f42-afc2-0aa030ec1623/scratchpad/asdeck/assets/av-caprice.png">    </p:cNvPr>
+          <p:cNvPr id="24" name="Image 8" descr="/tmp/claude-0/-home-user-dasdsjfoisdjfoisj-github-io/f756b5b4-9ba5-5f42-afc2-0aa030ec1623/scratchpad/asdeck/assets/av-caprice.png">    </p:cNvPr>
           <p:cNvPicPr>
             <a:picLocks noChangeAspect="1"/>
           </p:cNvPicPr>
@@ -3082,7 +3221,7 @@
       </p:pic>
       <p:sp>
         <p:nvSpPr>
-          <p:cNvPr id="23" name="Text 12"/>
+          <p:cNvPr id="25" name="Text 14"/>
           <p:cNvSpPr/>
           <p:nvPr/>
         </p:nvSpPr>
@@ -3124,7 +3263,7 @@
       </p:sp>
       <p:sp>
         <p:nvSpPr>
-          <p:cNvPr id="24" name="Text 13"/>
+          <p:cNvPr id="26" name="Text 15"/>
           <p:cNvSpPr/>
           <p:nvPr/>
         </p:nvSpPr>
@@ -3149,7 +3288,7 @@
             <a:r>
               <a:rPr lang="en-US" sz="1000" spc="100" kern="0" dirty="0">
                 <a:solidFill>
-                  <a:srgbClr val="A6A6AE"/>
+                  <a:srgbClr val="9A9AA4"/>
                 </a:solidFill>
                 <a:latin typeface="Arial" pitchFamily="34" charset="0"/>
                 <a:ea typeface="Arial" pitchFamily="34" charset="-122"/>
@@ -3163,7 +3302,7 @@
       </p:sp>
       <p:sp>
         <p:nvSpPr>
-          <p:cNvPr id="25" name="Shape 14"/>
+          <p:cNvPr id="27" name="Shape 16"/>
           <p:cNvSpPr/>
           <p:nvPr/>
         </p:nvSpPr>
@@ -3183,7 +3322,7 @@
       </p:sp>
       <p:pic>
         <p:nvPicPr>
-          <p:cNvPr id="26" name="Image 9" descr="/tmp/claude-0/-home-user-dasdsjfoisdjfoisj-github-io/f756b5b4-9ba5-5f42-afc2-0aa030ec1623/scratchpad/asdeck/assets/ic-tiktok.png">    </p:cNvPr>
+          <p:cNvPr id="28" name="Image 9" descr="/tmp/claude-0/-home-user-dasdsjfoisdjfoisj-github-io/f756b5b4-9ba5-5f42-afc2-0aa030ec1623/scratchpad/asdeck/assets/ic-tiktok.png">    </p:cNvPr>
           <p:cNvPicPr>
             <a:picLocks noChangeAspect="1"/>
           </p:cNvPicPr>
@@ -3207,7 +3346,7 @@
       </p:pic>
       <p:sp>
         <p:nvSpPr>
-          <p:cNvPr id="27" name="Shape 15"/>
+          <p:cNvPr id="29" name="Shape 17"/>
           <p:cNvSpPr/>
           <p:nvPr/>
         </p:nvSpPr>
@@ -3227,7 +3366,7 @@
       </p:sp>
       <p:pic>
         <p:nvPicPr>
-          <p:cNvPr id="28" name="Image 10" descr="/tmp/claude-0/-home-user-dasdsjfoisdjfoisj-github-io/f756b5b4-9ba5-5f42-afc2-0aa030ec1623/scratchpad/asdeck/assets/ic-instagram.png">    </p:cNvPr>
+          <p:cNvPr id="30" name="Image 10" descr="/tmp/claude-0/-home-user-dasdsjfoisdjfoisj-github-io/f756b5b4-9ba5-5f42-afc2-0aa030ec1623/scratchpad/asdeck/assets/ic-instagram.png">    </p:cNvPr>
           <p:cNvPicPr>
             <a:picLocks noChangeAspect="1"/>
           </p:cNvPicPr>
@@ -3251,7 +3390,7 @@
       </p:pic>
       <p:pic>
         <p:nvPicPr>
-          <p:cNvPr id="29" name="Image 11" descr="/tmp/claude-0/-home-user-dasdsjfoisdjfoisj-github-io/f756b5b4-9ba5-5f42-afc2-0aa030ec1623/scratchpad/asdeck/assets/av-macca.png">    </p:cNvPr>
+          <p:cNvPr id="31" name="Image 11" descr="/tmp/claude-0/-home-user-dasdsjfoisdjfoisj-github-io/f756b5b4-9ba5-5f42-afc2-0aa030ec1623/scratchpad/asdeck/assets/av-macca.png">    </p:cNvPr>
           <p:cNvPicPr>
             <a:picLocks noChangeAspect="1"/>
           </p:cNvPicPr>
@@ -3275,7 +3414,7 @@
       </p:pic>
       <p:sp>
         <p:nvSpPr>
-          <p:cNvPr id="30" name="Text 16"/>
+          <p:cNvPr id="32" name="Text 18"/>
           <p:cNvSpPr/>
           <p:nvPr/>
         </p:nvSpPr>
@@ -3317,7 +3456,7 @@
       </p:sp>
       <p:sp>
         <p:nvSpPr>
-          <p:cNvPr id="31" name="Text 17"/>
+          <p:cNvPr id="33" name="Text 19"/>
           <p:cNvSpPr/>
           <p:nvPr/>
         </p:nvSpPr>
@@ -3342,7 +3481,7 @@
             <a:r>
               <a:rPr lang="en-US" sz="1000" spc="100" kern="0" dirty="0">
                 <a:solidFill>
-                  <a:srgbClr val="A6A6AE"/>
+                  <a:srgbClr val="9A9AA4"/>
                 </a:solidFill>
                 <a:latin typeface="Arial" pitchFamily="34" charset="0"/>
                 <a:ea typeface="Arial" pitchFamily="34" charset="-122"/>
@@ -3356,7 +3495,7 @@
       </p:sp>
       <p:sp>
         <p:nvSpPr>
-          <p:cNvPr id="32" name="Shape 18"/>
+          <p:cNvPr id="34" name="Shape 20"/>
           <p:cNvSpPr/>
           <p:nvPr/>
         </p:nvSpPr>
@@ -3376,7 +3515,7 @@
       </p:sp>
       <p:pic>
         <p:nvPicPr>
-          <p:cNvPr id="33" name="Image 12" descr="/tmp/claude-0/-home-user-dasdsjfoisdjfoisj-github-io/f756b5b4-9ba5-5f42-afc2-0aa030ec1623/scratchpad/asdeck/assets/ic-x.png">    </p:cNvPr>
+          <p:cNvPr id="35" name="Image 12" descr="/tmp/claude-0/-home-user-dasdsjfoisdjfoisj-github-io/f756b5b4-9ba5-5f42-afc2-0aa030ec1623/scratchpad/asdeck/assets/ic-x.png">    </p:cNvPr>
           <p:cNvPicPr>
             <a:picLocks noChangeAspect="1"/>
           </p:cNvPicPr>
@@ -3400,7 +3539,7 @@
       </p:pic>
       <p:sp>
         <p:nvSpPr>
-          <p:cNvPr id="34" name="Shape 19"/>
+          <p:cNvPr id="36" name="Shape 21"/>
           <p:cNvSpPr/>
           <p:nvPr/>
         </p:nvSpPr>
@@ -3420,7 +3559,7 @@
       </p:sp>
       <p:pic>
         <p:nvPicPr>
-          <p:cNvPr id="35" name="Image 13" descr="/tmp/claude-0/-home-user-dasdsjfoisdjfoisj-github-io/f756b5b4-9ba5-5f42-afc2-0aa030ec1623/scratchpad/asdeck/assets/ic-tiktok.png">    </p:cNvPr>
+          <p:cNvPr id="37" name="Image 13" descr="/tmp/claude-0/-home-user-dasdsjfoisdjfoisj-github-io/f756b5b4-9ba5-5f42-afc2-0aa030ec1623/scratchpad/asdeck/assets/ic-tiktok.png">    </p:cNvPr>
           <p:cNvPicPr>
             <a:picLocks noChangeAspect="1"/>
           </p:cNvPicPr>
@@ -3444,7 +3583,7 @@
       </p:pic>
       <p:sp>
         <p:nvSpPr>
-          <p:cNvPr id="36" name="Shape 20"/>
+          <p:cNvPr id="38" name="Shape 22"/>
           <p:cNvSpPr/>
           <p:nvPr/>
         </p:nvSpPr>
@@ -3464,7 +3603,7 @@
       </p:sp>
       <p:pic>
         <p:nvPicPr>
-          <p:cNvPr id="37" name="Image 14" descr="/tmp/claude-0/-home-user-dasdsjfoisdjfoisj-github-io/f756b5b4-9ba5-5f42-afc2-0aa030ec1623/scratchpad/asdeck/assets/ic-instagram.png">    </p:cNvPr>
+          <p:cNvPr id="39" name="Image 14" descr="/tmp/claude-0/-home-user-dasdsjfoisdjfoisj-github-io/f756b5b4-9ba5-5f42-afc2-0aa030ec1623/scratchpad/asdeck/assets/ic-instagram.png">    </p:cNvPr>
           <p:cNvPicPr>
             <a:picLocks noChangeAspect="1"/>
           </p:cNvPicPr>
@@ -3488,7 +3627,7 @@
       </p:pic>
       <p:pic>
         <p:nvPicPr>
-          <p:cNvPr id="38" name="Image 15" descr="/tmp/claude-0/-home-user-dasdsjfoisdjfoisj-github-io/f756b5b4-9ba5-5f42-afc2-0aa030ec1623/scratchpad/asdeck/assets/av-kuri.png">    </p:cNvPr>
+          <p:cNvPr id="40" name="Image 15" descr="/tmp/claude-0/-home-user-dasdsjfoisdjfoisj-github-io/f756b5b4-9ba5-5f42-afc2-0aa030ec1623/scratchpad/asdeck/assets/av-kuri.png">    </p:cNvPr>
           <p:cNvPicPr>
             <a:picLocks noChangeAspect="1"/>
           </p:cNvPicPr>
@@ -3512,7 +3651,7 @@
       </p:pic>
       <p:sp>
         <p:nvSpPr>
-          <p:cNvPr id="39" name="Text 21"/>
+          <p:cNvPr id="41" name="Text 23"/>
           <p:cNvSpPr/>
           <p:nvPr/>
         </p:nvSpPr>
@@ -3554,7 +3693,7 @@
       </p:sp>
       <p:sp>
         <p:nvSpPr>
-          <p:cNvPr id="40" name="Text 22"/>
+          <p:cNvPr id="42" name="Text 24"/>
           <p:cNvSpPr/>
           <p:nvPr/>
         </p:nvSpPr>
@@ -3579,7 +3718,7 @@
             <a:r>
               <a:rPr lang="en-US" sz="1000" spc="100" kern="0" dirty="0">
                 <a:solidFill>
-                  <a:srgbClr val="A6A6AE"/>
+                  <a:srgbClr val="9A9AA4"/>
                 </a:solidFill>
                 <a:latin typeface="Arial" pitchFamily="34" charset="0"/>
                 <a:ea typeface="Arial" pitchFamily="34" charset="-122"/>
@@ -3593,7 +3732,7 @@
       </p:sp>
       <p:sp>
         <p:nvSpPr>
-          <p:cNvPr id="41" name="Shape 23"/>
+          <p:cNvPr id="43" name="Shape 25"/>
           <p:cNvSpPr/>
           <p:nvPr/>
         </p:nvSpPr>
@@ -3613,7 +3752,7 @@
       </p:sp>
       <p:pic>
         <p:nvPicPr>
-          <p:cNvPr id="42" name="Image 16" descr="/tmp/claude-0/-home-user-dasdsjfoisdjfoisj-github-io/f756b5b4-9ba5-5f42-afc2-0aa030ec1623/scratchpad/asdeck/assets/ic-x.png">    </p:cNvPr>
+          <p:cNvPr id="44" name="Image 16" descr="/tmp/claude-0/-home-user-dasdsjfoisdjfoisj-github-io/f756b5b4-9ba5-5f42-afc2-0aa030ec1623/scratchpad/asdeck/assets/ic-x.png">    </p:cNvPr>
           <p:cNvPicPr>
             <a:picLocks noChangeAspect="1"/>
           </p:cNvPicPr>
@@ -3637,7 +3776,7 @@
       </p:pic>
       <p:sp>
         <p:nvSpPr>
-          <p:cNvPr id="43" name="Shape 24"/>
+          <p:cNvPr id="45" name="Shape 26"/>
           <p:cNvSpPr/>
           <p:nvPr/>
         </p:nvSpPr>
@@ -3657,7 +3796,7 @@
       </p:sp>
       <p:pic>
         <p:nvPicPr>
-          <p:cNvPr id="44" name="Image 17" descr="/tmp/claude-0/-home-user-dasdsjfoisdjfoisj-github-io/f756b5b4-9ba5-5f42-afc2-0aa030ec1623/scratchpad/asdeck/assets/ic-tiktok.png">    </p:cNvPr>
+          <p:cNvPr id="46" name="Image 17" descr="/tmp/claude-0/-home-user-dasdsjfoisdjfoisj-github-io/f756b5b4-9ba5-5f42-afc2-0aa030ec1623/scratchpad/asdeck/assets/ic-tiktok.png">    </p:cNvPr>
           <p:cNvPicPr>
             <a:picLocks noChangeAspect="1"/>
           </p:cNvPicPr>
@@ -3681,7 +3820,7 @@
       </p:pic>
       <p:sp>
         <p:nvSpPr>
-          <p:cNvPr id="45" name="Shape 25"/>
+          <p:cNvPr id="47" name="Shape 27"/>
           <p:cNvSpPr/>
           <p:nvPr/>
         </p:nvSpPr>
@@ -3701,7 +3840,7 @@
       </p:sp>
       <p:pic>
         <p:nvPicPr>
-          <p:cNvPr id="46" name="Image 18" descr="/tmp/claude-0/-home-user-dasdsjfoisdjfoisj-github-io/f756b5b4-9ba5-5f42-afc2-0aa030ec1623/scratchpad/asdeck/assets/ic-instagram.png">    </p:cNvPr>
+          <p:cNvPr id="48" name="Image 18" descr="/tmp/claude-0/-home-user-dasdsjfoisdjfoisj-github-io/f756b5b4-9ba5-5f42-afc2-0aa030ec1623/scratchpad/asdeck/assets/ic-instagram.png">    </p:cNvPr>
           <p:cNvPicPr>
             <a:picLocks noChangeAspect="1"/>
           </p:cNvPicPr>
@@ -3725,7 +3864,7 @@
       </p:pic>
       <p:pic>
         <p:nvPicPr>
-          <p:cNvPr id="47" name="Image 19" descr="/tmp/claude-0/-home-user-dasdsjfoisdjfoisj-github-io/f756b5b4-9ba5-5f42-afc2-0aa030ec1623/scratchpad/asdeck/assets/av-qimmah.png">    </p:cNvPr>
+          <p:cNvPr id="49" name="Image 19" descr="/tmp/claude-0/-home-user-dasdsjfoisdjfoisj-github-io/f756b5b4-9ba5-5f42-afc2-0aa030ec1623/scratchpad/asdeck/assets/av-qimmah.png">    </p:cNvPr>
           <p:cNvPicPr>
             <a:picLocks noChangeAspect="1"/>
           </p:cNvPicPr>
@@ -3749,7 +3888,7 @@
       </p:pic>
       <p:sp>
         <p:nvSpPr>
-          <p:cNvPr id="48" name="Text 26"/>
+          <p:cNvPr id="50" name="Text 28"/>
           <p:cNvSpPr/>
           <p:nvPr/>
         </p:nvSpPr>
@@ -3791,7 +3930,7 @@
       </p:sp>
       <p:sp>
         <p:nvSpPr>
-          <p:cNvPr id="49" name="Text 27"/>
+          <p:cNvPr id="51" name="Text 29"/>
           <p:cNvSpPr/>
           <p:nvPr/>
         </p:nvSpPr>
@@ -3816,7 +3955,7 @@
             <a:r>
               <a:rPr lang="en-US" sz="1000" spc="100" kern="0" dirty="0">
                 <a:solidFill>
-                  <a:srgbClr val="A6A6AE"/>
+                  <a:srgbClr val="9A9AA4"/>
                 </a:solidFill>
                 <a:latin typeface="Arial" pitchFamily="34" charset="0"/>
                 <a:ea typeface="Arial" pitchFamily="34" charset="-122"/>
@@ -3830,7 +3969,7 @@
       </p:sp>
       <p:sp>
         <p:nvSpPr>
-          <p:cNvPr id="50" name="Shape 28"/>
+          <p:cNvPr id="52" name="Shape 30"/>
           <p:cNvSpPr/>
           <p:nvPr/>
         </p:nvSpPr>
@@ -3850,7 +3989,7 @@
       </p:sp>
       <p:pic>
         <p:nvPicPr>
-          <p:cNvPr id="51" name="Image 20" descr="/tmp/claude-0/-home-user-dasdsjfoisdjfoisj-github-io/f756b5b4-9ba5-5f42-afc2-0aa030ec1623/scratchpad/asdeck/assets/ic-x.png">    </p:cNvPr>
+          <p:cNvPr id="53" name="Image 20" descr="/tmp/claude-0/-home-user-dasdsjfoisdjfoisj-github-io/f756b5b4-9ba5-5f42-afc2-0aa030ec1623/scratchpad/asdeck/assets/ic-x.png">    </p:cNvPr>
           <p:cNvPicPr>
             <a:picLocks noChangeAspect="1"/>
           </p:cNvPicPr>
@@ -3874,7 +4013,7 @@
       </p:pic>
       <p:sp>
         <p:nvSpPr>
-          <p:cNvPr id="52" name="Shape 29"/>
+          <p:cNvPr id="54" name="Shape 31"/>
           <p:cNvSpPr/>
           <p:nvPr/>
         </p:nvSpPr>
@@ -3894,7 +4033,7 @@
       </p:sp>
       <p:pic>
         <p:nvPicPr>
-          <p:cNvPr id="53" name="Image 21" descr="/tmp/claude-0/-home-user-dasdsjfoisdjfoisj-github-io/f756b5b4-9ba5-5f42-afc2-0aa030ec1623/scratchpad/asdeck/assets/ic-tiktok.png">    </p:cNvPr>
+          <p:cNvPr id="55" name="Image 21" descr="/tmp/claude-0/-home-user-dasdsjfoisdjfoisj-github-io/f756b5b4-9ba5-5f42-afc2-0aa030ec1623/scratchpad/asdeck/assets/ic-tiktok.png">    </p:cNvPr>
           <p:cNvPicPr>
             <a:picLocks noChangeAspect="1"/>
           </p:cNvPicPr>
@@ -3918,7 +4057,7 @@
       </p:pic>
       <p:sp>
         <p:nvSpPr>
-          <p:cNvPr id="54" name="Shape 30"/>
+          <p:cNvPr id="56" name="Shape 32"/>
           <p:cNvSpPr/>
           <p:nvPr/>
         </p:nvSpPr>
@@ -3938,7 +4077,7 @@
       </p:sp>
       <p:pic>
         <p:nvPicPr>
-          <p:cNvPr id="55" name="Image 22" descr="/tmp/claude-0/-home-user-dasdsjfoisdjfoisj-github-io/f756b5b4-9ba5-5f42-afc2-0aa030ec1623/scratchpad/asdeck/assets/ic-instagram.png">    </p:cNvPr>
+          <p:cNvPr id="57" name="Image 22" descr="/tmp/claude-0/-home-user-dasdsjfoisdjfoisj-github-io/f756b5b4-9ba5-5f42-afc2-0aa030ec1623/scratchpad/asdeck/assets/ic-instagram.png">    </p:cNvPr>
           <p:cNvPicPr>
             <a:picLocks noChangeAspect="1"/>
           </p:cNvPicPr>
@@ -3962,7 +4101,7 @@
       </p:pic>
       <p:pic>
         <p:nvPicPr>
-          <p:cNvPr id="56" name="Image 23" descr="/tmp/claude-0/-home-user-dasdsjfoisdjfoisj-github-io/f756b5b4-9ba5-5f42-afc2-0aa030ec1623/scratchpad/asdeck/assets/av-chloe.png">    </p:cNvPr>
+          <p:cNvPr id="58" name="Image 23" descr="/tmp/claude-0/-home-user-dasdsjfoisdjfoisj-github-io/f756b5b4-9ba5-5f42-afc2-0aa030ec1623/scratchpad/asdeck/assets/av-chloe.png">    </p:cNvPr>
           <p:cNvPicPr>
             <a:picLocks noChangeAspect="1"/>
           </p:cNvPicPr>
@@ -3986,7 +4125,7 @@
       </p:pic>
       <p:sp>
         <p:nvSpPr>
-          <p:cNvPr id="57" name="Text 31"/>
+          <p:cNvPr id="59" name="Text 33"/>
           <p:cNvSpPr/>
           <p:nvPr/>
         </p:nvSpPr>
@@ -4028,7 +4167,7 @@
       </p:sp>
       <p:sp>
         <p:nvSpPr>
-          <p:cNvPr id="58" name="Text 32"/>
+          <p:cNvPr id="60" name="Text 34"/>
           <p:cNvSpPr/>
           <p:nvPr/>
         </p:nvSpPr>
@@ -4053,7 +4192,7 @@
             <a:r>
               <a:rPr lang="en-US" sz="1000" spc="100" kern="0" dirty="0">
                 <a:solidFill>
-                  <a:srgbClr val="A6A6AE"/>
+                  <a:srgbClr val="9A9AA4"/>
                 </a:solidFill>
                 <a:latin typeface="Arial" pitchFamily="34" charset="0"/>
                 <a:ea typeface="Arial" pitchFamily="34" charset="-122"/>
@@ -4067,7 +4206,7 @@
       </p:sp>
       <p:sp>
         <p:nvSpPr>
-          <p:cNvPr id="59" name="Shape 33"/>
+          <p:cNvPr id="61" name="Shape 35"/>
           <p:cNvSpPr/>
           <p:nvPr/>
         </p:nvSpPr>
@@ -4087,7 +4226,7 @@
       </p:sp>
       <p:pic>
         <p:nvPicPr>
-          <p:cNvPr id="60" name="Image 24" descr="/tmp/claude-0/-home-user-dasdsjfoisdjfoisj-github-io/f756b5b4-9ba5-5f42-afc2-0aa030ec1623/scratchpad/asdeck/assets/ic-x.png">    </p:cNvPr>
+          <p:cNvPr id="62" name="Image 24" descr="/tmp/claude-0/-home-user-dasdsjfoisdjfoisj-github-io/f756b5b4-9ba5-5f42-afc2-0aa030ec1623/scratchpad/asdeck/assets/ic-x.png">    </p:cNvPr>
           <p:cNvPicPr>
             <a:picLocks noChangeAspect="1"/>
           </p:cNvPicPr>
@@ -4111,7 +4250,7 @@
       </p:pic>
       <p:sp>
         <p:nvSpPr>
-          <p:cNvPr id="61" name="Shape 34"/>
+          <p:cNvPr id="63" name="Shape 36"/>
           <p:cNvSpPr/>
           <p:nvPr/>
         </p:nvSpPr>
@@ -4131,7 +4270,7 @@
       </p:sp>
       <p:pic>
         <p:nvPicPr>
-          <p:cNvPr id="62" name="Image 25" descr="/tmp/claude-0/-home-user-dasdsjfoisdjfoisj-github-io/f756b5b4-9ba5-5f42-afc2-0aa030ec1623/scratchpad/asdeck/assets/ic-tiktok.png">    </p:cNvPr>
+          <p:cNvPr id="64" name="Image 25" descr="/tmp/claude-0/-home-user-dasdsjfoisdjfoisj-github-io/f756b5b4-9ba5-5f42-afc2-0aa030ec1623/scratchpad/asdeck/assets/ic-tiktok.png">    </p:cNvPr>
           <p:cNvPicPr>
             <a:picLocks noChangeAspect="1"/>
           </p:cNvPicPr>
@@ -4155,7 +4294,7 @@
       </p:pic>
       <p:sp>
         <p:nvSpPr>
-          <p:cNvPr id="63" name="Shape 35"/>
+          <p:cNvPr id="65" name="Shape 37"/>
           <p:cNvSpPr/>
           <p:nvPr/>
         </p:nvSpPr>
@@ -4175,7 +4314,7 @@
       </p:sp>
       <p:pic>
         <p:nvPicPr>
-          <p:cNvPr id="64" name="Image 26" descr="/tmp/claude-0/-home-user-dasdsjfoisdjfoisj-github-io/f756b5b4-9ba5-5f42-afc2-0aa030ec1623/scratchpad/asdeck/assets/ic-instagram.png">    </p:cNvPr>
+          <p:cNvPr id="66" name="Image 26" descr="/tmp/claude-0/-home-user-dasdsjfoisdjfoisj-github-io/f756b5b4-9ba5-5f42-afc2-0aa030ec1623/scratchpad/asdeck/assets/ic-instagram.png">    </p:cNvPr>
           <p:cNvPicPr>
             <a:picLocks noChangeAspect="1"/>
           </p:cNvPicPr>
@@ -4199,7 +4338,7 @@
       </p:pic>
       <p:pic>
         <p:nvPicPr>
-          <p:cNvPr id="65" name="Image 27" descr="/tmp/claude-0/-home-user-dasdsjfoisdjfoisj-github-io/f756b5b4-9ba5-5f42-afc2-0aa030ec1623/scratchpad/asdeck/assets/av-zlata.png">    </p:cNvPr>
+          <p:cNvPr id="67" name="Image 27" descr="/tmp/claude-0/-home-user-dasdsjfoisdjfoisj-github-io/f756b5b4-9ba5-5f42-afc2-0aa030ec1623/scratchpad/asdeck/assets/av-zlata.png">    </p:cNvPr>
           <p:cNvPicPr>
             <a:picLocks noChangeAspect="1"/>
           </p:cNvPicPr>
@@ -4223,7 +4362,7 @@
       </p:pic>
       <p:sp>
         <p:nvSpPr>
-          <p:cNvPr id="66" name="Text 36"/>
+          <p:cNvPr id="68" name="Text 38"/>
           <p:cNvSpPr/>
           <p:nvPr/>
         </p:nvSpPr>
@@ -4265,7 +4404,7 @@
       </p:sp>
       <p:sp>
         <p:nvSpPr>
-          <p:cNvPr id="67" name="Text 37"/>
+          <p:cNvPr id="69" name="Text 39"/>
           <p:cNvSpPr/>
           <p:nvPr/>
         </p:nvSpPr>
@@ -4290,7 +4429,7 @@
             <a:r>
               <a:rPr lang="en-US" sz="1000" spc="100" kern="0" dirty="0">
                 <a:solidFill>
-                  <a:srgbClr val="A6A6AE"/>
+                  <a:srgbClr val="9A9AA4"/>
                 </a:solidFill>
                 <a:latin typeface="Arial" pitchFamily="34" charset="0"/>
                 <a:ea typeface="Arial" pitchFamily="34" charset="-122"/>
@@ -4304,7 +4443,7 @@
       </p:sp>
       <p:sp>
         <p:nvSpPr>
-          <p:cNvPr id="68" name="Shape 38"/>
+          <p:cNvPr id="70" name="Shape 40"/>
           <p:cNvSpPr/>
           <p:nvPr/>
         </p:nvSpPr>
@@ -4324,7 +4463,7 @@
       </p:sp>
       <p:pic>
         <p:nvPicPr>
-          <p:cNvPr id="69" name="Image 28" descr="/tmp/claude-0/-home-user-dasdsjfoisdjfoisj-github-io/f756b5b4-9ba5-5f42-afc2-0aa030ec1623/scratchpad/asdeck/assets/ic-x.png">    </p:cNvPr>
+          <p:cNvPr id="71" name="Image 28" descr="/tmp/claude-0/-home-user-dasdsjfoisdjfoisj-github-io/f756b5b4-9ba5-5f42-afc2-0aa030ec1623/scratchpad/asdeck/assets/ic-x.png">    </p:cNvPr>
           <p:cNvPicPr>
             <a:picLocks noChangeAspect="1"/>
           </p:cNvPicPr>
@@ -4348,7 +4487,7 @@
       </p:pic>
       <p:sp>
         <p:nvSpPr>
-          <p:cNvPr id="70" name="Shape 39"/>
+          <p:cNvPr id="72" name="Shape 41"/>
           <p:cNvSpPr/>
           <p:nvPr/>
         </p:nvSpPr>
@@ -4368,7 +4507,7 @@
       </p:sp>
       <p:pic>
         <p:nvPicPr>
-          <p:cNvPr id="71" name="Image 29" descr="/tmp/claude-0/-home-user-dasdsjfoisdjfoisj-github-io/f756b5b4-9ba5-5f42-afc2-0aa030ec1623/scratchpad/asdeck/assets/ic-tiktok.png">    </p:cNvPr>
+          <p:cNvPr id="73" name="Image 29" descr="/tmp/claude-0/-home-user-dasdsjfoisdjfoisj-github-io/f756b5b4-9ba5-5f42-afc2-0aa030ec1623/scratchpad/asdeck/assets/ic-tiktok.png">    </p:cNvPr>
           <p:cNvPicPr>
             <a:picLocks noChangeAspect="1"/>
           </p:cNvPicPr>
@@ -4392,7 +4531,7 @@
       </p:pic>
       <p:sp>
         <p:nvSpPr>
-          <p:cNvPr id="72" name="Shape 40"/>
+          <p:cNvPr id="74" name="Shape 42"/>
           <p:cNvSpPr/>
           <p:nvPr/>
         </p:nvSpPr>
@@ -4412,7 +4551,7 @@
       </p:sp>
       <p:pic>
         <p:nvPicPr>
-          <p:cNvPr id="73" name="Image 30" descr="/tmp/claude-0/-home-user-dasdsjfoisdjfoisj-github-io/f756b5b4-9ba5-5f42-afc2-0aa030ec1623/scratchpad/asdeck/assets/ic-instagram.png">    </p:cNvPr>
+          <p:cNvPr id="75" name="Image 30" descr="/tmp/claude-0/-home-user-dasdsjfoisdjfoisj-github-io/f756b5b4-9ba5-5f42-afc2-0aa030ec1623/scratchpad/asdeck/assets/ic-instagram.png">    </p:cNvPr>
           <p:cNvPicPr>
             <a:picLocks noChangeAspect="1"/>
           </p:cNvPicPr>
@@ -4475,14 +4614,34 @@
       </p:grpSpPr>
       <p:sp>
         <p:nvSpPr>
-          <p:cNvPr id="2" name="Text 0"/>
-          <p:cNvSpPr/>
-          <p:nvPr/>
-        </p:nvSpPr>
-        <p:spPr>
-          <a:xfrm>
-            <a:off x="640080" y="502920"/>
-            <a:ext cx="7315200" cy="274320"/>
+          <p:cNvPr id="2" name="Shape 0"/>
+          <p:cNvSpPr/>
+          <p:nvPr/>
+        </p:nvSpPr>
+        <p:spPr>
+          <a:xfrm>
+            <a:off x="640080" y="557784"/>
+            <a:ext cx="109728" cy="109728"/>
+          </a:xfrm>
+          <a:prstGeom prst="ellipse">
+            <a:avLst/>
+          </a:prstGeom>
+          <a:solidFill>
+            <a:srgbClr val="FF149A"/>
+          </a:solidFill>
+          <a:ln/>
+        </p:spPr>
+      </p:sp>
+      <p:sp>
+        <p:nvSpPr>
+          <p:cNvPr id="3" name="Text 1"/>
+          <p:cNvSpPr/>
+          <p:nvPr/>
+        </p:nvSpPr>
+        <p:spPr>
+          <a:xfrm>
+            <a:off x="877824" y="502920"/>
+            <a:ext cx="8229600" cy="274320"/>
           </a:xfrm>
           <a:prstGeom prst="rect">
             <a:avLst/>
@@ -4514,14 +4673,14 @@
       </p:sp>
       <p:sp>
         <p:nvSpPr>
-          <p:cNvPr id="3" name="Text 1"/>
-          <p:cNvSpPr/>
-          <p:nvPr/>
-        </p:nvSpPr>
-        <p:spPr>
-          <a:xfrm>
-            <a:off x="621792" y="777240"/>
-            <a:ext cx="7315200" cy="731520"/>
+          <p:cNvPr id="4" name="Text 2"/>
+          <p:cNvSpPr/>
+          <p:nvPr/>
+        </p:nvSpPr>
+        <p:spPr>
+          <a:xfrm>
+            <a:off x="603504" y="777240"/>
+            <a:ext cx="10058400" cy="822960"/>
           </a:xfrm>
           <a:prstGeom prst="rect">
             <a:avLst/>
@@ -4553,50 +4712,68 @@
       </p:sp>
       <p:sp>
         <p:nvSpPr>
-          <p:cNvPr id="4" name="Shape 2"/>
+          <p:cNvPr id="5" name="Shape 3"/>
           <p:cNvSpPr/>
           <p:nvPr/>
         </p:nvSpPr>
         <p:spPr>
           <a:xfrm>
             <a:off x="495148" y="1828800"/>
-            <a:ext cx="3520440" cy="2834640"/>
+            <a:ext cx="3520440" cy="2880360"/>
           </a:xfrm>
           <a:prstGeom prst="roundRect">
             <a:avLst>
-              <a:gd name="adj" fmla="val 4516"/>
+              <a:gd name="adj" fmla="val 4127"/>
             </a:avLst>
           </a:prstGeom>
           <a:solidFill>
-            <a:srgbClr val="111114"/>
-          </a:solidFill>
-          <a:ln w="12700">
+            <a:srgbClr val="141419"/>
+          </a:solidFill>
+          <a:ln w="9525">
             <a:solidFill>
-              <a:srgbClr val="FF149A">
-                <a:alpha val="45000"/>
+              <a:srgbClr val="FFFFFF">
+                <a:alpha val="12000"/>
               </a:srgbClr>
             </a:solidFill>
             <a:prstDash val="solid"/>
           </a:ln>
-          <a:effectLst>
-            <a:outerShdw sx="100000" sy="100000" kx="0" ky="0" algn="bl" rotWithShape="0" blurRad="177800" dist="50800" dir="16200000">
-              <a:srgbClr val="FF0090">
-                <a:alpha val="50000"/>
-              </a:srgbClr>
-            </a:outerShdw>
-          </a:effectLst>
-        </p:spPr>
-      </p:sp>
-      <p:sp>
-        <p:nvSpPr>
-          <p:cNvPr id="5" name="Text 3"/>
-          <p:cNvSpPr/>
-          <p:nvPr/>
-        </p:nvSpPr>
-        <p:spPr>
-          <a:xfrm>
-            <a:off x="815188" y="2103120"/>
-            <a:ext cx="1371600" cy="548640"/>
+        </p:spPr>
+      </p:sp>
+      <p:sp>
+        <p:nvSpPr>
+          <p:cNvPr id="6" name="Shape 4"/>
+          <p:cNvSpPr/>
+          <p:nvPr/>
+        </p:nvSpPr>
+        <p:spPr>
+          <a:xfrm>
+            <a:off x="815188" y="2148840"/>
+            <a:ext cx="603504" cy="603504"/>
+          </a:xfrm>
+          <a:prstGeom prst="ellipse">
+            <a:avLst/>
+          </a:prstGeom>
+          <a:solidFill>
+            <a:srgbClr val="FF149A"/>
+          </a:solidFill>
+          <a:ln w="12700">
+            <a:solidFill>
+              <a:srgbClr val="FF3EA5"/>
+            </a:solidFill>
+            <a:prstDash val="solid"/>
+          </a:ln>
+        </p:spPr>
+      </p:sp>
+      <p:sp>
+        <p:nvSpPr>
+          <p:cNvPr id="7" name="Text 5"/>
+          <p:cNvSpPr/>
+          <p:nvPr/>
+        </p:nvSpPr>
+        <p:spPr>
+          <a:xfrm>
+            <a:off x="815188" y="2130552"/>
+            <a:ext cx="603504" cy="603504"/>
           </a:xfrm>
           <a:prstGeom prst="rect">
             <a:avLst/>
@@ -4608,33 +4785,33 @@
           <a:bodyPr wrap="square" rtlCol="0" anchor="ctr"/>
           <a:lstStyle/>
           <a:p>
-            <a:pPr indent="0" marL="0">
-              <a:buNone/>
-            </a:pPr>
-            <a:r>
-              <a:rPr lang="en-US" sz="3000" b="1" dirty="0">
-                <a:solidFill>
-                  <a:srgbClr val="FF3EA5"/>
-                </a:solidFill>
-                <a:latin typeface="Arial" pitchFamily="34" charset="0"/>
-                <a:ea typeface="Arial" pitchFamily="34" charset="-122"/>
-                <a:cs typeface="Arial" pitchFamily="34" charset="-120"/>
-              </a:rPr>
-              <a:t>01</a:t>
-            </a:r>
-            <a:endParaRPr lang="en-US" sz="3000" dirty="0"/>
-          </a:p>
-        </p:txBody>
-      </p:sp>
-      <p:sp>
-        <p:nvSpPr>
-          <p:cNvPr id="6" name="Text 4"/>
-          <p:cNvSpPr/>
-          <p:nvPr/>
-        </p:nvSpPr>
-        <p:spPr>
-          <a:xfrm>
-            <a:off x="815188" y="2788920"/>
+            <a:pPr algn="ctr" indent="0" marL="0">
+              <a:buNone/>
+            </a:pPr>
+            <a:r>
+              <a:rPr lang="en-US" sz="2200" b="1" dirty="0">
+                <a:solidFill>
+                  <a:srgbClr val="FFFFFF"/>
+                </a:solidFill>
+                <a:latin typeface="Arial" pitchFamily="34" charset="0"/>
+                <a:ea typeface="Arial" pitchFamily="34" charset="-122"/>
+                <a:cs typeface="Arial" pitchFamily="34" charset="-120"/>
+              </a:rPr>
+              <a:t>1</a:t>
+            </a:r>
+            <a:endParaRPr lang="en-US" sz="2200" dirty="0"/>
+          </a:p>
+        </p:txBody>
+      </p:sp>
+      <p:sp>
+        <p:nvSpPr>
+          <p:cNvPr id="8" name="Text 6"/>
+          <p:cNvSpPr/>
+          <p:nvPr/>
+        </p:nvSpPr>
+        <p:spPr>
+          <a:xfrm>
+            <a:off x="815188" y="2926080"/>
             <a:ext cx="2880360" cy="777240"/>
           </a:xfrm>
           <a:prstGeom prst="rect">
@@ -4654,7 +4831,7 @@
               <a:buNone/>
             </a:pPr>
             <a:r>
-              <a:rPr lang="en-US" sz="1700" b="1" dirty="0">
+              <a:rPr lang="en-US" sz="1750" b="1" dirty="0">
                 <a:solidFill>
                   <a:srgbClr val="FFFFFF"/>
                 </a:solidFill>
@@ -4664,19 +4841,19 @@
               </a:rPr>
               <a:t>24/7 OnlyFans Coverage</a:t>
             </a:r>
-            <a:endParaRPr lang="en-US" sz="1700" dirty="0"/>
-          </a:p>
-        </p:txBody>
-      </p:sp>
-      <p:sp>
-        <p:nvSpPr>
-          <p:cNvPr id="7" name="Text 5"/>
-          <p:cNvSpPr/>
-          <p:nvPr/>
-        </p:nvSpPr>
-        <p:spPr>
-          <a:xfrm>
-            <a:off x="815188" y="3566160"/>
+            <a:endParaRPr lang="en-US" sz="1750" dirty="0"/>
+          </a:p>
+        </p:txBody>
+      </p:sp>
+      <p:sp>
+        <p:nvSpPr>
+          <p:cNvPr id="9" name="Text 7"/>
+          <p:cNvSpPr/>
+          <p:nvPr/>
+        </p:nvSpPr>
+        <p:spPr>
+          <a:xfrm>
+            <a:off x="815188" y="3703320"/>
             <a:ext cx="2880360" cy="914400"/>
           </a:xfrm>
           <a:prstGeom prst="rect">
@@ -4712,50 +4889,68 @@
       </p:sp>
       <p:sp>
         <p:nvSpPr>
-          <p:cNvPr id="8" name="Shape 6"/>
+          <p:cNvPr id="10" name="Shape 8"/>
           <p:cNvSpPr/>
           <p:nvPr/>
         </p:nvSpPr>
         <p:spPr>
           <a:xfrm>
             <a:off x="4335628" y="1828800"/>
-            <a:ext cx="3520440" cy="2834640"/>
+            <a:ext cx="3520440" cy="2880360"/>
           </a:xfrm>
           <a:prstGeom prst="roundRect">
             <a:avLst>
-              <a:gd name="adj" fmla="val 4516"/>
+              <a:gd name="adj" fmla="val 4127"/>
             </a:avLst>
           </a:prstGeom>
           <a:solidFill>
-            <a:srgbClr val="111114"/>
-          </a:solidFill>
-          <a:ln w="12700">
+            <a:srgbClr val="141419"/>
+          </a:solidFill>
+          <a:ln w="9525">
             <a:solidFill>
-              <a:srgbClr val="FF149A">
-                <a:alpha val="45000"/>
+              <a:srgbClr val="FFFFFF">
+                <a:alpha val="12000"/>
               </a:srgbClr>
             </a:solidFill>
             <a:prstDash val="solid"/>
           </a:ln>
-          <a:effectLst>
-            <a:outerShdw sx="100000" sy="100000" kx="0" ky="0" algn="bl" rotWithShape="0" blurRad="177800" dist="50800" dir="16200000">
-              <a:srgbClr val="FF0090">
-                <a:alpha val="50000"/>
-              </a:srgbClr>
-            </a:outerShdw>
-          </a:effectLst>
-        </p:spPr>
-      </p:sp>
-      <p:sp>
-        <p:nvSpPr>
-          <p:cNvPr id="9" name="Text 7"/>
-          <p:cNvSpPr/>
-          <p:nvPr/>
-        </p:nvSpPr>
-        <p:spPr>
-          <a:xfrm>
-            <a:off x="4655668" y="2103120"/>
-            <a:ext cx="1371600" cy="548640"/>
+        </p:spPr>
+      </p:sp>
+      <p:sp>
+        <p:nvSpPr>
+          <p:cNvPr id="11" name="Shape 9"/>
+          <p:cNvSpPr/>
+          <p:nvPr/>
+        </p:nvSpPr>
+        <p:spPr>
+          <a:xfrm>
+            <a:off x="4655668" y="2148840"/>
+            <a:ext cx="603504" cy="603504"/>
+          </a:xfrm>
+          <a:prstGeom prst="ellipse">
+            <a:avLst/>
+          </a:prstGeom>
+          <a:solidFill>
+            <a:srgbClr val="FF149A"/>
+          </a:solidFill>
+          <a:ln w="12700">
+            <a:solidFill>
+              <a:srgbClr val="FF3EA5"/>
+            </a:solidFill>
+            <a:prstDash val="solid"/>
+          </a:ln>
+        </p:spPr>
+      </p:sp>
+      <p:sp>
+        <p:nvSpPr>
+          <p:cNvPr id="12" name="Text 10"/>
+          <p:cNvSpPr/>
+          <p:nvPr/>
+        </p:nvSpPr>
+        <p:spPr>
+          <a:xfrm>
+            <a:off x="4655668" y="2130552"/>
+            <a:ext cx="603504" cy="603504"/>
           </a:xfrm>
           <a:prstGeom prst="rect">
             <a:avLst/>
@@ -4767,33 +4962,33 @@
           <a:bodyPr wrap="square" rtlCol="0" anchor="ctr"/>
           <a:lstStyle/>
           <a:p>
-            <a:pPr indent="0" marL="0">
-              <a:buNone/>
-            </a:pPr>
-            <a:r>
-              <a:rPr lang="en-US" sz="3000" b="1" dirty="0">
-                <a:solidFill>
-                  <a:srgbClr val="FF3EA5"/>
-                </a:solidFill>
-                <a:latin typeface="Arial" pitchFamily="34" charset="0"/>
-                <a:ea typeface="Arial" pitchFamily="34" charset="-122"/>
-                <a:cs typeface="Arial" pitchFamily="34" charset="-120"/>
-              </a:rPr>
-              <a:t>02</a:t>
-            </a:r>
-            <a:endParaRPr lang="en-US" sz="3000" dirty="0"/>
-          </a:p>
-        </p:txBody>
-      </p:sp>
-      <p:sp>
-        <p:nvSpPr>
-          <p:cNvPr id="10" name="Text 8"/>
-          <p:cNvSpPr/>
-          <p:nvPr/>
-        </p:nvSpPr>
-        <p:spPr>
-          <a:xfrm>
-            <a:off x="4655668" y="2788920"/>
+            <a:pPr algn="ctr" indent="0" marL="0">
+              <a:buNone/>
+            </a:pPr>
+            <a:r>
+              <a:rPr lang="en-US" sz="2200" b="1" dirty="0">
+                <a:solidFill>
+                  <a:srgbClr val="FFFFFF"/>
+                </a:solidFill>
+                <a:latin typeface="Arial" pitchFamily="34" charset="0"/>
+                <a:ea typeface="Arial" pitchFamily="34" charset="-122"/>
+                <a:cs typeface="Arial" pitchFamily="34" charset="-120"/>
+              </a:rPr>
+              <a:t>2</a:t>
+            </a:r>
+            <a:endParaRPr lang="en-US" sz="2200" dirty="0"/>
+          </a:p>
+        </p:txBody>
+      </p:sp>
+      <p:sp>
+        <p:nvSpPr>
+          <p:cNvPr id="13" name="Text 11"/>
+          <p:cNvSpPr/>
+          <p:nvPr/>
+        </p:nvSpPr>
+        <p:spPr>
+          <a:xfrm>
+            <a:off x="4655668" y="2926080"/>
             <a:ext cx="2880360" cy="777240"/>
           </a:xfrm>
           <a:prstGeom prst="rect">
@@ -4813,7 +5008,7 @@
               <a:buNone/>
             </a:pPr>
             <a:r>
-              <a:rPr lang="en-US" sz="1700" b="1" dirty="0">
+              <a:rPr lang="en-US" sz="1750" b="1" dirty="0">
                 <a:solidFill>
                   <a:srgbClr val="FFFFFF"/>
                 </a:solidFill>
@@ -4823,19 +5018,19 @@
               </a:rPr>
               <a:t>Social Media Management</a:t>
             </a:r>
-            <a:endParaRPr lang="en-US" sz="1700" dirty="0"/>
-          </a:p>
-        </p:txBody>
-      </p:sp>
-      <p:sp>
-        <p:nvSpPr>
-          <p:cNvPr id="11" name="Text 9"/>
-          <p:cNvSpPr/>
-          <p:nvPr/>
-        </p:nvSpPr>
-        <p:spPr>
-          <a:xfrm>
-            <a:off x="4655668" y="3566160"/>
+            <a:endParaRPr lang="en-US" sz="1750" dirty="0"/>
+          </a:p>
+        </p:txBody>
+      </p:sp>
+      <p:sp>
+        <p:nvSpPr>
+          <p:cNvPr id="14" name="Text 12"/>
+          <p:cNvSpPr/>
+          <p:nvPr/>
+        </p:nvSpPr>
+        <p:spPr>
+          <a:xfrm>
+            <a:off x="4655668" y="3703320"/>
             <a:ext cx="2880360" cy="914400"/>
           </a:xfrm>
           <a:prstGeom prst="rect">
@@ -4871,50 +5066,68 @@
       </p:sp>
       <p:sp>
         <p:nvSpPr>
-          <p:cNvPr id="12" name="Shape 10"/>
+          <p:cNvPr id="15" name="Shape 13"/>
           <p:cNvSpPr/>
           <p:nvPr/>
         </p:nvSpPr>
         <p:spPr>
           <a:xfrm>
             <a:off x="8176108" y="1828800"/>
-            <a:ext cx="3520440" cy="2834640"/>
+            <a:ext cx="3520440" cy="2880360"/>
           </a:xfrm>
           <a:prstGeom prst="roundRect">
             <a:avLst>
-              <a:gd name="adj" fmla="val 4516"/>
+              <a:gd name="adj" fmla="val 4127"/>
             </a:avLst>
           </a:prstGeom>
           <a:solidFill>
-            <a:srgbClr val="111114"/>
-          </a:solidFill>
-          <a:ln w="12700">
+            <a:srgbClr val="141419"/>
+          </a:solidFill>
+          <a:ln w="9525">
             <a:solidFill>
-              <a:srgbClr val="FF149A">
-                <a:alpha val="45000"/>
+              <a:srgbClr val="FFFFFF">
+                <a:alpha val="12000"/>
               </a:srgbClr>
             </a:solidFill>
             <a:prstDash val="solid"/>
           </a:ln>
-          <a:effectLst>
-            <a:outerShdw sx="100000" sy="100000" kx="0" ky="0" algn="bl" rotWithShape="0" blurRad="177800" dist="50800" dir="16200000">
-              <a:srgbClr val="FF0090">
-                <a:alpha val="50000"/>
-              </a:srgbClr>
-            </a:outerShdw>
-          </a:effectLst>
-        </p:spPr>
-      </p:sp>
-      <p:sp>
-        <p:nvSpPr>
-          <p:cNvPr id="13" name="Text 11"/>
-          <p:cNvSpPr/>
-          <p:nvPr/>
-        </p:nvSpPr>
-        <p:spPr>
-          <a:xfrm>
-            <a:off x="8496148" y="2103120"/>
-            <a:ext cx="1371600" cy="548640"/>
+        </p:spPr>
+      </p:sp>
+      <p:sp>
+        <p:nvSpPr>
+          <p:cNvPr id="16" name="Shape 14"/>
+          <p:cNvSpPr/>
+          <p:nvPr/>
+        </p:nvSpPr>
+        <p:spPr>
+          <a:xfrm>
+            <a:off x="8496148" y="2148840"/>
+            <a:ext cx="603504" cy="603504"/>
+          </a:xfrm>
+          <a:prstGeom prst="ellipse">
+            <a:avLst/>
+          </a:prstGeom>
+          <a:solidFill>
+            <a:srgbClr val="FF149A"/>
+          </a:solidFill>
+          <a:ln w="12700">
+            <a:solidFill>
+              <a:srgbClr val="FF3EA5"/>
+            </a:solidFill>
+            <a:prstDash val="solid"/>
+          </a:ln>
+        </p:spPr>
+      </p:sp>
+      <p:sp>
+        <p:nvSpPr>
+          <p:cNvPr id="17" name="Text 15"/>
+          <p:cNvSpPr/>
+          <p:nvPr/>
+        </p:nvSpPr>
+        <p:spPr>
+          <a:xfrm>
+            <a:off x="8496148" y="2130552"/>
+            <a:ext cx="603504" cy="603504"/>
           </a:xfrm>
           <a:prstGeom prst="rect">
             <a:avLst/>
@@ -4926,33 +5139,33 @@
           <a:bodyPr wrap="square" rtlCol="0" anchor="ctr"/>
           <a:lstStyle/>
           <a:p>
-            <a:pPr indent="0" marL="0">
-              <a:buNone/>
-            </a:pPr>
-            <a:r>
-              <a:rPr lang="en-US" sz="3000" b="1" dirty="0">
-                <a:solidFill>
-                  <a:srgbClr val="FF3EA5"/>
-                </a:solidFill>
-                <a:latin typeface="Arial" pitchFamily="34" charset="0"/>
-                <a:ea typeface="Arial" pitchFamily="34" charset="-122"/>
-                <a:cs typeface="Arial" pitchFamily="34" charset="-120"/>
-              </a:rPr>
-              <a:t>03</a:t>
-            </a:r>
-            <a:endParaRPr lang="en-US" sz="3000" dirty="0"/>
-          </a:p>
-        </p:txBody>
-      </p:sp>
-      <p:sp>
-        <p:nvSpPr>
-          <p:cNvPr id="14" name="Text 12"/>
-          <p:cNvSpPr/>
-          <p:nvPr/>
-        </p:nvSpPr>
-        <p:spPr>
-          <a:xfrm>
-            <a:off x="8496148" y="2788920"/>
+            <a:pPr algn="ctr" indent="0" marL="0">
+              <a:buNone/>
+            </a:pPr>
+            <a:r>
+              <a:rPr lang="en-US" sz="2200" b="1" dirty="0">
+                <a:solidFill>
+                  <a:srgbClr val="FFFFFF"/>
+                </a:solidFill>
+                <a:latin typeface="Arial" pitchFamily="34" charset="0"/>
+                <a:ea typeface="Arial" pitchFamily="34" charset="-122"/>
+                <a:cs typeface="Arial" pitchFamily="34" charset="-120"/>
+              </a:rPr>
+              <a:t>3</a:t>
+            </a:r>
+            <a:endParaRPr lang="en-US" sz="2200" dirty="0"/>
+          </a:p>
+        </p:txBody>
+      </p:sp>
+      <p:sp>
+        <p:nvSpPr>
+          <p:cNvPr id="18" name="Text 16"/>
+          <p:cNvSpPr/>
+          <p:nvPr/>
+        </p:nvSpPr>
+        <p:spPr>
+          <a:xfrm>
+            <a:off x="8496148" y="2926080"/>
             <a:ext cx="2880360" cy="777240"/>
           </a:xfrm>
           <a:prstGeom prst="rect">
@@ -4972,7 +5185,7 @@
               <a:buNone/>
             </a:pPr>
             <a:r>
-              <a:rPr lang="en-US" sz="1700" b="1" dirty="0">
+              <a:rPr lang="en-US" sz="1750" b="1" dirty="0">
                 <a:solidFill>
                   <a:srgbClr val="FFFFFF"/>
                 </a:solidFill>
@@ -4982,19 +5195,19 @@
               </a:rPr>
               <a:t>Content Houses</a:t>
             </a:r>
-            <a:endParaRPr lang="en-US" sz="1700" dirty="0"/>
-          </a:p>
-        </p:txBody>
-      </p:sp>
-      <p:sp>
-        <p:nvSpPr>
-          <p:cNvPr id="15" name="Text 13"/>
-          <p:cNvSpPr/>
-          <p:nvPr/>
-        </p:nvSpPr>
-        <p:spPr>
-          <a:xfrm>
-            <a:off x="8496148" y="3566160"/>
+            <a:endParaRPr lang="en-US" sz="1750" dirty="0"/>
+          </a:p>
+        </p:txBody>
+      </p:sp>
+      <p:sp>
+        <p:nvSpPr>
+          <p:cNvPr id="19" name="Text 17"/>
+          <p:cNvSpPr/>
+          <p:nvPr/>
+        </p:nvSpPr>
+        <p:spPr>
+          <a:xfrm>
+            <a:off x="8496148" y="3703320"/>
             <a:ext cx="2880360" cy="914400"/>
           </a:xfrm>
           <a:prstGeom prst="rect">
@@ -5030,27 +5243,27 @@
       </p:sp>
       <p:sp>
         <p:nvSpPr>
-          <p:cNvPr id="16" name="Shape 14"/>
-          <p:cNvSpPr/>
-          <p:nvPr/>
-        </p:nvSpPr>
-        <p:spPr>
-          <a:xfrm>
-            <a:off x="495148" y="4983480"/>
+          <p:cNvPr id="20" name="Shape 18"/>
+          <p:cNvSpPr/>
+          <p:nvPr/>
+        </p:nvSpPr>
+        <p:spPr>
+          <a:xfrm>
+            <a:off x="495148" y="5029200"/>
             <a:ext cx="3520440" cy="685800"/>
           </a:xfrm>
           <a:prstGeom prst="roundRect">
             <a:avLst>
-              <a:gd name="adj" fmla="val 16000"/>
+              <a:gd name="adj" fmla="val 17333"/>
             </a:avLst>
           </a:prstGeom>
           <a:solidFill>
-            <a:srgbClr val="17171B"/>
+            <a:srgbClr val="1B1B21"/>
           </a:solidFill>
           <a:ln w="9525">
             <a:solidFill>
               <a:srgbClr val="FFFFFF">
-                <a:alpha val="18000"/>
+                <a:alpha val="12000"/>
               </a:srgbClr>
             </a:solidFill>
             <a:prstDash val="solid"/>
@@ -5059,14 +5272,14 @@
       </p:sp>
       <p:sp>
         <p:nvSpPr>
-          <p:cNvPr id="17" name="Shape 15"/>
-          <p:cNvSpPr/>
-          <p:nvPr/>
-        </p:nvSpPr>
-        <p:spPr>
-          <a:xfrm>
-            <a:off x="751180" y="5202936"/>
-            <a:ext cx="237744" cy="237744"/>
+          <p:cNvPr id="21" name="Shape 19"/>
+          <p:cNvSpPr/>
+          <p:nvPr/>
+        </p:nvSpPr>
+        <p:spPr>
+          <a:xfrm>
+            <a:off x="769468" y="5257800"/>
+            <a:ext cx="219456" cy="219456"/>
           </a:xfrm>
           <a:prstGeom prst="ellipse">
             <a:avLst/>
@@ -5079,13 +5292,13 @@
       </p:sp>
       <p:sp>
         <p:nvSpPr>
-          <p:cNvPr id="18" name="Text 16"/>
-          <p:cNvSpPr/>
-          <p:nvPr/>
-        </p:nvSpPr>
-        <p:spPr>
-          <a:xfrm>
-            <a:off x="1153516" y="4983480"/>
+          <p:cNvPr id="22" name="Text 20"/>
+          <p:cNvSpPr/>
+          <p:nvPr/>
+        </p:nvSpPr>
+        <p:spPr>
+          <a:xfrm>
+            <a:off x="1153516" y="5029200"/>
             <a:ext cx="2697480" cy="685800"/>
           </a:xfrm>
           <a:prstGeom prst="rect">
@@ -5118,27 +5331,27 @@
       </p:sp>
       <p:sp>
         <p:nvSpPr>
-          <p:cNvPr id="19" name="Shape 17"/>
-          <p:cNvSpPr/>
-          <p:nvPr/>
-        </p:nvSpPr>
-        <p:spPr>
-          <a:xfrm>
-            <a:off x="4335628" y="4983480"/>
+          <p:cNvPr id="23" name="Shape 21"/>
+          <p:cNvSpPr/>
+          <p:nvPr/>
+        </p:nvSpPr>
+        <p:spPr>
+          <a:xfrm>
+            <a:off x="4335628" y="5029200"/>
             <a:ext cx="3520440" cy="685800"/>
           </a:xfrm>
           <a:prstGeom prst="roundRect">
             <a:avLst>
-              <a:gd name="adj" fmla="val 16000"/>
+              <a:gd name="adj" fmla="val 17333"/>
             </a:avLst>
           </a:prstGeom>
           <a:solidFill>
-            <a:srgbClr val="17171B"/>
+            <a:srgbClr val="1B1B21"/>
           </a:solidFill>
           <a:ln w="9525">
             <a:solidFill>
               <a:srgbClr val="FFFFFF">
-                <a:alpha val="18000"/>
+                <a:alpha val="12000"/>
               </a:srgbClr>
             </a:solidFill>
             <a:prstDash val="solid"/>
@@ -5147,14 +5360,14 @@
       </p:sp>
       <p:sp>
         <p:nvSpPr>
-          <p:cNvPr id="20" name="Shape 18"/>
-          <p:cNvSpPr/>
-          <p:nvPr/>
-        </p:nvSpPr>
-        <p:spPr>
-          <a:xfrm>
-            <a:off x="4591660" y="5202936"/>
-            <a:ext cx="237744" cy="237744"/>
+          <p:cNvPr id="24" name="Shape 22"/>
+          <p:cNvSpPr/>
+          <p:nvPr/>
+        </p:nvSpPr>
+        <p:spPr>
+          <a:xfrm>
+            <a:off x="4609948" y="5257800"/>
+            <a:ext cx="219456" cy="219456"/>
           </a:xfrm>
           <a:prstGeom prst="ellipse">
             <a:avLst/>
@@ -5167,13 +5380,13 @@
       </p:sp>
       <p:sp>
         <p:nvSpPr>
-          <p:cNvPr id="21" name="Text 19"/>
-          <p:cNvSpPr/>
-          <p:nvPr/>
-        </p:nvSpPr>
-        <p:spPr>
-          <a:xfrm>
-            <a:off x="4993996" y="4983480"/>
+          <p:cNvPr id="25" name="Text 23"/>
+          <p:cNvSpPr/>
+          <p:nvPr/>
+        </p:nvSpPr>
+        <p:spPr>
+          <a:xfrm>
+            <a:off x="4993996" y="5029200"/>
             <a:ext cx="2697480" cy="685800"/>
           </a:xfrm>
           <a:prstGeom prst="rect">
@@ -5206,27 +5419,27 @@
       </p:sp>
       <p:sp>
         <p:nvSpPr>
-          <p:cNvPr id="22" name="Shape 20"/>
-          <p:cNvSpPr/>
-          <p:nvPr/>
-        </p:nvSpPr>
-        <p:spPr>
-          <a:xfrm>
-            <a:off x="8176108" y="4983480"/>
+          <p:cNvPr id="26" name="Shape 24"/>
+          <p:cNvSpPr/>
+          <p:nvPr/>
+        </p:nvSpPr>
+        <p:spPr>
+          <a:xfrm>
+            <a:off x="8176108" y="5029200"/>
             <a:ext cx="3520440" cy="685800"/>
           </a:xfrm>
           <a:prstGeom prst="roundRect">
             <a:avLst>
-              <a:gd name="adj" fmla="val 16000"/>
+              <a:gd name="adj" fmla="val 17333"/>
             </a:avLst>
           </a:prstGeom>
           <a:solidFill>
-            <a:srgbClr val="17171B"/>
+            <a:srgbClr val="1B1B21"/>
           </a:solidFill>
           <a:ln w="9525">
             <a:solidFill>
               <a:srgbClr val="FFFFFF">
-                <a:alpha val="18000"/>
+                <a:alpha val="12000"/>
               </a:srgbClr>
             </a:solidFill>
             <a:prstDash val="solid"/>
@@ -5235,14 +5448,14 @@
       </p:sp>
       <p:sp>
         <p:nvSpPr>
-          <p:cNvPr id="23" name="Shape 21"/>
-          <p:cNvSpPr/>
-          <p:nvPr/>
-        </p:nvSpPr>
-        <p:spPr>
-          <a:xfrm>
-            <a:off x="8432140" y="5202936"/>
-            <a:ext cx="237744" cy="237744"/>
+          <p:cNvPr id="27" name="Shape 25"/>
+          <p:cNvSpPr/>
+          <p:nvPr/>
+        </p:nvSpPr>
+        <p:spPr>
+          <a:xfrm>
+            <a:off x="8450428" y="5257800"/>
+            <a:ext cx="219456" cy="219456"/>
           </a:xfrm>
           <a:prstGeom prst="ellipse">
             <a:avLst/>
@@ -5255,13 +5468,13 @@
       </p:sp>
       <p:sp>
         <p:nvSpPr>
-          <p:cNvPr id="24" name="Text 22"/>
-          <p:cNvSpPr/>
-          <p:nvPr/>
-        </p:nvSpPr>
-        <p:spPr>
-          <a:xfrm>
-            <a:off x="8834476" y="4983480"/>
+          <p:cNvPr id="28" name="Text 26"/>
+          <p:cNvSpPr/>
+          <p:nvPr/>
+        </p:nvSpPr>
+        <p:spPr>
+          <a:xfrm>
+            <a:off x="8834476" y="5029200"/>
             <a:ext cx="2697480" cy="685800"/>
           </a:xfrm>
           <a:prstGeom prst="rect">
@@ -5333,14 +5546,34 @@
       </p:grpSpPr>
       <p:sp>
         <p:nvSpPr>
-          <p:cNvPr id="2" name="Text 0"/>
-          <p:cNvSpPr/>
-          <p:nvPr/>
-        </p:nvSpPr>
-        <p:spPr>
-          <a:xfrm>
-            <a:off x="640080" y="502920"/>
-            <a:ext cx="7315200" cy="274320"/>
+          <p:cNvPr id="2" name="Shape 0"/>
+          <p:cNvSpPr/>
+          <p:nvPr/>
+        </p:nvSpPr>
+        <p:spPr>
+          <a:xfrm>
+            <a:off x="640080" y="557784"/>
+            <a:ext cx="109728" cy="109728"/>
+          </a:xfrm>
+          <a:prstGeom prst="ellipse">
+            <a:avLst/>
+          </a:prstGeom>
+          <a:solidFill>
+            <a:srgbClr val="FF149A"/>
+          </a:solidFill>
+          <a:ln/>
+        </p:spPr>
+      </p:sp>
+      <p:sp>
+        <p:nvSpPr>
+          <p:cNvPr id="3" name="Text 1"/>
+          <p:cNvSpPr/>
+          <p:nvPr/>
+        </p:nvSpPr>
+        <p:spPr>
+          <a:xfrm>
+            <a:off x="877824" y="502920"/>
+            <a:ext cx="8229600" cy="274320"/>
           </a:xfrm>
           <a:prstGeom prst="rect">
             <a:avLst/>
@@ -5372,14 +5605,14 @@
       </p:sp>
       <p:sp>
         <p:nvSpPr>
-          <p:cNvPr id="3" name="Text 1"/>
-          <p:cNvSpPr/>
-          <p:nvPr/>
-        </p:nvSpPr>
-        <p:spPr>
-          <a:xfrm>
-            <a:off x="621792" y="777240"/>
-            <a:ext cx="7315200" cy="731520"/>
+          <p:cNvPr id="4" name="Text 2"/>
+          <p:cNvSpPr/>
+          <p:nvPr/>
+        </p:nvSpPr>
+        <p:spPr>
+          <a:xfrm>
+            <a:off x="603504" y="777240"/>
+            <a:ext cx="10058400" cy="822960"/>
           </a:xfrm>
           <a:prstGeom prst="rect">
             <a:avLst/>
@@ -5411,7 +5644,7 @@
       </p:sp>
       <p:sp>
         <p:nvSpPr>
-          <p:cNvPr id="4" name="Shape 2"/>
+          <p:cNvPr id="5" name="Shape 3"/>
           <p:cNvSpPr/>
           <p:nvPr/>
         </p:nvSpPr>
@@ -5422,16 +5655,16 @@
           </a:xfrm>
           <a:prstGeom prst="roundRect">
             <a:avLst>
-              <a:gd name="adj" fmla="val 5957"/>
+              <a:gd name="adj" fmla="val 5532"/>
             </a:avLst>
           </a:prstGeom>
           <a:solidFill>
-            <a:srgbClr val="111114"/>
+            <a:srgbClr val="141419"/>
           </a:solidFill>
           <a:ln w="9525">
             <a:solidFill>
               <a:srgbClr val="FFFFFF">
-                <a:alpha val="18000"/>
+                <a:alpha val="12000"/>
               </a:srgbClr>
             </a:solidFill>
             <a:prstDash val="solid"/>
@@ -5440,13 +5673,13 @@
       </p:sp>
       <p:sp>
         <p:nvSpPr>
-          <p:cNvPr id="5" name="Text 3"/>
-          <p:cNvSpPr/>
-          <p:nvPr/>
-        </p:nvSpPr>
-        <p:spPr>
-          <a:xfrm>
-            <a:off x="454000" y="2240280"/>
+          <p:cNvPr id="6" name="Text 4"/>
+          <p:cNvSpPr/>
+          <p:nvPr/>
+        </p:nvSpPr>
+        <p:spPr>
+          <a:xfrm>
+            <a:off x="454000" y="2286000"/>
             <a:ext cx="2615184" cy="914400"/>
           </a:xfrm>
           <a:prstGeom prst="rect">
@@ -5463,36 +5696,29 @@
               <a:buNone/>
             </a:pPr>
             <a:r>
-              <a:rPr lang="en-US" sz="4800" b="1" dirty="0">
+              <a:rPr lang="en-US" sz="4600" b="1" dirty="0">
                 <a:solidFill>
                   <a:srgbClr val="FF3EA5"/>
                 </a:solidFill>
-                <a:effectLst>
-                  <a:glow rad="101600">
-                    <a:srgbClr val="FF0090">
-                      <a:alpha val="50000"/>
-                    </a:srgbClr>
-                  </a:glow>
-                </a:effectLst>
-                <a:latin typeface="Arial" pitchFamily="34" charset="0"/>
-                <a:ea typeface="Arial" pitchFamily="34" charset="-122"/>
-                <a:cs typeface="Arial" pitchFamily="34" charset="-120"/>
-              </a:rPr>
-              <a:t>79M+</a:t>
-            </a:r>
-            <a:endParaRPr lang="en-US" sz="4800" dirty="0"/>
-          </a:p>
-        </p:txBody>
-      </p:sp>
-      <p:sp>
-        <p:nvSpPr>
-          <p:cNvPr id="6" name="Text 4"/>
-          <p:cNvSpPr/>
-          <p:nvPr/>
-        </p:nvSpPr>
-        <p:spPr>
-          <a:xfrm>
-            <a:off x="454000" y="3246120"/>
+                <a:latin typeface="Arial" pitchFamily="34" charset="0"/>
+                <a:ea typeface="Arial" pitchFamily="34" charset="-122"/>
+                <a:cs typeface="Arial" pitchFamily="34" charset="-120"/>
+              </a:rPr>
+              <a:t>150+</a:t>
+            </a:r>
+            <a:endParaRPr lang="en-US" sz="4600" dirty="0"/>
+          </a:p>
+        </p:txBody>
+      </p:sp>
+      <p:sp>
+        <p:nvSpPr>
+          <p:cNvPr id="7" name="Text 5"/>
+          <p:cNvSpPr/>
+          <p:nvPr/>
+        </p:nvSpPr>
+        <p:spPr>
+          <a:xfrm>
+            <a:off x="454000" y="3291840"/>
             <a:ext cx="2615184" cy="320040"/>
           </a:xfrm>
           <a:prstGeom prst="rect">
@@ -5517,7 +5743,7 @@
                 <a:ea typeface="Arial" pitchFamily="34" charset="-122"/>
                 <a:cs typeface="Arial" pitchFamily="34" charset="-120"/>
               </a:rPr>
-              <a:t>Combined audience</a:t>
+              <a:t>Creators on roster</a:t>
             </a:r>
             <a:endParaRPr lang="en-US" sz="1350" dirty="0"/>
           </a:p>
@@ -5525,13 +5751,13 @@
       </p:sp>
       <p:sp>
         <p:nvSpPr>
-          <p:cNvPr id="7" name="Text 5"/>
-          <p:cNvSpPr/>
-          <p:nvPr/>
-        </p:nvSpPr>
-        <p:spPr>
-          <a:xfrm>
-            <a:off x="454000" y="3566160"/>
+          <p:cNvPr id="8" name="Text 6"/>
+          <p:cNvSpPr/>
+          <p:nvPr/>
+        </p:nvSpPr>
+        <p:spPr>
+          <a:xfrm>
+            <a:off x="454000" y="3611880"/>
             <a:ext cx="2615184" cy="320040"/>
           </a:xfrm>
           <a:prstGeom prst="rect">
@@ -5550,13 +5776,13 @@
             <a:r>
               <a:rPr lang="en-US" sz="1150" dirty="0">
                 <a:solidFill>
-                  <a:srgbClr val="A6A6AE"/>
-                </a:solidFill>
-                <a:latin typeface="Arial" pitchFamily="34" charset="0"/>
-                <a:ea typeface="Arial" pitchFamily="34" charset="-122"/>
-                <a:cs typeface="Arial" pitchFamily="34" charset="-120"/>
-              </a:rPr>
-              <a:t>Суммарная аудитория</a:t>
+                  <a:srgbClr val="9A9AA4"/>
+                </a:solidFill>
+                <a:latin typeface="Arial" pitchFamily="34" charset="0"/>
+                <a:ea typeface="Arial" pitchFamily="34" charset="-122"/>
+                <a:cs typeface="Arial" pitchFamily="34" charset="-120"/>
+              </a:rPr>
+              <a:t>Креаторов в ростере</a:t>
             </a:r>
             <a:endParaRPr lang="en-US" sz="1150" dirty="0"/>
           </a:p>
@@ -5564,7 +5790,7 @@
       </p:sp>
       <p:sp>
         <p:nvSpPr>
-          <p:cNvPr id="8" name="Shape 6"/>
+          <p:cNvPr id="9" name="Shape 7"/>
           <p:cNvSpPr/>
           <p:nvPr/>
         </p:nvSpPr>
@@ -5575,16 +5801,16 @@
           </a:xfrm>
           <a:prstGeom prst="roundRect">
             <a:avLst>
-              <a:gd name="adj" fmla="val 5957"/>
+              <a:gd name="adj" fmla="val 5532"/>
             </a:avLst>
           </a:prstGeom>
           <a:solidFill>
-            <a:srgbClr val="111114"/>
+            <a:srgbClr val="141419"/>
           </a:solidFill>
           <a:ln w="9525">
             <a:solidFill>
               <a:srgbClr val="FFFFFF">
-                <a:alpha val="18000"/>
+                <a:alpha val="12000"/>
               </a:srgbClr>
             </a:solidFill>
             <a:prstDash val="solid"/>
@@ -5593,13 +5819,13 @@
       </p:sp>
       <p:sp>
         <p:nvSpPr>
-          <p:cNvPr id="9" name="Text 7"/>
-          <p:cNvSpPr/>
-          <p:nvPr/>
-        </p:nvSpPr>
-        <p:spPr>
-          <a:xfrm>
-            <a:off x="3343504" y="2240280"/>
+          <p:cNvPr id="10" name="Text 8"/>
+          <p:cNvSpPr/>
+          <p:nvPr/>
+        </p:nvSpPr>
+        <p:spPr>
+          <a:xfrm>
+            <a:off x="3343504" y="2286000"/>
             <a:ext cx="2615184" cy="914400"/>
           </a:xfrm>
           <a:prstGeom prst="rect">
@@ -5616,36 +5842,29 @@
               <a:buNone/>
             </a:pPr>
             <a:r>
-              <a:rPr lang="en-US" sz="4800" b="1" dirty="0">
+              <a:rPr lang="en-US" sz="4600" b="1" dirty="0">
                 <a:solidFill>
                   <a:srgbClr val="FF3EA5"/>
                 </a:solidFill>
-                <a:effectLst>
-                  <a:glow rad="101600">
-                    <a:srgbClr val="FF0090">
-                      <a:alpha val="50000"/>
-                    </a:srgbClr>
-                  </a:glow>
-                </a:effectLst>
-                <a:latin typeface="Arial" pitchFamily="34" charset="0"/>
-                <a:ea typeface="Arial" pitchFamily="34" charset="-122"/>
-                <a:cs typeface="Arial" pitchFamily="34" charset="-120"/>
-              </a:rPr>
-              <a:t>8</a:t>
-            </a:r>
-            <a:endParaRPr lang="en-US" sz="4800" dirty="0"/>
-          </a:p>
-        </p:txBody>
-      </p:sp>
-      <p:sp>
-        <p:nvSpPr>
-          <p:cNvPr id="10" name="Text 8"/>
-          <p:cNvSpPr/>
-          <p:nvPr/>
-        </p:nvSpPr>
-        <p:spPr>
-          <a:xfrm>
-            <a:off x="3343504" y="3246120"/>
+                <a:latin typeface="Arial" pitchFamily="34" charset="0"/>
+                <a:ea typeface="Arial" pitchFamily="34" charset="-122"/>
+                <a:cs typeface="Arial" pitchFamily="34" charset="-120"/>
+              </a:rPr>
+              <a:t>3+</a:t>
+            </a:r>
+            <a:endParaRPr lang="en-US" sz="4600" dirty="0"/>
+          </a:p>
+        </p:txBody>
+      </p:sp>
+      <p:sp>
+        <p:nvSpPr>
+          <p:cNvPr id="11" name="Text 9"/>
+          <p:cNvSpPr/>
+          <p:nvPr/>
+        </p:nvSpPr>
+        <p:spPr>
+          <a:xfrm>
+            <a:off x="3343504" y="3291840"/>
             <a:ext cx="2615184" cy="320040"/>
           </a:xfrm>
           <a:prstGeom prst="rect">
@@ -5670,7 +5889,7 @@
                 <a:ea typeface="Arial" pitchFamily="34" charset="-122"/>
                 <a:cs typeface="Arial" pitchFamily="34" charset="-120"/>
               </a:rPr>
-              <a:t>Top creators featured</a:t>
+              <a:t>Years of experience</a:t>
             </a:r>
             <a:endParaRPr lang="en-US" sz="1350" dirty="0"/>
           </a:p>
@@ -5678,13 +5897,13 @@
       </p:sp>
       <p:sp>
         <p:nvSpPr>
-          <p:cNvPr id="11" name="Text 9"/>
-          <p:cNvSpPr/>
-          <p:nvPr/>
-        </p:nvSpPr>
-        <p:spPr>
-          <a:xfrm>
-            <a:off x="3343504" y="3566160"/>
+          <p:cNvPr id="12" name="Text 10"/>
+          <p:cNvSpPr/>
+          <p:nvPr/>
+        </p:nvSpPr>
+        <p:spPr>
+          <a:xfrm>
+            <a:off x="3343504" y="3611880"/>
             <a:ext cx="2615184" cy="320040"/>
           </a:xfrm>
           <a:prstGeom prst="rect">
@@ -5703,13 +5922,13 @@
             <a:r>
               <a:rPr lang="en-US" sz="1150" dirty="0">
                 <a:solidFill>
-                  <a:srgbClr val="A6A6AE"/>
-                </a:solidFill>
-                <a:latin typeface="Arial" pitchFamily="34" charset="0"/>
-                <a:ea typeface="Arial" pitchFamily="34" charset="-122"/>
-                <a:cs typeface="Arial" pitchFamily="34" charset="-120"/>
-              </a:rPr>
-              <a:t>Топ-авторов в подборке</a:t>
+                  <a:srgbClr val="9A9AA4"/>
+                </a:solidFill>
+                <a:latin typeface="Arial" pitchFamily="34" charset="0"/>
+                <a:ea typeface="Arial" pitchFamily="34" charset="-122"/>
+                <a:cs typeface="Arial" pitchFamily="34" charset="-120"/>
+              </a:rPr>
+              <a:t>Года опыта</a:t>
             </a:r>
             <a:endParaRPr lang="en-US" sz="1150" dirty="0"/>
           </a:p>
@@ -5717,7 +5936,7 @@
       </p:sp>
       <p:sp>
         <p:nvSpPr>
-          <p:cNvPr id="12" name="Shape 10"/>
+          <p:cNvPr id="13" name="Shape 11"/>
           <p:cNvSpPr/>
           <p:nvPr/>
         </p:nvSpPr>
@@ -5728,16 +5947,16 @@
           </a:xfrm>
           <a:prstGeom prst="roundRect">
             <a:avLst>
-              <a:gd name="adj" fmla="val 5957"/>
+              <a:gd name="adj" fmla="val 5532"/>
             </a:avLst>
           </a:prstGeom>
           <a:solidFill>
-            <a:srgbClr val="111114"/>
+            <a:srgbClr val="141419"/>
           </a:solidFill>
           <a:ln w="9525">
             <a:solidFill>
               <a:srgbClr val="FFFFFF">
-                <a:alpha val="18000"/>
+                <a:alpha val="12000"/>
               </a:srgbClr>
             </a:solidFill>
             <a:prstDash val="solid"/>
@@ -5746,13 +5965,13 @@
       </p:sp>
       <p:sp>
         <p:nvSpPr>
-          <p:cNvPr id="13" name="Text 11"/>
-          <p:cNvSpPr/>
-          <p:nvPr/>
-        </p:nvSpPr>
-        <p:spPr>
-          <a:xfrm>
-            <a:off x="6233008" y="2240280"/>
+          <p:cNvPr id="14" name="Text 12"/>
+          <p:cNvSpPr/>
+          <p:nvPr/>
+        </p:nvSpPr>
+        <p:spPr>
+          <a:xfrm>
+            <a:off x="6233008" y="2286000"/>
             <a:ext cx="2615184" cy="914400"/>
           </a:xfrm>
           <a:prstGeom prst="rect">
@@ -5769,36 +5988,29 @@
               <a:buNone/>
             </a:pPr>
             <a:r>
-              <a:rPr lang="en-US" sz="4800" b="1" dirty="0">
+              <a:rPr lang="en-US" sz="4600" b="1" dirty="0">
                 <a:solidFill>
                   <a:srgbClr val="FF3EA5"/>
                 </a:solidFill>
-                <a:effectLst>
-                  <a:glow rad="101600">
-                    <a:srgbClr val="FF0090">
-                      <a:alpha val="50000"/>
-                    </a:srgbClr>
-                  </a:glow>
-                </a:effectLst>
-                <a:latin typeface="Arial" pitchFamily="34" charset="0"/>
-                <a:ea typeface="Arial" pitchFamily="34" charset="-122"/>
-                <a:cs typeface="Arial" pitchFamily="34" charset="-120"/>
-              </a:rPr>
-              <a:t>3+</a:t>
-            </a:r>
-            <a:endParaRPr lang="en-US" sz="4800" dirty="0"/>
-          </a:p>
-        </p:txBody>
-      </p:sp>
-      <p:sp>
-        <p:nvSpPr>
-          <p:cNvPr id="14" name="Text 12"/>
-          <p:cNvSpPr/>
-          <p:nvPr/>
-        </p:nvSpPr>
-        <p:spPr>
-          <a:xfrm>
-            <a:off x="6233008" y="3246120"/>
+                <a:latin typeface="Arial" pitchFamily="34" charset="0"/>
+                <a:ea typeface="Arial" pitchFamily="34" charset="-122"/>
+                <a:cs typeface="Arial" pitchFamily="34" charset="-120"/>
+              </a:rPr>
+              <a:t>24/7</a:t>
+            </a:r>
+            <a:endParaRPr lang="en-US" sz="4600" dirty="0"/>
+          </a:p>
+        </p:txBody>
+      </p:sp>
+      <p:sp>
+        <p:nvSpPr>
+          <p:cNvPr id="15" name="Text 13"/>
+          <p:cNvSpPr/>
+          <p:nvPr/>
+        </p:nvSpPr>
+        <p:spPr>
+          <a:xfrm>
+            <a:off x="6233008" y="3291840"/>
             <a:ext cx="2615184" cy="320040"/>
           </a:xfrm>
           <a:prstGeom prst="rect">
@@ -5823,7 +6035,7 @@
                 <a:ea typeface="Arial" pitchFamily="34" charset="-122"/>
                 <a:cs typeface="Arial" pitchFamily="34" charset="-120"/>
               </a:rPr>
-              <a:t>Years of experience</a:t>
+              <a:t>Dedicated support</a:t>
             </a:r>
             <a:endParaRPr lang="en-US" sz="1350" dirty="0"/>
           </a:p>
@@ -5831,13 +6043,13 @@
       </p:sp>
       <p:sp>
         <p:nvSpPr>
-          <p:cNvPr id="15" name="Text 13"/>
-          <p:cNvSpPr/>
-          <p:nvPr/>
-        </p:nvSpPr>
-        <p:spPr>
-          <a:xfrm>
-            <a:off x="6233008" y="3566160"/>
+          <p:cNvPr id="16" name="Text 14"/>
+          <p:cNvSpPr/>
+          <p:nvPr/>
+        </p:nvSpPr>
+        <p:spPr>
+          <a:xfrm>
+            <a:off x="6233008" y="3611880"/>
             <a:ext cx="2615184" cy="320040"/>
           </a:xfrm>
           <a:prstGeom prst="rect">
@@ -5856,13 +6068,13 @@
             <a:r>
               <a:rPr lang="en-US" sz="1150" dirty="0">
                 <a:solidFill>
-                  <a:srgbClr val="A6A6AE"/>
-                </a:solidFill>
-                <a:latin typeface="Arial" pitchFamily="34" charset="0"/>
-                <a:ea typeface="Arial" pitchFamily="34" charset="-122"/>
-                <a:cs typeface="Arial" pitchFamily="34" charset="-120"/>
-              </a:rPr>
-              <a:t>Года опыта</a:t>
+                  <a:srgbClr val="9A9AA4"/>
+                </a:solidFill>
+                <a:latin typeface="Arial" pitchFamily="34" charset="0"/>
+                <a:ea typeface="Arial" pitchFamily="34" charset="-122"/>
+                <a:cs typeface="Arial" pitchFamily="34" charset="-120"/>
+              </a:rPr>
+              <a:t>Поддержка без выходных</a:t>
             </a:r>
             <a:endParaRPr lang="en-US" sz="1150" dirty="0"/>
           </a:p>
@@ -5870,7 +6082,7 @@
       </p:sp>
       <p:sp>
         <p:nvSpPr>
-          <p:cNvPr id="16" name="Shape 14"/>
+          <p:cNvPr id="17" name="Shape 15"/>
           <p:cNvSpPr/>
           <p:nvPr/>
         </p:nvSpPr>
@@ -5881,16 +6093,16 @@
           </a:xfrm>
           <a:prstGeom prst="roundRect">
             <a:avLst>
-              <a:gd name="adj" fmla="val 5957"/>
+              <a:gd name="adj" fmla="val 5532"/>
             </a:avLst>
           </a:prstGeom>
           <a:solidFill>
-            <a:srgbClr val="111114"/>
+            <a:srgbClr val="141419"/>
           </a:solidFill>
           <a:ln w="9525">
             <a:solidFill>
               <a:srgbClr val="FFFFFF">
-                <a:alpha val="18000"/>
+                <a:alpha val="12000"/>
               </a:srgbClr>
             </a:solidFill>
             <a:prstDash val="solid"/>
@@ -5899,13 +6111,13 @@
       </p:sp>
       <p:sp>
         <p:nvSpPr>
-          <p:cNvPr id="17" name="Text 15"/>
-          <p:cNvSpPr/>
-          <p:nvPr/>
-        </p:nvSpPr>
-        <p:spPr>
-          <a:xfrm>
-            <a:off x="9122512" y="2240280"/>
+          <p:cNvPr id="18" name="Text 16"/>
+          <p:cNvSpPr/>
+          <p:nvPr/>
+        </p:nvSpPr>
+        <p:spPr>
+          <a:xfrm>
+            <a:off x="9122512" y="2286000"/>
             <a:ext cx="2615184" cy="914400"/>
           </a:xfrm>
           <a:prstGeom prst="rect">
@@ -5922,36 +6134,29 @@
               <a:buNone/>
             </a:pPr>
             <a:r>
-              <a:rPr lang="en-US" sz="4800" b="1" dirty="0">
+              <a:rPr lang="en-US" sz="4600" b="1" dirty="0">
                 <a:solidFill>
                   <a:srgbClr val="FF3EA5"/>
                 </a:solidFill>
-                <a:effectLst>
-                  <a:glow rad="101600">
-                    <a:srgbClr val="FF0090">
-                      <a:alpha val="50000"/>
-                    </a:srgbClr>
-                  </a:glow>
-                </a:effectLst>
-                <a:latin typeface="Arial" pitchFamily="34" charset="0"/>
-                <a:ea typeface="Arial" pitchFamily="34" charset="-122"/>
-                <a:cs typeface="Arial" pitchFamily="34" charset="-120"/>
-              </a:rPr>
-              <a:t>24/7</a:t>
-            </a:r>
-            <a:endParaRPr lang="en-US" sz="4800" dirty="0"/>
-          </a:p>
-        </p:txBody>
-      </p:sp>
-      <p:sp>
-        <p:nvSpPr>
-          <p:cNvPr id="18" name="Text 16"/>
-          <p:cNvSpPr/>
-          <p:nvPr/>
-        </p:nvSpPr>
-        <p:spPr>
-          <a:xfrm>
-            <a:off x="9122512" y="3246120"/>
+                <a:latin typeface="Arial" pitchFamily="34" charset="0"/>
+                <a:ea typeface="Arial" pitchFamily="34" charset="-122"/>
+                <a:cs typeface="Arial" pitchFamily="34" charset="-120"/>
+              </a:rPr>
+              <a:t>Global</a:t>
+            </a:r>
+            <a:endParaRPr lang="en-US" sz="4600" dirty="0"/>
+          </a:p>
+        </p:txBody>
+      </p:sp>
+      <p:sp>
+        <p:nvSpPr>
+          <p:cNvPr id="19" name="Text 17"/>
+          <p:cNvSpPr/>
+          <p:nvPr/>
+        </p:nvSpPr>
+        <p:spPr>
+          <a:xfrm>
+            <a:off x="9122512" y="3291840"/>
             <a:ext cx="2615184" cy="320040"/>
           </a:xfrm>
           <a:prstGeom prst="rect">
@@ -5976,7 +6181,7 @@
                 <a:ea typeface="Arial" pitchFamily="34" charset="-122"/>
                 <a:cs typeface="Arial" pitchFamily="34" charset="-120"/>
               </a:rPr>
-              <a:t>Dedicated support</a:t>
+              <a:t>Worldwide talent</a:t>
             </a:r>
             <a:endParaRPr lang="en-US" sz="1350" dirty="0"/>
           </a:p>
@@ -5984,13 +6189,13 @@
       </p:sp>
       <p:sp>
         <p:nvSpPr>
-          <p:cNvPr id="19" name="Text 17"/>
-          <p:cNvSpPr/>
-          <p:nvPr/>
-        </p:nvSpPr>
-        <p:spPr>
-          <a:xfrm>
-            <a:off x="9122512" y="3566160"/>
+          <p:cNvPr id="20" name="Text 18"/>
+          <p:cNvSpPr/>
+          <p:nvPr/>
+        </p:nvSpPr>
+        <p:spPr>
+          <a:xfrm>
+            <a:off x="9122512" y="3611880"/>
             <a:ext cx="2615184" cy="320040"/>
           </a:xfrm>
           <a:prstGeom prst="rect">
@@ -6009,13 +6214,13 @@
             <a:r>
               <a:rPr lang="en-US" sz="1150" dirty="0">
                 <a:solidFill>
-                  <a:srgbClr val="A6A6AE"/>
-                </a:solidFill>
-                <a:latin typeface="Arial" pitchFamily="34" charset="0"/>
-                <a:ea typeface="Arial" pitchFamily="34" charset="-122"/>
-                <a:cs typeface="Arial" pitchFamily="34" charset="-120"/>
-              </a:rPr>
-              <a:t>Поддержка без выходных</a:t>
+                  <a:srgbClr val="9A9AA4"/>
+                </a:solidFill>
+                <a:latin typeface="Arial" pitchFamily="34" charset="0"/>
+                <a:ea typeface="Arial" pitchFamily="34" charset="-122"/>
+                <a:cs typeface="Arial" pitchFamily="34" charset="-120"/>
+              </a:rPr>
+              <a:t>Таланты по всему миру</a:t>
             </a:r>
             <a:endParaRPr lang="en-US" sz="1150" dirty="0"/>
           </a:p>
@@ -6023,7 +6228,7 @@
       </p:sp>
       <p:sp>
         <p:nvSpPr>
-          <p:cNvPr id="20" name="Shape 18"/>
+          <p:cNvPr id="21" name="Shape 19"/>
           <p:cNvSpPr/>
           <p:nvPr/>
         </p:nvSpPr>
@@ -6034,16 +6239,16 @@
           </a:xfrm>
           <a:prstGeom prst="roundRect">
             <a:avLst>
-              <a:gd name="adj" fmla="val 8889"/>
+              <a:gd name="adj" fmla="val 9630"/>
             </a:avLst>
           </a:prstGeom>
           <a:solidFill>
-            <a:srgbClr val="111114"/>
+            <a:srgbClr val="141419"/>
           </a:solidFill>
           <a:ln w="9525">
             <a:solidFill>
               <a:srgbClr val="FFFFFF">
-                <a:alpha val="18000"/>
+                <a:alpha val="12000"/>
               </a:srgbClr>
             </a:solidFill>
             <a:prstDash val="solid"/>
@@ -6052,7 +6257,7 @@
       </p:sp>
       <p:sp>
         <p:nvSpPr>
-          <p:cNvPr id="21" name="Text 19"/>
+          <p:cNvPr id="22" name="Text 20"/>
           <p:cNvSpPr/>
           <p:nvPr/>
         </p:nvSpPr>
@@ -6091,7 +6296,7 @@
       </p:sp>
       <p:sp>
         <p:nvSpPr>
-          <p:cNvPr id="22" name="Text 20"/>
+          <p:cNvPr id="23" name="Text 21"/>
           <p:cNvSpPr/>
           <p:nvPr/>
         </p:nvSpPr>
@@ -6169,14 +6374,34 @@
       </p:grpSpPr>
       <p:sp>
         <p:nvSpPr>
-          <p:cNvPr id="2" name="Text 0"/>
-          <p:cNvSpPr/>
-          <p:nvPr/>
-        </p:nvSpPr>
-        <p:spPr>
-          <a:xfrm>
-            <a:off x="640080" y="502920"/>
-            <a:ext cx="7315200" cy="274320"/>
+          <p:cNvPr id="2" name="Shape 0"/>
+          <p:cNvSpPr/>
+          <p:nvPr/>
+        </p:nvSpPr>
+        <p:spPr>
+          <a:xfrm>
+            <a:off x="640080" y="557784"/>
+            <a:ext cx="109728" cy="109728"/>
+          </a:xfrm>
+          <a:prstGeom prst="ellipse">
+            <a:avLst/>
+          </a:prstGeom>
+          <a:solidFill>
+            <a:srgbClr val="FF149A"/>
+          </a:solidFill>
+          <a:ln/>
+        </p:spPr>
+      </p:sp>
+      <p:sp>
+        <p:nvSpPr>
+          <p:cNvPr id="3" name="Text 1"/>
+          <p:cNvSpPr/>
+          <p:nvPr/>
+        </p:nvSpPr>
+        <p:spPr>
+          <a:xfrm>
+            <a:off x="877824" y="502920"/>
+            <a:ext cx="8229600" cy="274320"/>
           </a:xfrm>
           <a:prstGeom prst="rect">
             <a:avLst/>
@@ -6208,14 +6433,14 @@
       </p:sp>
       <p:sp>
         <p:nvSpPr>
-          <p:cNvPr id="3" name="Text 1"/>
-          <p:cNvSpPr/>
-          <p:nvPr/>
-        </p:nvSpPr>
-        <p:spPr>
-          <a:xfrm>
-            <a:off x="621792" y="777240"/>
-            <a:ext cx="9144000" cy="731520"/>
+          <p:cNvPr id="4" name="Text 2"/>
+          <p:cNvSpPr/>
+          <p:nvPr/>
+        </p:nvSpPr>
+        <p:spPr>
+          <a:xfrm>
+            <a:off x="603504" y="777240"/>
+            <a:ext cx="10058400" cy="822960"/>
           </a:xfrm>
           <a:prstGeom prst="rect">
             <a:avLst/>
@@ -6247,7 +6472,7 @@
       </p:sp>
       <p:sp>
         <p:nvSpPr>
-          <p:cNvPr id="4" name="Shape 2"/>
+          <p:cNvPr id="5" name="Shape 3"/>
           <p:cNvSpPr/>
           <p:nvPr/>
         </p:nvSpPr>
@@ -6258,16 +6483,16 @@
           </a:xfrm>
           <a:prstGeom prst="roundRect">
             <a:avLst>
-              <a:gd name="adj" fmla="val 4895"/>
+              <a:gd name="adj" fmla="val 4545"/>
             </a:avLst>
           </a:prstGeom>
           <a:solidFill>
-            <a:srgbClr val="111114"/>
-          </a:solidFill>
-          <a:ln w="12700">
+            <a:srgbClr val="141419"/>
+          </a:solidFill>
+          <a:ln w="9525">
             <a:solidFill>
-              <a:srgbClr val="FF149A">
-                <a:alpha val="40000"/>
+              <a:srgbClr val="FFFFFF">
+                <a:alpha val="12000"/>
               </a:srgbClr>
             </a:solidFill>
             <a:prstDash val="solid"/>
@@ -6276,46 +6501,39 @@
       </p:sp>
       <p:sp>
         <p:nvSpPr>
-          <p:cNvPr id="5" name="Shape 3"/>
+          <p:cNvPr id="6" name="Shape 4"/>
           <p:cNvSpPr/>
           <p:nvPr/>
         </p:nvSpPr>
         <p:spPr>
           <a:xfrm>
             <a:off x="774040" y="2331720"/>
-            <a:ext cx="822960" cy="822960"/>
+            <a:ext cx="777240" cy="777240"/>
           </a:xfrm>
           <a:prstGeom prst="ellipse">
             <a:avLst/>
           </a:prstGeom>
           <a:solidFill>
-            <a:srgbClr val="C8006A"/>
-          </a:solidFill>
-          <a:ln w="15875">
+            <a:srgbClr val="FF149A"/>
+          </a:solidFill>
+          <a:ln w="12700">
             <a:solidFill>
               <a:srgbClr val="FF3EA5"/>
             </a:solidFill>
             <a:prstDash val="solid"/>
           </a:ln>
-          <a:effectLst>
-            <a:outerShdw sx="100000" sy="100000" kx="0" ky="0" algn="bl" rotWithShape="0" blurRad="177800" dist="50800" dir="16200000">
-              <a:srgbClr val="FF0090">
-                <a:alpha val="50000"/>
-              </a:srgbClr>
-            </a:outerShdw>
-          </a:effectLst>
-        </p:spPr>
-      </p:sp>
-      <p:sp>
-        <p:nvSpPr>
-          <p:cNvPr id="6" name="Text 4"/>
-          <p:cNvSpPr/>
-          <p:nvPr/>
-        </p:nvSpPr>
-        <p:spPr>
-          <a:xfrm>
-            <a:off x="774040" y="2395728"/>
-            <a:ext cx="822960" cy="685800"/>
+        </p:spPr>
+      </p:sp>
+      <p:sp>
+        <p:nvSpPr>
+          <p:cNvPr id="7" name="Text 5"/>
+          <p:cNvSpPr/>
+          <p:nvPr/>
+        </p:nvSpPr>
+        <p:spPr>
+          <a:xfrm>
+            <a:off x="774040" y="2313432"/>
+            <a:ext cx="777240" cy="777240"/>
           </a:xfrm>
           <a:prstGeom prst="rect">
             <a:avLst/>
@@ -6331,7 +6549,7 @@
               <a:buNone/>
             </a:pPr>
             <a:r>
-              <a:rPr lang="en-US" sz="3000" b="1" dirty="0">
+              <a:rPr lang="en-US" sz="2800" b="1" dirty="0">
                 <a:solidFill>
                   <a:srgbClr val="FFFFFF"/>
                 </a:solidFill>
@@ -6341,13 +6559,13 @@
               </a:rPr>
               <a:t>1</a:t>
             </a:r>
-            <a:endParaRPr lang="en-US" sz="3000" dirty="0"/>
-          </a:p>
-        </p:txBody>
-      </p:sp>
-      <p:sp>
-        <p:nvSpPr>
-          <p:cNvPr id="7" name="Text 5"/>
+            <a:endParaRPr lang="en-US" sz="2800" dirty="0"/>
+          </a:p>
+        </p:txBody>
+      </p:sp>
+      <p:sp>
+        <p:nvSpPr>
+          <p:cNvPr id="8" name="Text 6"/>
           <p:cNvSpPr/>
           <p:nvPr/>
         </p:nvSpPr>
@@ -6386,7 +6604,7 @@
       </p:sp>
       <p:sp>
         <p:nvSpPr>
-          <p:cNvPr id="8" name="Text 6"/>
+          <p:cNvPr id="9" name="Text 7"/>
           <p:cNvSpPr/>
           <p:nvPr/>
         </p:nvSpPr>
@@ -6425,7 +6643,7 @@
       </p:sp>
       <p:sp>
         <p:nvSpPr>
-          <p:cNvPr id="9" name="Text 7"/>
+          <p:cNvPr id="10" name="Text 8"/>
           <p:cNvSpPr/>
           <p:nvPr/>
         </p:nvSpPr>
@@ -6467,7 +6685,7 @@
       </p:sp>
       <p:sp>
         <p:nvSpPr>
-          <p:cNvPr id="10" name="Text 8"/>
+          <p:cNvPr id="11" name="Text 9"/>
           <p:cNvSpPr/>
           <p:nvPr/>
         </p:nvSpPr>
@@ -6506,7 +6724,7 @@
       </p:sp>
       <p:sp>
         <p:nvSpPr>
-          <p:cNvPr id="11" name="Shape 9"/>
+          <p:cNvPr id="12" name="Shape 10"/>
           <p:cNvSpPr/>
           <p:nvPr/>
         </p:nvSpPr>
@@ -6517,16 +6735,16 @@
           </a:xfrm>
           <a:prstGeom prst="roundRect">
             <a:avLst>
-              <a:gd name="adj" fmla="val 4895"/>
+              <a:gd name="adj" fmla="val 4545"/>
             </a:avLst>
           </a:prstGeom>
           <a:solidFill>
-            <a:srgbClr val="111114"/>
-          </a:solidFill>
-          <a:ln w="12700">
+            <a:srgbClr val="141419"/>
+          </a:solidFill>
+          <a:ln w="9525">
             <a:solidFill>
-              <a:srgbClr val="FF149A">
-                <a:alpha val="40000"/>
+              <a:srgbClr val="FFFFFF">
+                <a:alpha val="12000"/>
               </a:srgbClr>
             </a:solidFill>
             <a:prstDash val="solid"/>
@@ -6535,46 +6753,39 @@
       </p:sp>
       <p:sp>
         <p:nvSpPr>
-          <p:cNvPr id="12" name="Shape 10"/>
+          <p:cNvPr id="13" name="Shape 11"/>
           <p:cNvSpPr/>
           <p:nvPr/>
         </p:nvSpPr>
         <p:spPr>
           <a:xfrm>
             <a:off x="3663544" y="2331720"/>
-            <a:ext cx="822960" cy="822960"/>
+            <a:ext cx="777240" cy="777240"/>
           </a:xfrm>
           <a:prstGeom prst="ellipse">
             <a:avLst/>
           </a:prstGeom>
           <a:solidFill>
-            <a:srgbClr val="C8006A"/>
-          </a:solidFill>
-          <a:ln w="15875">
+            <a:srgbClr val="FF149A"/>
+          </a:solidFill>
+          <a:ln w="12700">
             <a:solidFill>
               <a:srgbClr val="FF3EA5"/>
             </a:solidFill>
             <a:prstDash val="solid"/>
           </a:ln>
-          <a:effectLst>
-            <a:outerShdw sx="100000" sy="100000" kx="0" ky="0" algn="bl" rotWithShape="0" blurRad="177800" dist="50800" dir="16200000">
-              <a:srgbClr val="FF0090">
-                <a:alpha val="50000"/>
-              </a:srgbClr>
-            </a:outerShdw>
-          </a:effectLst>
-        </p:spPr>
-      </p:sp>
-      <p:sp>
-        <p:nvSpPr>
-          <p:cNvPr id="13" name="Text 11"/>
-          <p:cNvSpPr/>
-          <p:nvPr/>
-        </p:nvSpPr>
-        <p:spPr>
-          <a:xfrm>
-            <a:off x="3663544" y="2395728"/>
-            <a:ext cx="822960" cy="685800"/>
+        </p:spPr>
+      </p:sp>
+      <p:sp>
+        <p:nvSpPr>
+          <p:cNvPr id="14" name="Text 12"/>
+          <p:cNvSpPr/>
+          <p:nvPr/>
+        </p:nvSpPr>
+        <p:spPr>
+          <a:xfrm>
+            <a:off x="3663544" y="2313432"/>
+            <a:ext cx="777240" cy="777240"/>
           </a:xfrm>
           <a:prstGeom prst="rect">
             <a:avLst/>
@@ -6590,7 +6801,7 @@
               <a:buNone/>
             </a:pPr>
             <a:r>
-              <a:rPr lang="en-US" sz="3000" b="1" dirty="0">
+              <a:rPr lang="en-US" sz="2800" b="1" dirty="0">
                 <a:solidFill>
                   <a:srgbClr val="FFFFFF"/>
                 </a:solidFill>
@@ -6600,13 +6811,13 @@
               </a:rPr>
               <a:t>2</a:t>
             </a:r>
-            <a:endParaRPr lang="en-US" sz="3000" dirty="0"/>
-          </a:p>
-        </p:txBody>
-      </p:sp>
-      <p:sp>
-        <p:nvSpPr>
-          <p:cNvPr id="14" name="Text 12"/>
+            <a:endParaRPr lang="en-US" sz="2800" dirty="0"/>
+          </a:p>
+        </p:txBody>
+      </p:sp>
+      <p:sp>
+        <p:nvSpPr>
+          <p:cNvPr id="15" name="Text 13"/>
           <p:cNvSpPr/>
           <p:nvPr/>
         </p:nvSpPr>
@@ -6645,7 +6856,7 @@
       </p:sp>
       <p:sp>
         <p:nvSpPr>
-          <p:cNvPr id="15" name="Text 13"/>
+          <p:cNvPr id="16" name="Text 14"/>
           <p:cNvSpPr/>
           <p:nvPr/>
         </p:nvSpPr>
@@ -6684,7 +6895,7 @@
       </p:sp>
       <p:sp>
         <p:nvSpPr>
-          <p:cNvPr id="16" name="Text 14"/>
+          <p:cNvPr id="17" name="Text 15"/>
           <p:cNvSpPr/>
           <p:nvPr/>
         </p:nvSpPr>
@@ -6726,7 +6937,7 @@
       </p:sp>
       <p:sp>
         <p:nvSpPr>
-          <p:cNvPr id="17" name="Text 15"/>
+          <p:cNvPr id="18" name="Text 16"/>
           <p:cNvSpPr/>
           <p:nvPr/>
         </p:nvSpPr>
@@ -6765,7 +6976,7 @@
       </p:sp>
       <p:sp>
         <p:nvSpPr>
-          <p:cNvPr id="18" name="Shape 16"/>
+          <p:cNvPr id="19" name="Shape 17"/>
           <p:cNvSpPr/>
           <p:nvPr/>
         </p:nvSpPr>
@@ -6776,16 +6987,16 @@
           </a:xfrm>
           <a:prstGeom prst="roundRect">
             <a:avLst>
-              <a:gd name="adj" fmla="val 4895"/>
+              <a:gd name="adj" fmla="val 4545"/>
             </a:avLst>
           </a:prstGeom>
           <a:solidFill>
-            <a:srgbClr val="111114"/>
-          </a:solidFill>
-          <a:ln w="12700">
+            <a:srgbClr val="141419"/>
+          </a:solidFill>
+          <a:ln w="9525">
             <a:solidFill>
-              <a:srgbClr val="FF149A">
-                <a:alpha val="40000"/>
+              <a:srgbClr val="FFFFFF">
+                <a:alpha val="12000"/>
               </a:srgbClr>
             </a:solidFill>
             <a:prstDash val="solid"/>
@@ -6794,46 +7005,39 @@
       </p:sp>
       <p:sp>
         <p:nvSpPr>
-          <p:cNvPr id="19" name="Shape 17"/>
+          <p:cNvPr id="20" name="Shape 18"/>
           <p:cNvSpPr/>
           <p:nvPr/>
         </p:nvSpPr>
         <p:spPr>
           <a:xfrm>
             <a:off x="6553048" y="2331720"/>
-            <a:ext cx="822960" cy="822960"/>
+            <a:ext cx="777240" cy="777240"/>
           </a:xfrm>
           <a:prstGeom prst="ellipse">
             <a:avLst/>
           </a:prstGeom>
           <a:solidFill>
-            <a:srgbClr val="C8006A"/>
-          </a:solidFill>
-          <a:ln w="15875">
+            <a:srgbClr val="FF149A"/>
+          </a:solidFill>
+          <a:ln w="12700">
             <a:solidFill>
               <a:srgbClr val="FF3EA5"/>
             </a:solidFill>
             <a:prstDash val="solid"/>
           </a:ln>
-          <a:effectLst>
-            <a:outerShdw sx="100000" sy="100000" kx="0" ky="0" algn="bl" rotWithShape="0" blurRad="177800" dist="50800" dir="16200000">
-              <a:srgbClr val="FF0090">
-                <a:alpha val="50000"/>
-              </a:srgbClr>
-            </a:outerShdw>
-          </a:effectLst>
-        </p:spPr>
-      </p:sp>
-      <p:sp>
-        <p:nvSpPr>
-          <p:cNvPr id="20" name="Text 18"/>
-          <p:cNvSpPr/>
-          <p:nvPr/>
-        </p:nvSpPr>
-        <p:spPr>
-          <a:xfrm>
-            <a:off x="6553048" y="2395728"/>
-            <a:ext cx="822960" cy="685800"/>
+        </p:spPr>
+      </p:sp>
+      <p:sp>
+        <p:nvSpPr>
+          <p:cNvPr id="21" name="Text 19"/>
+          <p:cNvSpPr/>
+          <p:nvPr/>
+        </p:nvSpPr>
+        <p:spPr>
+          <a:xfrm>
+            <a:off x="6553048" y="2313432"/>
+            <a:ext cx="777240" cy="777240"/>
           </a:xfrm>
           <a:prstGeom prst="rect">
             <a:avLst/>
@@ -6849,7 +7053,7 @@
               <a:buNone/>
             </a:pPr>
             <a:r>
-              <a:rPr lang="en-US" sz="3000" b="1" dirty="0">
+              <a:rPr lang="en-US" sz="2800" b="1" dirty="0">
                 <a:solidFill>
                   <a:srgbClr val="FFFFFF"/>
                 </a:solidFill>
@@ -6859,13 +7063,13 @@
               </a:rPr>
               <a:t>3</a:t>
             </a:r>
-            <a:endParaRPr lang="en-US" sz="3000" dirty="0"/>
-          </a:p>
-        </p:txBody>
-      </p:sp>
-      <p:sp>
-        <p:nvSpPr>
-          <p:cNvPr id="21" name="Text 19"/>
+            <a:endParaRPr lang="en-US" sz="2800" dirty="0"/>
+          </a:p>
+        </p:txBody>
+      </p:sp>
+      <p:sp>
+        <p:nvSpPr>
+          <p:cNvPr id="22" name="Text 20"/>
           <p:cNvSpPr/>
           <p:nvPr/>
         </p:nvSpPr>
@@ -6904,7 +7108,7 @@
       </p:sp>
       <p:sp>
         <p:nvSpPr>
-          <p:cNvPr id="22" name="Text 20"/>
+          <p:cNvPr id="23" name="Text 21"/>
           <p:cNvSpPr/>
           <p:nvPr/>
         </p:nvSpPr>
@@ -6943,7 +7147,7 @@
       </p:sp>
       <p:sp>
         <p:nvSpPr>
-          <p:cNvPr id="23" name="Text 21"/>
+          <p:cNvPr id="24" name="Text 22"/>
           <p:cNvSpPr/>
           <p:nvPr/>
         </p:nvSpPr>
@@ -6985,7 +7189,7 @@
       </p:sp>
       <p:sp>
         <p:nvSpPr>
-          <p:cNvPr id="24" name="Text 22"/>
+          <p:cNvPr id="25" name="Text 23"/>
           <p:cNvSpPr/>
           <p:nvPr/>
         </p:nvSpPr>
@@ -7024,7 +7228,7 @@
       </p:sp>
       <p:sp>
         <p:nvSpPr>
-          <p:cNvPr id="25" name="Shape 23"/>
+          <p:cNvPr id="26" name="Shape 24"/>
           <p:cNvSpPr/>
           <p:nvPr/>
         </p:nvSpPr>
@@ -7035,16 +7239,16 @@
           </a:xfrm>
           <a:prstGeom prst="roundRect">
             <a:avLst>
-              <a:gd name="adj" fmla="val 4895"/>
+              <a:gd name="adj" fmla="val 4545"/>
             </a:avLst>
           </a:prstGeom>
           <a:solidFill>
-            <a:srgbClr val="111114"/>
-          </a:solidFill>
-          <a:ln w="12700">
+            <a:srgbClr val="141419"/>
+          </a:solidFill>
+          <a:ln w="9525">
             <a:solidFill>
-              <a:srgbClr val="FF149A">
-                <a:alpha val="40000"/>
+              <a:srgbClr val="FFFFFF">
+                <a:alpha val="12000"/>
               </a:srgbClr>
             </a:solidFill>
             <a:prstDash val="solid"/>
@@ -7053,46 +7257,39 @@
       </p:sp>
       <p:sp>
         <p:nvSpPr>
-          <p:cNvPr id="26" name="Shape 24"/>
+          <p:cNvPr id="27" name="Shape 25"/>
           <p:cNvSpPr/>
           <p:nvPr/>
         </p:nvSpPr>
         <p:spPr>
           <a:xfrm>
             <a:off x="9442552" y="2331720"/>
-            <a:ext cx="822960" cy="822960"/>
+            <a:ext cx="777240" cy="777240"/>
           </a:xfrm>
           <a:prstGeom prst="ellipse">
             <a:avLst/>
           </a:prstGeom>
           <a:solidFill>
-            <a:srgbClr val="C8006A"/>
-          </a:solidFill>
-          <a:ln w="15875">
+            <a:srgbClr val="FF149A"/>
+          </a:solidFill>
+          <a:ln w="12700">
             <a:solidFill>
               <a:srgbClr val="FF3EA5"/>
             </a:solidFill>
             <a:prstDash val="solid"/>
           </a:ln>
-          <a:effectLst>
-            <a:outerShdw sx="100000" sy="100000" kx="0" ky="0" algn="bl" rotWithShape="0" blurRad="177800" dist="50800" dir="16200000">
-              <a:srgbClr val="FF0090">
-                <a:alpha val="50000"/>
-              </a:srgbClr>
-            </a:outerShdw>
-          </a:effectLst>
-        </p:spPr>
-      </p:sp>
-      <p:sp>
-        <p:nvSpPr>
-          <p:cNvPr id="27" name="Text 25"/>
-          <p:cNvSpPr/>
-          <p:nvPr/>
-        </p:nvSpPr>
-        <p:spPr>
-          <a:xfrm>
-            <a:off x="9442552" y="2395728"/>
-            <a:ext cx="822960" cy="685800"/>
+        </p:spPr>
+      </p:sp>
+      <p:sp>
+        <p:nvSpPr>
+          <p:cNvPr id="28" name="Text 26"/>
+          <p:cNvSpPr/>
+          <p:nvPr/>
+        </p:nvSpPr>
+        <p:spPr>
+          <a:xfrm>
+            <a:off x="9442552" y="2313432"/>
+            <a:ext cx="777240" cy="777240"/>
           </a:xfrm>
           <a:prstGeom prst="rect">
             <a:avLst/>
@@ -7108,7 +7305,7 @@
               <a:buNone/>
             </a:pPr>
             <a:r>
-              <a:rPr lang="en-US" sz="3000" b="1" dirty="0">
+              <a:rPr lang="en-US" sz="2800" b="1" dirty="0">
                 <a:solidFill>
                   <a:srgbClr val="FFFFFF"/>
                 </a:solidFill>
@@ -7118,13 +7315,13 @@
               </a:rPr>
               <a:t>4</a:t>
             </a:r>
-            <a:endParaRPr lang="en-US" sz="3000" dirty="0"/>
-          </a:p>
-        </p:txBody>
-      </p:sp>
-      <p:sp>
-        <p:nvSpPr>
-          <p:cNvPr id="28" name="Text 26"/>
+            <a:endParaRPr lang="en-US" sz="2800" dirty="0"/>
+          </a:p>
+        </p:txBody>
+      </p:sp>
+      <p:sp>
+        <p:nvSpPr>
+          <p:cNvPr id="29" name="Text 27"/>
           <p:cNvSpPr/>
           <p:nvPr/>
         </p:nvSpPr>
@@ -7163,7 +7360,7 @@
       </p:sp>
       <p:sp>
         <p:nvSpPr>
-          <p:cNvPr id="29" name="Text 27"/>
+          <p:cNvPr id="30" name="Text 28"/>
           <p:cNvSpPr/>
           <p:nvPr/>
         </p:nvSpPr>
@@ -7202,7 +7399,7 @@
       </p:sp>
       <p:sp>
         <p:nvSpPr>
-          <p:cNvPr id="30" name="Text 28"/>
+          <p:cNvPr id="31" name="Text 29"/>
           <p:cNvSpPr/>
           <p:nvPr/>
         </p:nvSpPr>
@@ -7283,14 +7480,34 @@
       </p:grpSpPr>
       <p:sp>
         <p:nvSpPr>
-          <p:cNvPr id="2" name="Text 0"/>
-          <p:cNvSpPr/>
-          <p:nvPr/>
-        </p:nvSpPr>
-        <p:spPr>
-          <a:xfrm>
-            <a:off x="640080" y="502920"/>
-            <a:ext cx="7315200" cy="274320"/>
+          <p:cNvPr id="2" name="Shape 0"/>
+          <p:cNvSpPr/>
+          <p:nvPr/>
+        </p:nvSpPr>
+        <p:spPr>
+          <a:xfrm>
+            <a:off x="640080" y="557784"/>
+            <a:ext cx="109728" cy="109728"/>
+          </a:xfrm>
+          <a:prstGeom prst="ellipse">
+            <a:avLst/>
+          </a:prstGeom>
+          <a:solidFill>
+            <a:srgbClr val="FF149A"/>
+          </a:solidFill>
+          <a:ln/>
+        </p:spPr>
+      </p:sp>
+      <p:sp>
+        <p:nvSpPr>
+          <p:cNvPr id="3" name="Text 1"/>
+          <p:cNvSpPr/>
+          <p:nvPr/>
+        </p:nvSpPr>
+        <p:spPr>
+          <a:xfrm>
+            <a:off x="877824" y="502920"/>
+            <a:ext cx="8229600" cy="274320"/>
           </a:xfrm>
           <a:prstGeom prst="rect">
             <a:avLst/>
@@ -7322,14 +7539,14 @@
       </p:sp>
       <p:sp>
         <p:nvSpPr>
-          <p:cNvPr id="3" name="Text 1"/>
-          <p:cNvSpPr/>
-          <p:nvPr/>
-        </p:nvSpPr>
-        <p:spPr>
-          <a:xfrm>
-            <a:off x="621792" y="777240"/>
-            <a:ext cx="9144000" cy="731520"/>
+          <p:cNvPr id="4" name="Text 2"/>
+          <p:cNvSpPr/>
+          <p:nvPr/>
+        </p:nvSpPr>
+        <p:spPr>
+          <a:xfrm>
+            <a:off x="603504" y="777240"/>
+            <a:ext cx="10058400" cy="822960"/>
           </a:xfrm>
           <a:prstGeom prst="rect">
             <a:avLst/>
@@ -7361,7 +7578,7 @@
       </p:sp>
       <p:sp>
         <p:nvSpPr>
-          <p:cNvPr id="4" name="Shape 2"/>
+          <p:cNvPr id="5" name="Shape 3"/>
           <p:cNvSpPr/>
           <p:nvPr/>
         </p:nvSpPr>
@@ -7372,16 +7589,16 @@
           </a:xfrm>
           <a:prstGeom prst="roundRect">
             <a:avLst>
-              <a:gd name="adj" fmla="val 7742"/>
+              <a:gd name="adj" fmla="val 8387"/>
             </a:avLst>
           </a:prstGeom>
           <a:solidFill>
-            <a:srgbClr val="111114"/>
+            <a:srgbClr val="141419"/>
           </a:solidFill>
           <a:ln w="9525">
             <a:solidFill>
               <a:srgbClr val="FFFFFF">
-                <a:alpha val="18000"/>
+                <a:alpha val="12000"/>
               </a:srgbClr>
             </a:solidFill>
             <a:prstDash val="solid"/>
@@ -7390,7 +7607,7 @@
       </p:sp>
       <p:sp>
         <p:nvSpPr>
-          <p:cNvPr id="5" name="Shape 3"/>
+          <p:cNvPr id="6" name="Shape 4"/>
           <p:cNvSpPr/>
           <p:nvPr/>
         </p:nvSpPr>
@@ -7405,24 +7622,12 @@
           <a:solidFill>
             <a:srgbClr val="FF149A"/>
           </a:solidFill>
-          <a:ln w="12700">
-            <a:solidFill>
-              <a:srgbClr val="FF3EA5"/>
-            </a:solidFill>
-            <a:prstDash val="solid"/>
-          </a:ln>
-          <a:effectLst>
-            <a:outerShdw sx="100000" sy="100000" kx="0" ky="0" algn="bl" rotWithShape="0" blurRad="177800" dist="50800" dir="16200000">
-              <a:srgbClr val="FF0090">
-                <a:alpha val="50000"/>
-              </a:srgbClr>
-            </a:outerShdw>
-          </a:effectLst>
-        </p:spPr>
-      </p:sp>
-      <p:sp>
-        <p:nvSpPr>
-          <p:cNvPr id="6" name="Text 4"/>
+          <a:ln/>
+        </p:spPr>
+      </p:sp>
+      <p:sp>
+        <p:nvSpPr>
+          <p:cNvPr id="7" name="Text 5"/>
           <p:cNvSpPr/>
           <p:nvPr/>
         </p:nvSpPr>
@@ -7461,7 +7666,7 @@
       </p:sp>
       <p:sp>
         <p:nvSpPr>
-          <p:cNvPr id="7" name="Text 5"/>
+          <p:cNvPr id="8" name="Text 6"/>
           <p:cNvSpPr/>
           <p:nvPr/>
         </p:nvSpPr>
@@ -7500,7 +7705,7 @@
       </p:sp>
       <p:sp>
         <p:nvSpPr>
-          <p:cNvPr id="8" name="Text 6"/>
+          <p:cNvPr id="9" name="Text 7"/>
           <p:cNvSpPr/>
           <p:nvPr/>
         </p:nvSpPr>
@@ -7542,7 +7747,7 @@
       </p:sp>
       <p:sp>
         <p:nvSpPr>
-          <p:cNvPr id="9" name="Shape 7"/>
+          <p:cNvPr id="10" name="Shape 8"/>
           <p:cNvSpPr/>
           <p:nvPr/>
         </p:nvSpPr>
@@ -7553,16 +7758,16 @@
           </a:xfrm>
           <a:prstGeom prst="roundRect">
             <a:avLst>
-              <a:gd name="adj" fmla="val 7742"/>
+              <a:gd name="adj" fmla="val 8387"/>
             </a:avLst>
           </a:prstGeom>
           <a:solidFill>
-            <a:srgbClr val="111114"/>
+            <a:srgbClr val="141419"/>
           </a:solidFill>
           <a:ln w="9525">
             <a:solidFill>
               <a:srgbClr val="FFFFFF">
-                <a:alpha val="18000"/>
+                <a:alpha val="12000"/>
               </a:srgbClr>
             </a:solidFill>
             <a:prstDash val="solid"/>
@@ -7571,7 +7776,7 @@
       </p:sp>
       <p:sp>
         <p:nvSpPr>
-          <p:cNvPr id="10" name="Shape 8"/>
+          <p:cNvPr id="11" name="Shape 9"/>
           <p:cNvSpPr/>
           <p:nvPr/>
         </p:nvSpPr>
@@ -7586,24 +7791,12 @@
           <a:solidFill>
             <a:srgbClr val="FF149A"/>
           </a:solidFill>
-          <a:ln w="12700">
-            <a:solidFill>
-              <a:srgbClr val="FF3EA5"/>
-            </a:solidFill>
-            <a:prstDash val="solid"/>
-          </a:ln>
-          <a:effectLst>
-            <a:outerShdw sx="100000" sy="100000" kx="0" ky="0" algn="bl" rotWithShape="0" blurRad="177800" dist="50800" dir="16200000">
-              <a:srgbClr val="FF0090">
-                <a:alpha val="50000"/>
-              </a:srgbClr>
-            </a:outerShdw>
-          </a:effectLst>
-        </p:spPr>
-      </p:sp>
-      <p:sp>
-        <p:nvSpPr>
-          <p:cNvPr id="11" name="Text 9"/>
+          <a:ln/>
+        </p:spPr>
+      </p:sp>
+      <p:sp>
+        <p:nvSpPr>
+          <p:cNvPr id="12" name="Text 10"/>
           <p:cNvSpPr/>
           <p:nvPr/>
         </p:nvSpPr>
@@ -7642,7 +7835,7 @@
       </p:sp>
       <p:sp>
         <p:nvSpPr>
-          <p:cNvPr id="12" name="Text 10"/>
+          <p:cNvPr id="13" name="Text 11"/>
           <p:cNvSpPr/>
           <p:nvPr/>
         </p:nvSpPr>
@@ -7681,7 +7874,7 @@
       </p:sp>
       <p:sp>
         <p:nvSpPr>
-          <p:cNvPr id="13" name="Text 11"/>
+          <p:cNvPr id="14" name="Text 12"/>
           <p:cNvSpPr/>
           <p:nvPr/>
         </p:nvSpPr>
@@ -7723,7 +7916,7 @@
       </p:sp>
       <p:sp>
         <p:nvSpPr>
-          <p:cNvPr id="14" name="Shape 12"/>
+          <p:cNvPr id="15" name="Shape 13"/>
           <p:cNvSpPr/>
           <p:nvPr/>
         </p:nvSpPr>
@@ -7734,16 +7927,16 @@
           </a:xfrm>
           <a:prstGeom prst="roundRect">
             <a:avLst>
-              <a:gd name="adj" fmla="val 7742"/>
+              <a:gd name="adj" fmla="val 8387"/>
             </a:avLst>
           </a:prstGeom>
           <a:solidFill>
-            <a:srgbClr val="111114"/>
+            <a:srgbClr val="141419"/>
           </a:solidFill>
           <a:ln w="9525">
             <a:solidFill>
               <a:srgbClr val="FFFFFF">
-                <a:alpha val="18000"/>
+                <a:alpha val="12000"/>
               </a:srgbClr>
             </a:solidFill>
             <a:prstDash val="solid"/>
@@ -7752,7 +7945,7 @@
       </p:sp>
       <p:sp>
         <p:nvSpPr>
-          <p:cNvPr id="15" name="Shape 13"/>
+          <p:cNvPr id="16" name="Shape 14"/>
           <p:cNvSpPr/>
           <p:nvPr/>
         </p:nvSpPr>
@@ -7767,24 +7960,12 @@
           <a:solidFill>
             <a:srgbClr val="FF149A"/>
           </a:solidFill>
-          <a:ln w="12700">
-            <a:solidFill>
-              <a:srgbClr val="FF3EA5"/>
-            </a:solidFill>
-            <a:prstDash val="solid"/>
-          </a:ln>
-          <a:effectLst>
-            <a:outerShdw sx="100000" sy="100000" kx="0" ky="0" algn="bl" rotWithShape="0" blurRad="177800" dist="50800" dir="16200000">
-              <a:srgbClr val="FF0090">
-                <a:alpha val="50000"/>
-              </a:srgbClr>
-            </a:outerShdw>
-          </a:effectLst>
-        </p:spPr>
-      </p:sp>
-      <p:sp>
-        <p:nvSpPr>
-          <p:cNvPr id="16" name="Text 14"/>
+          <a:ln/>
+        </p:spPr>
+      </p:sp>
+      <p:sp>
+        <p:nvSpPr>
+          <p:cNvPr id="17" name="Text 15"/>
           <p:cNvSpPr/>
           <p:nvPr/>
         </p:nvSpPr>
@@ -7823,7 +8004,7 @@
       </p:sp>
       <p:sp>
         <p:nvSpPr>
-          <p:cNvPr id="17" name="Text 15"/>
+          <p:cNvPr id="18" name="Text 16"/>
           <p:cNvSpPr/>
           <p:nvPr/>
         </p:nvSpPr>
@@ -7862,7 +8043,7 @@
       </p:sp>
       <p:sp>
         <p:nvSpPr>
-          <p:cNvPr id="18" name="Text 16"/>
+          <p:cNvPr id="19" name="Text 17"/>
           <p:cNvSpPr/>
           <p:nvPr/>
         </p:nvSpPr>
@@ -7904,7 +8085,7 @@
       </p:sp>
       <p:sp>
         <p:nvSpPr>
-          <p:cNvPr id="19" name="Shape 17"/>
+          <p:cNvPr id="20" name="Shape 18"/>
           <p:cNvSpPr/>
           <p:nvPr/>
         </p:nvSpPr>
@@ -7915,16 +8096,16 @@
           </a:xfrm>
           <a:prstGeom prst="roundRect">
             <a:avLst>
-              <a:gd name="adj" fmla="val 7742"/>
+              <a:gd name="adj" fmla="val 8387"/>
             </a:avLst>
           </a:prstGeom>
           <a:solidFill>
-            <a:srgbClr val="111114"/>
+            <a:srgbClr val="141419"/>
           </a:solidFill>
           <a:ln w="9525">
             <a:solidFill>
               <a:srgbClr val="FFFFFF">
-                <a:alpha val="18000"/>
+                <a:alpha val="12000"/>
               </a:srgbClr>
             </a:solidFill>
             <a:prstDash val="solid"/>
@@ -7933,7 +8114,7 @@
       </p:sp>
       <p:sp>
         <p:nvSpPr>
-          <p:cNvPr id="20" name="Shape 18"/>
+          <p:cNvPr id="21" name="Shape 19"/>
           <p:cNvSpPr/>
           <p:nvPr/>
         </p:nvSpPr>
@@ -7948,24 +8129,12 @@
           <a:solidFill>
             <a:srgbClr val="FF149A"/>
           </a:solidFill>
-          <a:ln w="12700">
-            <a:solidFill>
-              <a:srgbClr val="FF3EA5"/>
-            </a:solidFill>
-            <a:prstDash val="solid"/>
-          </a:ln>
-          <a:effectLst>
-            <a:outerShdw sx="100000" sy="100000" kx="0" ky="0" algn="bl" rotWithShape="0" blurRad="177800" dist="50800" dir="16200000">
-              <a:srgbClr val="FF0090">
-                <a:alpha val="50000"/>
-              </a:srgbClr>
-            </a:outerShdw>
-          </a:effectLst>
-        </p:spPr>
-      </p:sp>
-      <p:sp>
-        <p:nvSpPr>
-          <p:cNvPr id="21" name="Text 19"/>
+          <a:ln/>
+        </p:spPr>
+      </p:sp>
+      <p:sp>
+        <p:nvSpPr>
+          <p:cNvPr id="22" name="Text 20"/>
           <p:cNvSpPr/>
           <p:nvPr/>
         </p:nvSpPr>
@@ -8004,7 +8173,7 @@
       </p:sp>
       <p:sp>
         <p:nvSpPr>
-          <p:cNvPr id="22" name="Text 20"/>
+          <p:cNvPr id="23" name="Text 21"/>
           <p:cNvSpPr/>
           <p:nvPr/>
         </p:nvSpPr>
@@ -8043,7 +8212,7 @@
       </p:sp>
       <p:sp>
         <p:nvSpPr>
-          <p:cNvPr id="23" name="Text 21"/>
+          <p:cNvPr id="24" name="Text 22"/>
           <p:cNvSpPr/>
           <p:nvPr/>
         </p:nvSpPr>
@@ -8085,7 +8254,7 @@
       </p:sp>
       <p:sp>
         <p:nvSpPr>
-          <p:cNvPr id="24" name="Shape 22"/>
+          <p:cNvPr id="25" name="Shape 23"/>
           <p:cNvSpPr/>
           <p:nvPr/>
         </p:nvSpPr>
@@ -8096,16 +8265,16 @@
           </a:xfrm>
           <a:prstGeom prst="roundRect">
             <a:avLst>
-              <a:gd name="adj" fmla="val 7742"/>
+              <a:gd name="adj" fmla="val 8387"/>
             </a:avLst>
           </a:prstGeom>
           <a:solidFill>
-            <a:srgbClr val="111114"/>
+            <a:srgbClr val="141419"/>
           </a:solidFill>
           <a:ln w="9525">
             <a:solidFill>
               <a:srgbClr val="FFFFFF">
-                <a:alpha val="18000"/>
+                <a:alpha val="12000"/>
               </a:srgbClr>
             </a:solidFill>
             <a:prstDash val="solid"/>
@@ -8114,7 +8283,7 @@
       </p:sp>
       <p:sp>
         <p:nvSpPr>
-          <p:cNvPr id="25" name="Shape 23"/>
+          <p:cNvPr id="26" name="Shape 24"/>
           <p:cNvSpPr/>
           <p:nvPr/>
         </p:nvSpPr>
@@ -8129,24 +8298,12 @@
           <a:solidFill>
             <a:srgbClr val="FF149A"/>
           </a:solidFill>
-          <a:ln w="12700">
-            <a:solidFill>
-              <a:srgbClr val="FF3EA5"/>
-            </a:solidFill>
-            <a:prstDash val="solid"/>
-          </a:ln>
-          <a:effectLst>
-            <a:outerShdw sx="100000" sy="100000" kx="0" ky="0" algn="bl" rotWithShape="0" blurRad="177800" dist="50800" dir="16200000">
-              <a:srgbClr val="FF0090">
-                <a:alpha val="50000"/>
-              </a:srgbClr>
-            </a:outerShdw>
-          </a:effectLst>
-        </p:spPr>
-      </p:sp>
-      <p:sp>
-        <p:nvSpPr>
-          <p:cNvPr id="26" name="Text 24"/>
+          <a:ln/>
+        </p:spPr>
+      </p:sp>
+      <p:sp>
+        <p:nvSpPr>
+          <p:cNvPr id="27" name="Text 25"/>
           <p:cNvSpPr/>
           <p:nvPr/>
         </p:nvSpPr>
@@ -8185,7 +8342,7 @@
       </p:sp>
       <p:sp>
         <p:nvSpPr>
-          <p:cNvPr id="27" name="Text 25"/>
+          <p:cNvPr id="28" name="Text 26"/>
           <p:cNvSpPr/>
           <p:nvPr/>
         </p:nvSpPr>
@@ -8224,7 +8381,7 @@
       </p:sp>
       <p:sp>
         <p:nvSpPr>
-          <p:cNvPr id="28" name="Text 26"/>
+          <p:cNvPr id="29" name="Text 27"/>
           <p:cNvSpPr/>
           <p:nvPr/>
         </p:nvSpPr>
@@ -8266,7 +8423,7 @@
       </p:sp>
       <p:sp>
         <p:nvSpPr>
-          <p:cNvPr id="29" name="Shape 27"/>
+          <p:cNvPr id="30" name="Shape 28"/>
           <p:cNvSpPr/>
           <p:nvPr/>
         </p:nvSpPr>
@@ -8277,16 +8434,16 @@
           </a:xfrm>
           <a:prstGeom prst="roundRect">
             <a:avLst>
-              <a:gd name="adj" fmla="val 7742"/>
+              <a:gd name="adj" fmla="val 8387"/>
             </a:avLst>
           </a:prstGeom>
           <a:solidFill>
-            <a:srgbClr val="111114"/>
+            <a:srgbClr val="141419"/>
           </a:solidFill>
           <a:ln w="9525">
             <a:solidFill>
               <a:srgbClr val="FFFFFF">
-                <a:alpha val="18000"/>
+                <a:alpha val="12000"/>
               </a:srgbClr>
             </a:solidFill>
             <a:prstDash val="solid"/>
@@ -8295,7 +8452,7 @@
       </p:sp>
       <p:sp>
         <p:nvSpPr>
-          <p:cNvPr id="30" name="Shape 28"/>
+          <p:cNvPr id="31" name="Shape 29"/>
           <p:cNvSpPr/>
           <p:nvPr/>
         </p:nvSpPr>
@@ -8310,24 +8467,12 @@
           <a:solidFill>
             <a:srgbClr val="FF149A"/>
           </a:solidFill>
-          <a:ln w="12700">
-            <a:solidFill>
-              <a:srgbClr val="FF3EA5"/>
-            </a:solidFill>
-            <a:prstDash val="solid"/>
-          </a:ln>
-          <a:effectLst>
-            <a:outerShdw sx="100000" sy="100000" kx="0" ky="0" algn="bl" rotWithShape="0" blurRad="177800" dist="50800" dir="16200000">
-              <a:srgbClr val="FF0090">
-                <a:alpha val="50000"/>
-              </a:srgbClr>
-            </a:outerShdw>
-          </a:effectLst>
-        </p:spPr>
-      </p:sp>
-      <p:sp>
-        <p:nvSpPr>
-          <p:cNvPr id="31" name="Text 29"/>
+          <a:ln/>
+        </p:spPr>
+      </p:sp>
+      <p:sp>
+        <p:nvSpPr>
+          <p:cNvPr id="32" name="Text 30"/>
           <p:cNvSpPr/>
           <p:nvPr/>
         </p:nvSpPr>
@@ -8366,7 +8511,7 @@
       </p:sp>
       <p:sp>
         <p:nvSpPr>
-          <p:cNvPr id="32" name="Text 30"/>
+          <p:cNvPr id="33" name="Text 31"/>
           <p:cNvSpPr/>
           <p:nvPr/>
         </p:nvSpPr>
@@ -8405,7 +8550,7 @@
       </p:sp>
       <p:sp>
         <p:nvSpPr>
-          <p:cNvPr id="33" name="Text 31"/>
+          <p:cNvPr id="34" name="Text 32"/>
           <p:cNvSpPr/>
           <p:nvPr/>
         </p:nvSpPr>
@@ -8486,14 +8631,34 @@
       </p:grpSpPr>
       <p:sp>
         <p:nvSpPr>
-          <p:cNvPr id="2" name="Text 0"/>
-          <p:cNvSpPr/>
-          <p:nvPr/>
-        </p:nvSpPr>
-        <p:spPr>
-          <a:xfrm>
-            <a:off x="822960" y="1737360"/>
-            <a:ext cx="7315200" cy="274320"/>
+          <p:cNvPr id="2" name="Shape 0"/>
+          <p:cNvSpPr/>
+          <p:nvPr/>
+        </p:nvSpPr>
+        <p:spPr>
+          <a:xfrm>
+            <a:off x="822960" y="1746504"/>
+            <a:ext cx="109728" cy="109728"/>
+          </a:xfrm>
+          <a:prstGeom prst="ellipse">
+            <a:avLst/>
+          </a:prstGeom>
+          <a:solidFill>
+            <a:srgbClr val="FF149A"/>
+          </a:solidFill>
+          <a:ln/>
+        </p:spPr>
+      </p:sp>
+      <p:sp>
+        <p:nvSpPr>
+          <p:cNvPr id="3" name="Text 1"/>
+          <p:cNvSpPr/>
+          <p:nvPr/>
+        </p:nvSpPr>
+        <p:spPr>
+          <a:xfrm>
+            <a:off x="1060704" y="1691640"/>
+            <a:ext cx="8229600" cy="274320"/>
           </a:xfrm>
           <a:prstGeom prst="rect">
             <a:avLst/>
@@ -8525,13 +8690,13 @@
       </p:sp>
       <p:sp>
         <p:nvSpPr>
-          <p:cNvPr id="3" name="Text 1"/>
-          <p:cNvSpPr/>
-          <p:nvPr/>
-        </p:nvSpPr>
-        <p:spPr>
-          <a:xfrm>
-            <a:off x="777240" y="2103120"/>
+          <p:cNvPr id="4" name="Text 2"/>
+          <p:cNvSpPr/>
+          <p:nvPr/>
+        </p:nvSpPr>
+        <p:spPr>
+          <a:xfrm>
+            <a:off x="777240" y="2057400"/>
             <a:ext cx="8229600" cy="1737360"/>
           </a:xfrm>
           <a:prstGeom prst="rect">
@@ -8587,7 +8752,7 @@
       </p:sp>
       <p:sp>
         <p:nvSpPr>
-          <p:cNvPr id="4" name="Text 2"/>
+          <p:cNvPr id="5" name="Text 3"/>
           <p:cNvSpPr/>
           <p:nvPr/>
         </p:nvSpPr>
@@ -8612,7 +8777,7 @@
             <a:r>
               <a:rPr lang="en-US" sz="1700" dirty="0">
                 <a:solidFill>
-                  <a:srgbClr val="D8D8DC"/>
+                  <a:srgbClr val="D7D7DC"/>
                 </a:solidFill>
                 <a:latin typeface="Arial" pitchFamily="34" charset="0"/>
                 <a:ea typeface="Arial" pitchFamily="34" charset="-122"/>
@@ -8626,7 +8791,7 @@
       </p:sp>
       <p:sp>
         <p:nvSpPr>
-          <p:cNvPr id="5" name="Shape 3"/>
+          <p:cNvPr id="6" name="Shape 4"/>
           <p:cNvSpPr/>
           <p:nvPr/>
         </p:nvSpPr>
@@ -8637,16 +8802,16 @@
           </a:xfrm>
           <a:prstGeom prst="roundRect">
             <a:avLst>
-              <a:gd name="adj" fmla="val 13333"/>
+              <a:gd name="adj" fmla="val 14444"/>
             </a:avLst>
           </a:prstGeom>
           <a:solidFill>
-            <a:srgbClr val="111114"/>
+            <a:srgbClr val="141419"/>
           </a:solidFill>
           <a:ln w="9525">
             <a:solidFill>
               <a:srgbClr val="FFFFFF">
-                <a:alpha val="18000"/>
+                <a:alpha val="12000"/>
               </a:srgbClr>
             </a:solidFill>
             <a:prstDash val="solid"/>
@@ -8655,7 +8820,7 @@
       </p:sp>
       <p:sp>
         <p:nvSpPr>
-          <p:cNvPr id="6" name="Text 4"/>
+          <p:cNvPr id="7" name="Text 5"/>
           <p:cNvSpPr/>
           <p:nvPr/>
         </p:nvSpPr>
@@ -8694,7 +8859,7 @@
       </p:sp>
       <p:sp>
         <p:nvSpPr>
-          <p:cNvPr id="7" name="Shape 5"/>
+          <p:cNvPr id="8" name="Shape 6"/>
           <p:cNvSpPr/>
           <p:nvPr/>
         </p:nvSpPr>
@@ -8705,16 +8870,16 @@
           </a:xfrm>
           <a:prstGeom prst="roundRect">
             <a:avLst>
-              <a:gd name="adj" fmla="val 13333"/>
+              <a:gd name="adj" fmla="val 14444"/>
             </a:avLst>
           </a:prstGeom>
           <a:solidFill>
-            <a:srgbClr val="111114"/>
+            <a:srgbClr val="141419"/>
           </a:solidFill>
           <a:ln w="9525">
             <a:solidFill>
               <a:srgbClr val="FFFFFF">
-                <a:alpha val="18000"/>
+                <a:alpha val="12000"/>
               </a:srgbClr>
             </a:solidFill>
             <a:prstDash val="solid"/>
@@ -8723,7 +8888,7 @@
       </p:sp>
       <p:sp>
         <p:nvSpPr>
-          <p:cNvPr id="8" name="Text 6"/>
+          <p:cNvPr id="9" name="Text 7"/>
           <p:cNvSpPr/>
           <p:nvPr/>
         </p:nvSpPr>
